--- a/lci_esophagectomy.pptx
+++ b/lci_esophagectomy.pptx
@@ -59,6 +59,9 @@
     <p:sldId id="307" r:id="rId53"/>
     <p:sldId id="308" r:id="rId54"/>
     <p:sldId id="309" r:id="rId55"/>
+    <p:sldId id="310" r:id="rId56"/>
+    <p:sldId id="311" r:id="rId57"/>
+    <p:sldId id="312" r:id="rId58"/>
   </p:sldIdLst>
   <p:sldSz cx="9144000" cy="5143500" type="screen16x9"/>
   <p:notesSz cx="6858000" cy="9144000"/>
@@ -3597,14 +3600,69 @@
             </a:pPr>
             <a:r>
               <a:rPr/>
-              <a:t>McKeown Esophagectomy</a:t>
-            </a:r>
-          </a:p>
-        </p:txBody>
-      </p:sp>
+              <a:t>Minimally-invasive Ivor Lewis</a:t>
+            </a:r>
+          </a:p>
+        </p:txBody>
+      </p:sp>
+      <mc:AlternateContent xmlns:mc="http://schemas.openxmlformats.org/markup-compatibility/2006">
+        <mc:Choice xmlns:a14="http://schemas.microsoft.com/office/drawing/2010/main" Requires="a14">
+          <p:sp>
+            <p:nvSpPr>
+              <p:cNvPr id="3" name="Content Placeholder 2"/>
+              <p:cNvSpPr>
+                <a:spLocks noGrp="1"/>
+              </p:cNvSpPr>
+              <p:nvPr>
+                <p:ph idx="1" sz="half"/>
+              </p:nvPr>
+            </p:nvSpPr>
+            <p:spPr/>
+            <p:txBody>
+              <a:bodyPr/>
+              <a:lstStyle/>
+              <a:p>
+                <a:pPr lvl="0"/>
+                <a:r>
+                  <a:rPr/>
+                  <a:t>Small incisions abdomen and chest</a:t>
+                </a:r>
+              </a:p>
+              <a:p>
+                <a:pPr lvl="0"/>
+                <a:r>
+                  <a:rPr/>
+                  <a:t>Surgical telescope and instruments</a:t>
+                </a:r>
+              </a:p>
+              <a:p>
+                <a:pPr lvl="0"/>
+                <a:r>
+                  <a:rPr/>
+                  <a:t>Smaller incisions </a:t>
+                </a:r>
+                <a14:m>
+                  <m:oMath xmlns:m="http://schemas.openxmlformats.org/officeDocument/2006/math">
+                    <m:r>
+                      <m:rPr>
+                        <m:sty m:val="p"/>
+                      </m:rPr>
+                      <m:t>→</m:t>
+                    </m:r>
+                  </m:oMath>
+                </a14:m>
+                <a:r>
+                  <a:rPr/>
+                  <a:t> faster recovery and less discomfort</a:t>
+                </a:r>
+              </a:p>
+            </p:txBody>
+          </p:sp>
+        </mc:Choice>
+      </mc:AlternateContent>
       <p:pic>
         <p:nvPicPr>
-          <p:cNvPr descr="images/Eso_ResectionTotalArtboard.png" id="0" name="Picture 1"/>
+          <p:cNvPr descr="images/MIE_IvorLewisArtboard.png" id="0" name="Picture 1"/>
           <p:cNvPicPr>
             <a:picLocks noGrp="1" noChangeAspect="1"/>
           </p:cNvPicPr>
@@ -3612,36 +3670,6 @@
         </p:nvPicPr>
         <p:blipFill>
           <a:blip r:embed="rId2"/>
-          <a:stretch>
-            <a:fillRect/>
-          </a:stretch>
-        </p:blipFill>
-        <p:spPr bwMode="auto">
-          <a:xfrm>
-            <a:off x="571500" y="1193800"/>
-            <a:ext cx="3632200" cy="3733800"/>
-          </a:xfrm>
-          <a:prstGeom prst="rect">
-            <a:avLst/>
-          </a:prstGeom>
-          <a:noFill/>
-          <a:ln w="9525">
-            <a:noFill/>
-            <a:headEnd/>
-            <a:tailEnd/>
-          </a:ln>
-        </p:spPr>
-      </p:pic>
-      <p:pic>
-        <p:nvPicPr>
-          <p:cNvPr descr="images/Eso_MIE_McKeownArtboard.png" id="0" name="Picture 1"/>
-          <p:cNvPicPr>
-            <a:picLocks noGrp="1" noChangeAspect="1"/>
-          </p:cNvPicPr>
-          <p:nvPr/>
-        </p:nvPicPr>
-        <p:blipFill>
-          <a:blip r:embed="rId3"/>
           <a:stretch>
             <a:fillRect/>
           </a:stretch>
@@ -3696,20 +3724,20 @@
         </p:nvSpPr>
         <p:spPr>
           <a:xfrm>
-            <a:off x="284309" y="205979"/>
-            <a:ext cx="8552330" cy="662317"/>
-          </a:xfrm>
-        </p:spPr>
-        <p:txBody>
-          <a:bodyPr/>
-          <a:lstStyle/>
-          <a:p>
-            <a:pPr lvl="0" indent="0" marL="0">
-              <a:buNone/>
-            </a:pPr>
-            <a:r>
-              <a:rPr/>
-              <a:t>Risks of Esophagectomy</a:t>
+            <a:off x="315045" y="205979"/>
+            <a:ext cx="8529278" cy="857250"/>
+          </a:xfrm>
+        </p:spPr>
+        <p:txBody>
+          <a:bodyPr/>
+          <a:lstStyle/>
+          <a:p>
+            <a:pPr lvl="0" indent="0" marL="0">
+              <a:buNone/>
+            </a:pPr>
+            <a:r>
+              <a:rPr/>
+              <a:t>Open Ivor Lewis</a:t>
             </a:r>
           </a:p>
         </p:txBody>
@@ -3721,7 +3749,7 @@
             <a:spLocks noGrp="1"/>
           </p:cNvSpPr>
           <p:nvPr>
-            <p:ph idx="1"/>
+            <p:ph idx="1" sz="half"/>
           </p:nvPr>
         </p:nvSpPr>
         <p:spPr/>
@@ -3734,34 +3762,50 @@
             </a:pPr>
             <a:r>
               <a:rPr/>
-              <a:t>Esophagectomy is a complex operation, with a real risk of complications.</a:t>
-            </a:r>
-          </a:p>
-          <a:p>
-            <a:pPr lvl="0" indent="0" marL="0">
-              <a:buNone/>
-            </a:pPr>
-            <a:r>
-              <a:rPr/>
-              <a:t>Two significant complications:</a:t>
-            </a:r>
-          </a:p>
-          <a:p>
-            <a:pPr lvl="0"/>
-            <a:r>
-              <a:rPr/>
-              <a:t>Anastomotic leak</a:t>
-            </a:r>
-          </a:p>
-          <a:p>
-            <a:pPr lvl="0"/>
-            <a:r>
-              <a:rPr/>
-              <a:t>Pneumonia</a:t>
-            </a:r>
-          </a:p>
-        </p:txBody>
-      </p:sp>
+              <a:t>Mininally-invasive approach feasible in 95% of cases</a:t>
+            </a:r>
+          </a:p>
+          <a:p>
+            <a:pPr lvl="0" indent="0" marL="0">
+              <a:buNone/>
+            </a:pPr>
+            <a:r>
+              <a:rPr/>
+              <a:t>In some cases, an open approach is still necessary.</a:t>
+            </a:r>
+          </a:p>
+        </p:txBody>
+      </p:sp>
+      <p:pic>
+        <p:nvPicPr>
+          <p:cNvPr descr="images/IvorLewisArtboard.png" id="0" name="Picture 1"/>
+          <p:cNvPicPr>
+            <a:picLocks noGrp="1" noChangeAspect="1"/>
+          </p:cNvPicPr>
+          <p:nvPr/>
+        </p:nvPicPr>
+        <p:blipFill>
+          <a:blip r:embed="rId2"/>
+          <a:stretch>
+            <a:fillRect/>
+          </a:stretch>
+        </p:blipFill>
+        <p:spPr bwMode="auto">
+          <a:xfrm>
+            <a:off x="4914900" y="1193800"/>
+            <a:ext cx="3632200" cy="3733800"/>
+          </a:xfrm>
+          <a:prstGeom prst="rect">
+            <a:avLst/>
+          </a:prstGeom>
+          <a:noFill/>
+          <a:ln w="9525">
+            <a:noFill/>
+            <a:headEnd/>
+            <a:tailEnd/>
+          </a:ln>
+        </p:spPr>
+      </p:pic>
     </p:spTree>
   </p:cSld>
 </p:sld>
@@ -3809,7 +3853,7 @@
             </a:pPr>
             <a:r>
               <a:rPr/>
-              <a:t>Anastomotic Leak</a:t>
+              <a:t>Total Esophagectomy</a:t>
             </a:r>
           </a:p>
         </p:txBody>
@@ -3834,14 +3878,23 @@
             </a:pPr>
             <a:r>
               <a:rPr/>
-              <a:t>The anastomosis is surgical connection between the esophagus and the stomach.</a:t>
+              <a:t>For patients with tumors in the upper esophagus, we need to remove more of the esophagus</a:t>
+            </a:r>
+          </a:p>
+          <a:p>
+            <a:pPr lvl="0" indent="0" marL="0">
+              <a:buNone/>
+            </a:pPr>
+            <a:r>
+              <a:rPr/>
+              <a:t>We need to remove the whole esophagus, including the portion in the neck</a:t>
             </a:r>
           </a:p>
         </p:txBody>
       </p:sp>
       <p:pic>
         <p:nvPicPr>
-          <p:cNvPr descr="images/Eso_IvorLewis_Anastomosis.png" id="0" name="Picture 1"/>
+          <p:cNvPr descr="images/Eso_ProxTumorArtboard.png" id="0" name="Picture 1"/>
           <p:cNvPicPr>
             <a:picLocks noGrp="1" noChangeAspect="1"/>
           </p:cNvPicPr>
@@ -3916,60 +3969,14 @@
             </a:pPr>
             <a:r>
               <a:rPr/>
-              <a:t>Anastomotic Leak</a:t>
-            </a:r>
-          </a:p>
-        </p:txBody>
-      </p:sp>
-      <p:sp>
-        <p:nvSpPr>
-          <p:cNvPr id="3" name="Content Placeholder 2"/>
-          <p:cNvSpPr>
-            <a:spLocks noGrp="1"/>
-          </p:cNvSpPr>
-          <p:nvPr>
-            <p:ph idx="1" sz="half"/>
-          </p:nvPr>
-        </p:nvSpPr>
-        <p:spPr/>
-        <p:txBody>
-          <a:bodyPr/>
-          <a:lstStyle/>
-          <a:p>
-            <a:pPr lvl="0" indent="0" marL="0">
-              <a:buNone/>
-            </a:pPr>
-            <a:r>
-              <a:rPr/>
-              <a:t>If healing doesn’t occur:</a:t>
-            </a:r>
-          </a:p>
-          <a:p>
-            <a:pPr lvl="0"/>
-            <a:r>
-              <a:rPr/>
-              <a:t>Leakage of fluid from the esophagus</a:t>
-            </a:r>
-          </a:p>
-          <a:p>
-            <a:pPr lvl="0"/>
-            <a:r>
-              <a:rPr/>
-              <a:t>Infection in the space between the lungs</a:t>
-            </a:r>
-          </a:p>
-          <a:p>
-            <a:pPr lvl="0"/>
-            <a:r>
-              <a:rPr/>
-              <a:t>Requires additional time in the hospital</a:t>
+              <a:t>McKeown Esophagectomy</a:t>
             </a:r>
           </a:p>
         </p:txBody>
       </p:sp>
       <p:pic>
         <p:nvPicPr>
-          <p:cNvPr descr="images/Eso_IvorLewis_Leak.png" id="0" name="Picture 1"/>
+          <p:cNvPr descr="images/Eso_ResectionTotalArtboard.png" id="0" name="Picture 1"/>
           <p:cNvPicPr>
             <a:picLocks noGrp="1" noChangeAspect="1"/>
           </p:cNvPicPr>
@@ -3977,6 +3984,36 @@
         </p:nvPicPr>
         <p:blipFill>
           <a:blip r:embed="rId2"/>
+          <a:stretch>
+            <a:fillRect/>
+          </a:stretch>
+        </p:blipFill>
+        <p:spPr bwMode="auto">
+          <a:xfrm>
+            <a:off x="571500" y="1193800"/>
+            <a:ext cx="3632200" cy="3733800"/>
+          </a:xfrm>
+          <a:prstGeom prst="rect">
+            <a:avLst/>
+          </a:prstGeom>
+          <a:noFill/>
+          <a:ln w="9525">
+            <a:noFill/>
+            <a:headEnd/>
+            <a:tailEnd/>
+          </a:ln>
+        </p:spPr>
+      </p:pic>
+      <p:pic>
+        <p:nvPicPr>
+          <p:cNvPr descr="images/Eso_MIE_McKeownArtboard.png" id="0" name="Picture 1"/>
+          <p:cNvPicPr>
+            <a:picLocks noGrp="1" noChangeAspect="1"/>
+          </p:cNvPicPr>
+          <p:nvPr/>
+        </p:nvPicPr>
+        <p:blipFill>
+          <a:blip r:embed="rId3"/>
           <a:stretch>
             <a:fillRect/>
           </a:stretch>
@@ -4031,20 +4068,20 @@
         </p:nvSpPr>
         <p:spPr>
           <a:xfrm>
-            <a:off x="315045" y="205979"/>
-            <a:ext cx="8529278" cy="857250"/>
-          </a:xfrm>
-        </p:spPr>
-        <p:txBody>
-          <a:bodyPr/>
-          <a:lstStyle/>
-          <a:p>
-            <a:pPr lvl="0" indent="0" marL="0">
-              <a:buNone/>
-            </a:pPr>
-            <a:r>
-              <a:rPr/>
-              <a:t>Anastomotic Leak</a:t>
+            <a:off x="284309" y="205979"/>
+            <a:ext cx="8552330" cy="662317"/>
+          </a:xfrm>
+        </p:spPr>
+        <p:txBody>
+          <a:bodyPr/>
+          <a:lstStyle/>
+          <a:p>
+            <a:pPr lvl="0" indent="0" marL="0">
+              <a:buNone/>
+            </a:pPr>
+            <a:r>
+              <a:rPr/>
+              <a:t>Risks of Esophagectomy</a:t>
             </a:r>
           </a:p>
         </p:txBody>
@@ -4056,7 +4093,7 @@
             <a:spLocks noGrp="1"/>
           </p:cNvSpPr>
           <p:nvPr>
-            <p:ph idx="1" sz="half"/>
+            <p:ph idx="1"/>
           </p:nvPr>
         </p:nvSpPr>
         <p:spPr/>
@@ -4069,62 +4106,34 @@
             </a:pPr>
             <a:r>
               <a:rPr/>
-              <a:t>If leak occurs:</a:t>
-            </a:r>
-          </a:p>
-          <a:p>
-            <a:pPr lvl="0"/>
-            <a:r>
-              <a:rPr/>
-              <a:t>Some leaks will seal</a:t>
-            </a:r>
-          </a:p>
-          <a:p>
-            <a:pPr lvl="0"/>
-            <a:r>
-              <a:rPr/>
-              <a:t>Stent may be required to help healing</a:t>
-            </a:r>
-          </a:p>
-          <a:p>
-            <a:pPr lvl="0"/>
-            <a:r>
-              <a:rPr/>
-              <a:t>Occasionally additional surgey is required</a:t>
-            </a:r>
-          </a:p>
-        </p:txBody>
-      </p:sp>
-      <p:pic>
-        <p:nvPicPr>
-          <p:cNvPr descr="images/Eso_IvorLewis_Leak.png" id="0" name="Picture 1"/>
-          <p:cNvPicPr>
-            <a:picLocks noGrp="1" noChangeAspect="1"/>
-          </p:cNvPicPr>
-          <p:nvPr/>
-        </p:nvPicPr>
-        <p:blipFill>
-          <a:blip r:embed="rId2"/>
-          <a:stretch>
-            <a:fillRect/>
-          </a:stretch>
-        </p:blipFill>
-        <p:spPr bwMode="auto">
-          <a:xfrm>
-            <a:off x="4914900" y="1193800"/>
-            <a:ext cx="3632200" cy="3733800"/>
-          </a:xfrm>
-          <a:prstGeom prst="rect">
-            <a:avLst/>
-          </a:prstGeom>
-          <a:noFill/>
-          <a:ln w="9525">
-            <a:noFill/>
-            <a:headEnd/>
-            <a:tailEnd/>
-          </a:ln>
-        </p:spPr>
-      </p:pic>
+              <a:t>Esophagectomy is a complex operation, with a real risk of complications.</a:t>
+            </a:r>
+          </a:p>
+          <a:p>
+            <a:pPr lvl="0" indent="0" marL="0">
+              <a:buNone/>
+            </a:pPr>
+            <a:r>
+              <a:rPr/>
+              <a:t>Two significant complications:</a:t>
+            </a:r>
+          </a:p>
+          <a:p>
+            <a:pPr lvl="0"/>
+            <a:r>
+              <a:rPr/>
+              <a:t>Anastomotic leak</a:t>
+            </a:r>
+          </a:p>
+          <a:p>
+            <a:pPr lvl="0"/>
+            <a:r>
+              <a:rPr/>
+              <a:t>Pneumonia</a:t>
+            </a:r>
+          </a:p>
+        </p:txBody>
+      </p:sp>
     </p:spTree>
   </p:cSld>
 </p:sld>
@@ -4197,35 +4206,14 @@
             </a:pPr>
             <a:r>
               <a:rPr/>
-              <a:t>Risk of leak depends on:</a:t>
-            </a:r>
-          </a:p>
-          <a:p>
-            <a:pPr lvl="0"/>
-            <a:r>
-              <a:rPr/>
-              <a:t>Type of operation performed</a:t>
-            </a:r>
-          </a:p>
-          <a:p>
-            <a:pPr lvl="0"/>
-            <a:r>
-              <a:rPr/>
-              <a:t>Nutritional status of patient</a:t>
-            </a:r>
-          </a:p>
-          <a:p>
-            <a:pPr lvl="0"/>
-            <a:r>
-              <a:rPr/>
-              <a:t>Experience of the surgeon</a:t>
+              <a:t>The anastomosis is surgical connection between the esophagus and the stomach.</a:t>
             </a:r>
           </a:p>
         </p:txBody>
       </p:sp>
       <p:pic>
         <p:nvPicPr>
-          <p:cNvPr descr="images/Eso_IvorLewis_Leak.png" id="0" name="Picture 1"/>
+          <p:cNvPr descr="images/Eso_IvorLewis_Anastomosis.png" id="0" name="Picture 1"/>
           <p:cNvPicPr>
             <a:picLocks noGrp="1" noChangeAspect="1"/>
           </p:cNvPicPr>
@@ -4300,7 +4288,7 @@
             </a:pPr>
             <a:r>
               <a:rPr/>
-              <a:t>Pneumonia</a:t>
+              <a:t>Anastomotic Leak</a:t>
             </a:r>
           </a:p>
         </p:txBody>
@@ -4320,31 +4308,40 @@
           <a:bodyPr/>
           <a:lstStyle/>
           <a:p>
-            <a:pPr lvl="0"/>
-            <a:r>
-              <a:rPr/>
-              <a:t>Occurs in 10-15% of patients after esophagectomy.</a:t>
-            </a:r>
-          </a:p>
-          <a:p>
-            <a:pPr lvl="0"/>
-            <a:r>
-              <a:rPr/>
-              <a:t>Requires treatment with antibiotics</a:t>
-            </a:r>
-          </a:p>
-          <a:p>
-            <a:pPr lvl="0"/>
-            <a:r>
-              <a:rPr/>
-              <a:t>Requires a longer hospitalization.</a:t>
+            <a:pPr lvl="0" indent="0" marL="0">
+              <a:buNone/>
+            </a:pPr>
+            <a:r>
+              <a:rPr/>
+              <a:t>If healing doesn’t occur:</a:t>
+            </a:r>
+          </a:p>
+          <a:p>
+            <a:pPr lvl="0"/>
+            <a:r>
+              <a:rPr/>
+              <a:t>Leakage of fluid from the esophagus</a:t>
+            </a:r>
+          </a:p>
+          <a:p>
+            <a:pPr lvl="0"/>
+            <a:r>
+              <a:rPr/>
+              <a:t>Infection in the space between the lungs</a:t>
+            </a:r>
+          </a:p>
+          <a:p>
+            <a:pPr lvl="0"/>
+            <a:r>
+              <a:rPr/>
+              <a:t>Requires additional time in the hospital</a:t>
             </a:r>
           </a:p>
         </p:txBody>
       </p:sp>
       <p:pic>
         <p:nvPicPr>
-          <p:cNvPr descr="images/Eso_LungsArtboard.png" id="0" name="Picture 1"/>
+          <p:cNvPr descr="images/Eso_IvorLewis_Leak.png" id="0" name="Picture 1"/>
           <p:cNvPicPr>
             <a:picLocks noGrp="1" noChangeAspect="1"/>
           </p:cNvPicPr>
@@ -4406,20 +4403,20 @@
         </p:nvSpPr>
         <p:spPr>
           <a:xfrm>
-            <a:off x="284309" y="205979"/>
-            <a:ext cx="8552330" cy="662317"/>
-          </a:xfrm>
-        </p:spPr>
-        <p:txBody>
-          <a:bodyPr/>
-          <a:lstStyle/>
-          <a:p>
-            <a:pPr lvl="0" indent="0" marL="0">
-              <a:buNone/>
-            </a:pPr>
-            <a:r>
-              <a:rPr/>
-              <a:t>Preventing Pneumonia</a:t>
+            <a:off x="315045" y="205979"/>
+            <a:ext cx="8529278" cy="857250"/>
+          </a:xfrm>
+        </p:spPr>
+        <p:txBody>
+          <a:bodyPr/>
+          <a:lstStyle/>
+          <a:p>
+            <a:pPr lvl="0" indent="0" marL="0">
+              <a:buNone/>
+            </a:pPr>
+            <a:r>
+              <a:rPr/>
+              <a:t>Anastomotic Leak</a:t>
             </a:r>
           </a:p>
         </p:txBody>
@@ -4431,7 +4428,7 @@
             <a:spLocks noGrp="1"/>
           </p:cNvSpPr>
           <p:nvPr>
-            <p:ph idx="1"/>
+            <p:ph idx="1" sz="half"/>
           </p:nvPr>
         </p:nvSpPr>
         <p:spPr/>
@@ -4444,55 +4441,62 @@
             </a:pPr>
             <a:r>
               <a:rPr/>
-              <a:t>Several ways to help prevent pneumonia:</a:t>
-            </a:r>
-          </a:p>
-          <a:p>
-            <a:pPr lvl="0"/>
-            <a:r>
-              <a:rPr/>
-              <a:t>Deep breathing</a:t>
-            </a:r>
-          </a:p>
-          <a:p>
-            <a:pPr lvl="0"/>
-            <a:r>
-              <a:rPr/>
-              <a:t>Coughing</a:t>
-            </a:r>
-          </a:p>
-          <a:p>
-            <a:pPr lvl="0"/>
-            <a:r>
-              <a:rPr/>
-              <a:t>Walking</a:t>
-            </a:r>
-          </a:p>
-          <a:p>
-            <a:pPr lvl="0" indent="0" marL="0">
-              <a:buNone/>
-            </a:pPr>
-            <a:r>
-              <a:rPr/>
-              <a:t>After surgery, this means:</a:t>
-            </a:r>
-          </a:p>
-          <a:p>
-            <a:pPr lvl="0"/>
-            <a:r>
-              <a:rPr/>
-              <a:t>Sitting in a chair most of the day</a:t>
-            </a:r>
-          </a:p>
-          <a:p>
-            <a:pPr lvl="0"/>
-            <a:r>
-              <a:rPr/>
-              <a:t>Walking in the halls as soon as possible</a:t>
-            </a:r>
-          </a:p>
-        </p:txBody>
-      </p:sp>
+              <a:t>If leak occurs:</a:t>
+            </a:r>
+          </a:p>
+          <a:p>
+            <a:pPr lvl="0"/>
+            <a:r>
+              <a:rPr/>
+              <a:t>Some leaks will seal</a:t>
+            </a:r>
+          </a:p>
+          <a:p>
+            <a:pPr lvl="0"/>
+            <a:r>
+              <a:rPr/>
+              <a:t>Stent may be required to help healing</a:t>
+            </a:r>
+          </a:p>
+          <a:p>
+            <a:pPr lvl="0"/>
+            <a:r>
+              <a:rPr/>
+              <a:t>Occasionally additional surgey is required</a:t>
+            </a:r>
+          </a:p>
+        </p:txBody>
+      </p:sp>
+      <p:pic>
+        <p:nvPicPr>
+          <p:cNvPr descr="images/Eso_IvorLewis_Leak.png" id="0" name="Picture 1"/>
+          <p:cNvPicPr>
+            <a:picLocks noGrp="1" noChangeAspect="1"/>
+          </p:cNvPicPr>
+          <p:nvPr/>
+        </p:nvPicPr>
+        <p:blipFill>
+          <a:blip r:embed="rId2"/>
+          <a:stretch>
+            <a:fillRect/>
+          </a:stretch>
+        </p:blipFill>
+        <p:spPr bwMode="auto">
+          <a:xfrm>
+            <a:off x="4914900" y="1193800"/>
+            <a:ext cx="3632200" cy="3733800"/>
+          </a:xfrm>
+          <a:prstGeom prst="rect">
+            <a:avLst/>
+          </a:prstGeom>
+          <a:noFill/>
+          <a:ln w="9525">
+            <a:noFill/>
+            <a:headEnd/>
+            <a:tailEnd/>
+          </a:ln>
+        </p:spPr>
+      </p:pic>
     </p:spTree>
   </p:cSld>
 </p:sld>
@@ -4540,14 +4544,60 @@
             </a:pPr>
             <a:r>
               <a:rPr/>
-              <a:t>Minimally-invasive Esophagectomy</a:t>
+              <a:t>Anastomotic Leak</a:t>
+            </a:r>
+          </a:p>
+        </p:txBody>
+      </p:sp>
+      <p:sp>
+        <p:nvSpPr>
+          <p:cNvPr id="3" name="Content Placeholder 2"/>
+          <p:cNvSpPr>
+            <a:spLocks noGrp="1"/>
+          </p:cNvSpPr>
+          <p:nvPr>
+            <p:ph idx="1" sz="half"/>
+          </p:nvPr>
+        </p:nvSpPr>
+        <p:spPr/>
+        <p:txBody>
+          <a:bodyPr/>
+          <a:lstStyle/>
+          <a:p>
+            <a:pPr lvl="0" indent="0" marL="0">
+              <a:buNone/>
+            </a:pPr>
+            <a:r>
+              <a:rPr/>
+              <a:t>Risk of leak depends on:</a:t>
+            </a:r>
+          </a:p>
+          <a:p>
+            <a:pPr lvl="0"/>
+            <a:r>
+              <a:rPr/>
+              <a:t>Type of operation performed</a:t>
+            </a:r>
+          </a:p>
+          <a:p>
+            <a:pPr lvl="0"/>
+            <a:r>
+              <a:rPr/>
+              <a:t>Nutritional status of patient</a:t>
+            </a:r>
+          </a:p>
+          <a:p>
+            <a:pPr lvl="0"/>
+            <a:r>
+              <a:rPr/>
+              <a:t>Experience of the surgeon</a:t>
             </a:r>
           </a:p>
         </p:txBody>
       </p:sp>
       <p:pic>
         <p:nvPicPr>
-          <p:cNvPr descr="images/mie_abd.png" id="0" name="Picture 1"/>
+          <p:cNvPr descr="images/Eso_IvorLewis_Leak.png" id="0" name="Picture 1"/>
           <p:cNvPicPr>
             <a:picLocks noGrp="1" noChangeAspect="1"/>
           </p:cNvPicPr>
@@ -4561,38 +4611,8 @@
         </p:blipFill>
         <p:spPr bwMode="auto">
           <a:xfrm>
-            <a:off x="304800" y="1498600"/>
-            <a:ext cx="4178300" cy="3136900"/>
-          </a:xfrm>
-          <a:prstGeom prst="rect">
-            <a:avLst/>
-          </a:prstGeom>
-          <a:noFill/>
-          <a:ln w="9525">
-            <a:noFill/>
-            <a:headEnd/>
-            <a:tailEnd/>
-          </a:ln>
-        </p:spPr>
-      </p:pic>
-      <p:pic>
-        <p:nvPicPr>
-          <p:cNvPr descr="images/mie_chest.png" id="0" name="Picture 1"/>
-          <p:cNvPicPr>
-            <a:picLocks noGrp="1" noChangeAspect="1"/>
-          </p:cNvPicPr>
-          <p:nvPr/>
-        </p:nvPicPr>
-        <p:blipFill>
-          <a:blip r:embed="rId3"/>
-          <a:stretch>
-            <a:fillRect/>
-          </a:stretch>
-        </p:blipFill>
-        <p:spPr bwMode="auto">
-          <a:xfrm>
-            <a:off x="4635500" y="1485900"/>
-            <a:ext cx="4191000" cy="3149600"/>
+            <a:off x="4914900" y="1193800"/>
+            <a:ext cx="3632200" cy="3733800"/>
           </a:xfrm>
           <a:prstGeom prst="rect">
             <a:avLst/>
@@ -4639,20 +4659,20 @@
         </p:nvSpPr>
         <p:spPr>
           <a:xfrm>
-            <a:off x="284309" y="205979"/>
-            <a:ext cx="8552330" cy="662317"/>
-          </a:xfrm>
-        </p:spPr>
-        <p:txBody>
-          <a:bodyPr/>
-          <a:lstStyle/>
-          <a:p>
-            <a:pPr lvl="0" indent="0" marL="0">
-              <a:buNone/>
-            </a:pPr>
-            <a:r>
-              <a:rPr/>
-              <a:t>Risks of Surgery</a:t>
+            <a:off x="315045" y="205979"/>
+            <a:ext cx="8529278" cy="857250"/>
+          </a:xfrm>
+        </p:spPr>
+        <p:txBody>
+          <a:bodyPr/>
+          <a:lstStyle/>
+          <a:p>
+            <a:pPr lvl="0" indent="0" marL="0">
+              <a:buNone/>
+            </a:pPr>
+            <a:r>
+              <a:rPr/>
+              <a:t>Pneumonia</a:t>
             </a:r>
           </a:p>
         </p:txBody>
@@ -4664,7 +4684,7 @@
             <a:spLocks noGrp="1"/>
           </p:cNvSpPr>
           <p:nvPr>
-            <p:ph idx="1"/>
+            <p:ph idx="1" sz="half"/>
           </p:nvPr>
         </p:nvSpPr>
         <p:spPr/>
@@ -4672,51 +4692,58 @@
           <a:bodyPr/>
           <a:lstStyle/>
           <a:p>
-            <a:pPr lvl="0" indent="0" marL="0">
-              <a:buNone/>
-            </a:pPr>
-            <a:r>
-              <a:rPr/>
-              <a:t>Risks related to anesthesia</a:t>
-            </a:r>
-          </a:p>
-          <a:p>
-            <a:pPr lvl="0"/>
-            <a:r>
-              <a:rPr/>
-              <a:t>Heart attack (5%)</a:t>
-            </a:r>
-          </a:p>
-          <a:p>
-            <a:pPr lvl="0"/>
-            <a:r>
-              <a:rPr/>
-              <a:t>Irregular heart rhythm (15%)</a:t>
-            </a:r>
-          </a:p>
-          <a:p>
-            <a:pPr lvl="0"/>
-            <a:r>
-              <a:rPr/>
-              <a:t>Pneumonia (10%)</a:t>
-            </a:r>
-          </a:p>
-          <a:p>
-            <a:pPr lvl="0"/>
-            <a:r>
-              <a:rPr/>
-              <a:t>Blood clots in legs (&lt;5%)</a:t>
-            </a:r>
-          </a:p>
-          <a:p>
-            <a:pPr lvl="0"/>
-            <a:r>
-              <a:rPr/>
-              <a:t>Pulmonary embolism (2%)</a:t>
-            </a:r>
-          </a:p>
-        </p:txBody>
-      </p:sp>
+            <a:pPr lvl="0"/>
+            <a:r>
+              <a:rPr/>
+              <a:t>Occurs in 10-15% of patients after esophagectomy.</a:t>
+            </a:r>
+          </a:p>
+          <a:p>
+            <a:pPr lvl="0"/>
+            <a:r>
+              <a:rPr/>
+              <a:t>Requires treatment with antibiotics</a:t>
+            </a:r>
+          </a:p>
+          <a:p>
+            <a:pPr lvl="0"/>
+            <a:r>
+              <a:rPr/>
+              <a:t>Requires a longer hospitalization.</a:t>
+            </a:r>
+          </a:p>
+        </p:txBody>
+      </p:sp>
+      <p:pic>
+        <p:nvPicPr>
+          <p:cNvPr descr="images/Eso_LungsArtboard.png" id="0" name="Picture 1"/>
+          <p:cNvPicPr>
+            <a:picLocks noGrp="1" noChangeAspect="1"/>
+          </p:cNvPicPr>
+          <p:nvPr/>
+        </p:nvPicPr>
+        <p:blipFill>
+          <a:blip r:embed="rId2"/>
+          <a:stretch>
+            <a:fillRect/>
+          </a:stretch>
+        </p:blipFill>
+        <p:spPr bwMode="auto">
+          <a:xfrm>
+            <a:off x="4914900" y="1193800"/>
+            <a:ext cx="3632200" cy="3733800"/>
+          </a:xfrm>
+          <a:prstGeom prst="rect">
+            <a:avLst/>
+          </a:prstGeom>
+          <a:noFill/>
+          <a:ln w="9525">
+            <a:noFill/>
+            <a:headEnd/>
+            <a:tailEnd/>
+          </a:ln>
+        </p:spPr>
+      </p:pic>
     </p:spTree>
   </p:cSld>
 </p:sld>
@@ -4764,7 +4791,7 @@
             </a:pPr>
             <a:r>
               <a:rPr/>
-              <a:t>Surgery for Esophageal Cancer</a:t>
+              <a:t>Preparation for Surgery</a:t>
             </a:r>
           </a:p>
         </p:txBody>
@@ -4789,28 +4816,42 @@
             </a:pPr>
             <a:r>
               <a:rPr/>
-              <a:t>Surgery for esophageal cancer is performed for:</a:t>
-            </a:r>
-          </a:p>
-          <a:p>
-            <a:pPr lvl="0"/>
-            <a:r>
-              <a:rPr/>
-              <a:t>Superficial Tumors (T1) not removed by endoscopy</a:t>
-            </a:r>
-          </a:p>
-          <a:p>
-            <a:pPr lvl="0"/>
-            <a:r>
-              <a:rPr/>
-              <a:t>Localized Tumors (T2 N0 M0)</a:t>
-            </a:r>
-          </a:p>
-          <a:p>
-            <a:pPr lvl="0"/>
-            <a:r>
-              <a:rPr/>
-              <a:t>Locally Advanced (T3 M0) after preop therapy</a:t>
+              <a:t>Medical evaluation may be needed before surgery:</a:t>
+            </a:r>
+          </a:p>
+          <a:p>
+            <a:pPr lvl="0"/>
+            <a:r>
+              <a:rPr/>
+              <a:t>Pulmonary Function Tests to test lung function</a:t>
+            </a:r>
+          </a:p>
+          <a:p>
+            <a:pPr lvl="0"/>
+            <a:r>
+              <a:rPr/>
+              <a:t>Cardiology evaluation to test heart function</a:t>
+            </a:r>
+          </a:p>
+          <a:p>
+            <a:pPr lvl="1"/>
+            <a:r>
+              <a:rPr/>
+              <a:t>Echocardiogram</a:t>
+            </a:r>
+          </a:p>
+          <a:p>
+            <a:pPr lvl="1"/>
+            <a:r>
+              <a:rPr/>
+              <a:t>Stress Test</a:t>
+            </a:r>
+          </a:p>
+          <a:p>
+            <a:pPr lvl="1"/>
+            <a:r>
+              <a:rPr/>
+              <a:t>Holter monitor</a:t>
             </a:r>
           </a:p>
         </p:txBody>
@@ -4862,7 +4903,7 @@
             </a:pPr>
             <a:r>
               <a:rPr/>
-              <a:t>Risks of Surgery</a:t>
+              <a:t>Preventing Pneumonia</a:t>
             </a:r>
           </a:p>
         </p:txBody>
@@ -4887,49 +4928,51 @@
             </a:pPr>
             <a:r>
               <a:rPr/>
-              <a:t>Risks related to Surgery</a:t>
-            </a:r>
-          </a:p>
-          <a:p>
-            <a:pPr lvl="0"/>
-            <a:r>
-              <a:rPr/>
-              <a:t>Anastomotic leak (5%)</a:t>
-            </a:r>
-          </a:p>
-          <a:p>
-            <a:pPr lvl="0"/>
-            <a:r>
-              <a:rPr/>
-              <a:t>Stricture at anastomosis (15%)</a:t>
-            </a:r>
-          </a:p>
-          <a:p>
-            <a:pPr lvl="0"/>
-            <a:r>
-              <a:rPr/>
-              <a:t>Death within 90 days of surgery</a:t>
-            </a:r>
-          </a:p>
-          <a:p>
-            <a:pPr lvl="1"/>
-            <a:r>
-              <a:rPr/>
-              <a:t>Low risk patients = 2%</a:t>
-            </a:r>
-          </a:p>
-          <a:p>
-            <a:pPr lvl="1"/>
-            <a:r>
-              <a:rPr/>
-              <a:t>Intermediate risk = 10%</a:t>
-            </a:r>
-          </a:p>
-          <a:p>
-            <a:pPr lvl="1"/>
-            <a:r>
-              <a:rPr/>
-              <a:t>High risk = 30%</a:t>
+              <a:t>Several ways to help prevent pneumonia:</a:t>
+            </a:r>
+          </a:p>
+          <a:p>
+            <a:pPr lvl="0"/>
+            <a:r>
+              <a:rPr/>
+              <a:t>Deep breathing</a:t>
+            </a:r>
+          </a:p>
+          <a:p>
+            <a:pPr lvl="0"/>
+            <a:r>
+              <a:rPr/>
+              <a:t>Coughing</a:t>
+            </a:r>
+          </a:p>
+          <a:p>
+            <a:pPr lvl="0"/>
+            <a:r>
+              <a:rPr/>
+              <a:t>Walking</a:t>
+            </a:r>
+          </a:p>
+          <a:p>
+            <a:pPr lvl="0" indent="0" marL="0">
+              <a:buNone/>
+            </a:pPr>
+            <a:r>
+              <a:rPr/>
+              <a:t>After surgery, this means:</a:t>
+            </a:r>
+          </a:p>
+          <a:p>
+            <a:pPr lvl="0"/>
+            <a:r>
+              <a:rPr/>
+              <a:t>Sitting in a chair most of the day</a:t>
+            </a:r>
+          </a:p>
+          <a:p>
+            <a:pPr lvl="0"/>
+            <a:r>
+              <a:rPr/>
+              <a:t>Walking in the halls as soon as possible</a:t>
             </a:r>
           </a:p>
         </p:txBody>
@@ -4940,6 +4983,349 @@
 </file>
 
 <file path=ppt/slides/slide21.xml><?xml version="1.0" encoding="utf-8"?>
+<p:sld xmlns:a="http://schemas.openxmlformats.org/drawingml/2006/main" xmlns:r="http://schemas.openxmlformats.org/officeDocument/2006/relationships" xmlns:p="http://schemas.openxmlformats.org/presentationml/2006/main">
+  <p:cSld>
+    <p:spTree>
+      <p:nvGrpSpPr>
+        <p:cNvPr id="1" name=""/>
+        <p:cNvGrpSpPr/>
+        <p:nvPr/>
+      </p:nvGrpSpPr>
+      <p:grpSpPr>
+        <a:xfrm>
+          <a:off x="0" y="0"/>
+          <a:ext cx="0" cy="0"/>
+          <a:chOff x="0" y="0"/>
+          <a:chExt cx="0" cy="0"/>
+        </a:xfrm>
+      </p:grpSpPr>
+      <p:sp>
+        <p:nvSpPr>
+          <p:cNvPr id="2" name="Title 1"/>
+          <p:cNvSpPr>
+            <a:spLocks noGrp="1"/>
+          </p:cNvSpPr>
+          <p:nvPr>
+            <p:ph type="title"/>
+          </p:nvPr>
+        </p:nvSpPr>
+        <p:spPr>
+          <a:xfrm>
+            <a:off x="315045" y="205979"/>
+            <a:ext cx="8529278" cy="857250"/>
+          </a:xfrm>
+        </p:spPr>
+        <p:txBody>
+          <a:bodyPr/>
+          <a:lstStyle/>
+          <a:p>
+            <a:pPr lvl="0" indent="0" marL="0">
+              <a:buNone/>
+            </a:pPr>
+            <a:r>
+              <a:rPr/>
+              <a:t>Minimally-invasive Esophagectomy</a:t>
+            </a:r>
+          </a:p>
+        </p:txBody>
+      </p:sp>
+      <p:pic>
+        <p:nvPicPr>
+          <p:cNvPr descr="images/mie_abd.png" id="0" name="Picture 1"/>
+          <p:cNvPicPr>
+            <a:picLocks noGrp="1" noChangeAspect="1"/>
+          </p:cNvPicPr>
+          <p:nvPr/>
+        </p:nvPicPr>
+        <p:blipFill>
+          <a:blip r:embed="rId2"/>
+          <a:stretch>
+            <a:fillRect/>
+          </a:stretch>
+        </p:blipFill>
+        <p:spPr bwMode="auto">
+          <a:xfrm>
+            <a:off x="304800" y="1498600"/>
+            <a:ext cx="4178300" cy="3136900"/>
+          </a:xfrm>
+          <a:prstGeom prst="rect">
+            <a:avLst/>
+          </a:prstGeom>
+          <a:noFill/>
+          <a:ln w="9525">
+            <a:noFill/>
+            <a:headEnd/>
+            <a:tailEnd/>
+          </a:ln>
+        </p:spPr>
+      </p:pic>
+      <p:pic>
+        <p:nvPicPr>
+          <p:cNvPr descr="images/mie_chest.png" id="0" name="Picture 1"/>
+          <p:cNvPicPr>
+            <a:picLocks noGrp="1" noChangeAspect="1"/>
+          </p:cNvPicPr>
+          <p:nvPr/>
+        </p:nvPicPr>
+        <p:blipFill>
+          <a:blip r:embed="rId3"/>
+          <a:stretch>
+            <a:fillRect/>
+          </a:stretch>
+        </p:blipFill>
+        <p:spPr bwMode="auto">
+          <a:xfrm>
+            <a:off x="4635500" y="1485900"/>
+            <a:ext cx="4191000" cy="3149600"/>
+          </a:xfrm>
+          <a:prstGeom prst="rect">
+            <a:avLst/>
+          </a:prstGeom>
+          <a:noFill/>
+          <a:ln w="9525">
+            <a:noFill/>
+            <a:headEnd/>
+            <a:tailEnd/>
+          </a:ln>
+        </p:spPr>
+      </p:pic>
+    </p:spTree>
+  </p:cSld>
+</p:sld>
+</file>
+
+<file path=ppt/slides/slide22.xml><?xml version="1.0" encoding="utf-8"?>
+<p:sld xmlns:a="http://schemas.openxmlformats.org/drawingml/2006/main" xmlns:r="http://schemas.openxmlformats.org/officeDocument/2006/relationships" xmlns:p="http://schemas.openxmlformats.org/presentationml/2006/main">
+  <p:cSld>
+    <p:spTree>
+      <p:nvGrpSpPr>
+        <p:cNvPr id="1" name=""/>
+        <p:cNvGrpSpPr/>
+        <p:nvPr/>
+      </p:nvGrpSpPr>
+      <p:grpSpPr>
+        <a:xfrm>
+          <a:off x="0" y="0"/>
+          <a:ext cx="0" cy="0"/>
+          <a:chOff x="0" y="0"/>
+          <a:chExt cx="0" cy="0"/>
+        </a:xfrm>
+      </p:grpSpPr>
+      <p:sp>
+        <p:nvSpPr>
+          <p:cNvPr id="2" name="Title 1"/>
+          <p:cNvSpPr>
+            <a:spLocks noGrp="1"/>
+          </p:cNvSpPr>
+          <p:nvPr>
+            <p:ph type="title"/>
+          </p:nvPr>
+        </p:nvSpPr>
+        <p:spPr>
+          <a:xfrm>
+            <a:off x="284309" y="205979"/>
+            <a:ext cx="8552330" cy="662317"/>
+          </a:xfrm>
+        </p:spPr>
+        <p:txBody>
+          <a:bodyPr/>
+          <a:lstStyle/>
+          <a:p>
+            <a:pPr lvl="0" indent="0" marL="0">
+              <a:buNone/>
+            </a:pPr>
+            <a:r>
+              <a:rPr/>
+              <a:t>Risks of Surgery</a:t>
+            </a:r>
+          </a:p>
+        </p:txBody>
+      </p:sp>
+      <p:sp>
+        <p:nvSpPr>
+          <p:cNvPr id="3" name="Content Placeholder 2"/>
+          <p:cNvSpPr>
+            <a:spLocks noGrp="1"/>
+          </p:cNvSpPr>
+          <p:nvPr>
+            <p:ph idx="1"/>
+          </p:nvPr>
+        </p:nvSpPr>
+        <p:spPr/>
+        <p:txBody>
+          <a:bodyPr/>
+          <a:lstStyle/>
+          <a:p>
+            <a:pPr lvl="0" indent="0" marL="0">
+              <a:buNone/>
+            </a:pPr>
+            <a:r>
+              <a:rPr/>
+              <a:t>Risks related to anesthesia</a:t>
+            </a:r>
+          </a:p>
+          <a:p>
+            <a:pPr lvl="0"/>
+            <a:r>
+              <a:rPr/>
+              <a:t>Heart attack (5%)</a:t>
+            </a:r>
+          </a:p>
+          <a:p>
+            <a:pPr lvl="0"/>
+            <a:r>
+              <a:rPr/>
+              <a:t>Irregular heart rhythm (15%)</a:t>
+            </a:r>
+          </a:p>
+          <a:p>
+            <a:pPr lvl="0"/>
+            <a:r>
+              <a:rPr/>
+              <a:t>Pneumonia (10%)</a:t>
+            </a:r>
+          </a:p>
+          <a:p>
+            <a:pPr lvl="0"/>
+            <a:r>
+              <a:rPr/>
+              <a:t>Blood clots in legs (&lt;5%)</a:t>
+            </a:r>
+          </a:p>
+          <a:p>
+            <a:pPr lvl="0"/>
+            <a:r>
+              <a:rPr/>
+              <a:t>Pulmonary embolism (2%)</a:t>
+            </a:r>
+          </a:p>
+        </p:txBody>
+      </p:sp>
+    </p:spTree>
+  </p:cSld>
+</p:sld>
+</file>
+
+<file path=ppt/slides/slide23.xml><?xml version="1.0" encoding="utf-8"?>
+<p:sld xmlns:a="http://schemas.openxmlformats.org/drawingml/2006/main" xmlns:r="http://schemas.openxmlformats.org/officeDocument/2006/relationships" xmlns:p="http://schemas.openxmlformats.org/presentationml/2006/main">
+  <p:cSld>
+    <p:spTree>
+      <p:nvGrpSpPr>
+        <p:cNvPr id="1" name=""/>
+        <p:cNvGrpSpPr/>
+        <p:nvPr/>
+      </p:nvGrpSpPr>
+      <p:grpSpPr>
+        <a:xfrm>
+          <a:off x="0" y="0"/>
+          <a:ext cx="0" cy="0"/>
+          <a:chOff x="0" y="0"/>
+          <a:chExt cx="0" cy="0"/>
+        </a:xfrm>
+      </p:grpSpPr>
+      <p:sp>
+        <p:nvSpPr>
+          <p:cNvPr id="2" name="Title 1"/>
+          <p:cNvSpPr>
+            <a:spLocks noGrp="1"/>
+          </p:cNvSpPr>
+          <p:nvPr>
+            <p:ph type="title"/>
+          </p:nvPr>
+        </p:nvSpPr>
+        <p:spPr>
+          <a:xfrm>
+            <a:off x="284309" y="205979"/>
+            <a:ext cx="8552330" cy="662317"/>
+          </a:xfrm>
+        </p:spPr>
+        <p:txBody>
+          <a:bodyPr/>
+          <a:lstStyle/>
+          <a:p>
+            <a:pPr lvl="0" indent="0" marL="0">
+              <a:buNone/>
+            </a:pPr>
+            <a:r>
+              <a:rPr/>
+              <a:t>Risks of Surgery</a:t>
+            </a:r>
+          </a:p>
+        </p:txBody>
+      </p:sp>
+      <p:sp>
+        <p:nvSpPr>
+          <p:cNvPr id="3" name="Content Placeholder 2"/>
+          <p:cNvSpPr>
+            <a:spLocks noGrp="1"/>
+          </p:cNvSpPr>
+          <p:nvPr>
+            <p:ph idx="1"/>
+          </p:nvPr>
+        </p:nvSpPr>
+        <p:spPr/>
+        <p:txBody>
+          <a:bodyPr/>
+          <a:lstStyle/>
+          <a:p>
+            <a:pPr lvl="0" indent="0" marL="0">
+              <a:buNone/>
+            </a:pPr>
+            <a:r>
+              <a:rPr/>
+              <a:t>Risks related to Surgery</a:t>
+            </a:r>
+          </a:p>
+          <a:p>
+            <a:pPr lvl="0"/>
+            <a:r>
+              <a:rPr/>
+              <a:t>Anastomotic leak (5%)</a:t>
+            </a:r>
+          </a:p>
+          <a:p>
+            <a:pPr lvl="0"/>
+            <a:r>
+              <a:rPr/>
+              <a:t>Stricture at anastomosis (15%)</a:t>
+            </a:r>
+          </a:p>
+          <a:p>
+            <a:pPr lvl="0"/>
+            <a:r>
+              <a:rPr/>
+              <a:t>Death within 90 days of surgery</a:t>
+            </a:r>
+          </a:p>
+          <a:p>
+            <a:pPr lvl="1"/>
+            <a:r>
+              <a:rPr/>
+              <a:t>Low risk patients = 2%</a:t>
+            </a:r>
+          </a:p>
+          <a:p>
+            <a:pPr lvl="1"/>
+            <a:r>
+              <a:rPr/>
+              <a:t>Intermediate risk = 10%</a:t>
+            </a:r>
+          </a:p>
+          <a:p>
+            <a:pPr lvl="1"/>
+            <a:r>
+              <a:rPr/>
+              <a:t>High risk = 30%</a:t>
+            </a:r>
+          </a:p>
+        </p:txBody>
+      </p:sp>
+    </p:spTree>
+  </p:cSld>
+</p:sld>
+</file>
+
+<file path=ppt/slides/slide24.xml><?xml version="1.0" encoding="utf-8"?>
 <p:sld xmlns:a="http://schemas.openxmlformats.org/drawingml/2006/main" xmlns:r="http://schemas.openxmlformats.org/officeDocument/2006/relationships" xmlns:p="http://schemas.openxmlformats.org/presentationml/2006/main">
   <p:cSld>
     <p:spTree>
@@ -5190,309 +5576,6 @@
 </p:sld>
 </file>
 
-<file path=ppt/slides/slide22.xml><?xml version="1.0" encoding="utf-8"?>
-<p:sld xmlns:a="http://schemas.openxmlformats.org/drawingml/2006/main" xmlns:r="http://schemas.openxmlformats.org/officeDocument/2006/relationships" xmlns:p="http://schemas.openxmlformats.org/presentationml/2006/main">
-  <p:cSld>
-    <p:spTree>
-      <p:nvGrpSpPr>
-        <p:cNvPr id="1" name=""/>
-        <p:cNvGrpSpPr/>
-        <p:nvPr/>
-      </p:nvGrpSpPr>
-      <p:grpSpPr>
-        <a:xfrm>
-          <a:off x="0" y="0"/>
-          <a:ext cx="0" cy="0"/>
-          <a:chOff x="0" y="0"/>
-          <a:chExt cx="0" cy="0"/>
-        </a:xfrm>
-      </p:grpSpPr>
-      <p:sp>
-        <p:nvSpPr>
-          <p:cNvPr id="2" name="Title 1"/>
-          <p:cNvSpPr>
-            <a:spLocks noGrp="1"/>
-          </p:cNvSpPr>
-          <p:nvPr>
-            <p:ph type="title"/>
-          </p:nvPr>
-        </p:nvSpPr>
-        <p:spPr>
-          <a:xfrm>
-            <a:off x="284309" y="205979"/>
-            <a:ext cx="8552330" cy="662317"/>
-          </a:xfrm>
-        </p:spPr>
-        <p:txBody>
-          <a:bodyPr/>
-          <a:lstStyle/>
-          <a:p>
-            <a:pPr lvl="0" indent="0" marL="0">
-              <a:buNone/>
-            </a:pPr>
-            <a:r>
-              <a:rPr/>
-              <a:t>Day Prior to Surgery</a:t>
-            </a:r>
-          </a:p>
-        </p:txBody>
-      </p:sp>
-      <p:sp>
-        <p:nvSpPr>
-          <p:cNvPr id="3" name="Content Placeholder 2"/>
-          <p:cNvSpPr>
-            <a:spLocks noGrp="1"/>
-          </p:cNvSpPr>
-          <p:nvPr>
-            <p:ph idx="1"/>
-          </p:nvPr>
-        </p:nvSpPr>
-        <p:spPr/>
-        <p:txBody>
-          <a:bodyPr/>
-          <a:lstStyle/>
-          <a:p>
-            <a:pPr lvl="0"/>
-            <a:r>
-              <a:rPr/>
-              <a:t>Clear liquids for 24 hours prior to surgery</a:t>
-            </a:r>
-          </a:p>
-          <a:p>
-            <a:pPr lvl="0"/>
-            <a:r>
-              <a:rPr/>
-              <a:t>Check with Pre-op nurse regarding medicines day prior to surgery</a:t>
-            </a:r>
-          </a:p>
-          <a:p>
-            <a:pPr lvl="0"/>
-            <a:r>
-              <a:rPr/>
-              <a:t>No tube feedings the night before surgery</a:t>
-            </a:r>
-          </a:p>
-        </p:txBody>
-      </p:sp>
-    </p:spTree>
-  </p:cSld>
-</p:sld>
-</file>
-
-<file path=ppt/slides/slide23.xml><?xml version="1.0" encoding="utf-8"?>
-<p:sld xmlns:a="http://schemas.openxmlformats.org/drawingml/2006/main" xmlns:r="http://schemas.openxmlformats.org/officeDocument/2006/relationships" xmlns:p="http://schemas.openxmlformats.org/presentationml/2006/main">
-  <p:cSld>
-    <p:spTree>
-      <p:nvGrpSpPr>
-        <p:cNvPr id="1" name=""/>
-        <p:cNvGrpSpPr/>
-        <p:nvPr/>
-      </p:nvGrpSpPr>
-      <p:grpSpPr>
-        <a:xfrm>
-          <a:off x="0" y="0"/>
-          <a:ext cx="0" cy="0"/>
-          <a:chOff x="0" y="0"/>
-          <a:chExt cx="0" cy="0"/>
-        </a:xfrm>
-      </p:grpSpPr>
-      <p:sp>
-        <p:nvSpPr>
-          <p:cNvPr id="2" name="Title 1"/>
-          <p:cNvSpPr>
-            <a:spLocks noGrp="1"/>
-          </p:cNvSpPr>
-          <p:nvPr>
-            <p:ph type="title"/>
-          </p:nvPr>
-        </p:nvSpPr>
-        <p:spPr>
-          <a:xfrm>
-            <a:off x="284309" y="205979"/>
-            <a:ext cx="8552330" cy="662317"/>
-          </a:xfrm>
-        </p:spPr>
-        <p:txBody>
-          <a:bodyPr/>
-          <a:lstStyle/>
-          <a:p>
-            <a:pPr lvl="0" indent="0" marL="0">
-              <a:buNone/>
-            </a:pPr>
-            <a:r>
-              <a:rPr/>
-              <a:t>Day of Surgery</a:t>
-            </a:r>
-          </a:p>
-        </p:txBody>
-      </p:sp>
-      <p:sp>
-        <p:nvSpPr>
-          <p:cNvPr id="3" name="Content Placeholder 2"/>
-          <p:cNvSpPr>
-            <a:spLocks noGrp="1"/>
-          </p:cNvSpPr>
-          <p:nvPr>
-            <p:ph idx="1"/>
-          </p:nvPr>
-        </p:nvSpPr>
-        <p:spPr/>
-        <p:txBody>
-          <a:bodyPr/>
-          <a:lstStyle/>
-          <a:p>
-            <a:pPr lvl="0"/>
-            <a:r>
-              <a:rPr/>
-              <a:t>Arrive at 5am – nothing to eat or drink after midnight.</a:t>
-            </a:r>
-          </a:p>
-          <a:p>
-            <a:pPr lvl="0"/>
-            <a:r>
-              <a:rPr/>
-              <a:t>Medicines OK w/ a sip of water</a:t>
-            </a:r>
-          </a:p>
-          <a:p>
-            <a:pPr lvl="0"/>
-            <a:r>
-              <a:rPr/>
-              <a:t>sip of black coffee but </a:t>
-            </a:r>
-            <a:r>
-              <a:rPr b="1"/>
-              <a:t>no cream</a:t>
-            </a:r>
-            <a:r>
-              <a:rPr/>
-              <a:t>.</a:t>
-            </a:r>
-          </a:p>
-          <a:p>
-            <a:pPr lvl="0"/>
-            <a:r>
-              <a:rPr/>
-              <a:t>Surgery will be cancelled if you have cream/milk</a:t>
-            </a:r>
-          </a:p>
-          <a:p>
-            <a:pPr lvl="0"/>
-            <a:r>
-              <a:rPr/>
-              <a:t>Waiting room for family and friends on 5th floor</a:t>
-            </a:r>
-          </a:p>
-        </p:txBody>
-      </p:sp>
-    </p:spTree>
-  </p:cSld>
-</p:sld>
-</file>
-
-<file path=ppt/slides/slide24.xml><?xml version="1.0" encoding="utf-8"?>
-<p:sld xmlns:a="http://schemas.openxmlformats.org/drawingml/2006/main" xmlns:r="http://schemas.openxmlformats.org/officeDocument/2006/relationships" xmlns:p="http://schemas.openxmlformats.org/presentationml/2006/main">
-  <p:cSld>
-    <p:spTree>
-      <p:nvGrpSpPr>
-        <p:cNvPr id="1" name=""/>
-        <p:cNvGrpSpPr/>
-        <p:nvPr/>
-      </p:nvGrpSpPr>
-      <p:grpSpPr>
-        <a:xfrm>
-          <a:off x="0" y="0"/>
-          <a:ext cx="0" cy="0"/>
-          <a:chOff x="0" y="0"/>
-          <a:chExt cx="0" cy="0"/>
-        </a:xfrm>
-      </p:grpSpPr>
-      <p:sp>
-        <p:nvSpPr>
-          <p:cNvPr id="2" name="Title 1"/>
-          <p:cNvSpPr>
-            <a:spLocks noGrp="1"/>
-          </p:cNvSpPr>
-          <p:nvPr>
-            <p:ph type="title"/>
-          </p:nvPr>
-        </p:nvSpPr>
-        <p:spPr>
-          <a:xfrm>
-            <a:off x="284309" y="205979"/>
-            <a:ext cx="8552330" cy="662317"/>
-          </a:xfrm>
-        </p:spPr>
-        <p:txBody>
-          <a:bodyPr/>
-          <a:lstStyle/>
-          <a:p>
-            <a:pPr lvl="0" indent="0" marL="0">
-              <a:buNone/>
-            </a:pPr>
-            <a:r>
-              <a:rPr/>
-              <a:t>Epidural Catheter for Pain Control</a:t>
-            </a:r>
-          </a:p>
-        </p:txBody>
-      </p:sp>
-      <p:sp>
-        <p:nvSpPr>
-          <p:cNvPr id="3" name="Content Placeholder 2"/>
-          <p:cNvSpPr>
-            <a:spLocks noGrp="1"/>
-          </p:cNvSpPr>
-          <p:nvPr>
-            <p:ph idx="1"/>
-          </p:nvPr>
-        </p:nvSpPr>
-        <p:spPr/>
-        <p:txBody>
-          <a:bodyPr/>
-          <a:lstStyle/>
-          <a:p>
-            <a:pPr lvl="0"/>
-            <a:r>
-              <a:rPr/>
-              <a:t>Remains in place for 2-5 days</a:t>
-            </a:r>
-          </a:p>
-          <a:p>
-            <a:pPr lvl="0"/>
-            <a:r>
-              <a:rPr/>
-              <a:t>Dosage can be adjusted as needed</a:t>
-            </a:r>
-          </a:p>
-          <a:p>
-            <a:pPr lvl="0"/>
-            <a:r>
-              <a:rPr/>
-              <a:t>Can make it more difficult to urinate</a:t>
-            </a:r>
-          </a:p>
-          <a:p>
-            <a:pPr lvl="0"/>
-            <a:r>
-              <a:rPr/>
-              <a:t>May require foley catheter in bladder</a:t>
-            </a:r>
-          </a:p>
-          <a:p>
-            <a:pPr lvl="0"/>
-            <a:r>
-              <a:rPr/>
-              <a:t>Foley catheter removed after epidural removed</a:t>
-            </a:r>
-          </a:p>
-        </p:txBody>
-      </p:sp>
-    </p:spTree>
-  </p:cSld>
-</p:sld>
-</file>
-
 <file path=ppt/slides/slide25.xml><?xml version="1.0" encoding="utf-8"?>
 <p:sld xmlns:a="http://schemas.openxmlformats.org/drawingml/2006/main" xmlns:r="http://schemas.openxmlformats.org/officeDocument/2006/relationships" xmlns:p="http://schemas.openxmlformats.org/presentationml/2006/main">
   <p:cSld>
@@ -5535,7 +5618,7 @@
             </a:pPr>
             <a:r>
               <a:rPr/>
-              <a:t>Intensive Care Unit (ICU) (2-4 days)</a:t>
+              <a:t>Day Prior to Surgery</a:t>
             </a:r>
           </a:p>
         </p:txBody>
@@ -5558,42 +5641,21 @@
             <a:pPr lvl="0"/>
             <a:r>
               <a:rPr/>
-              <a:t>Surgical ICU on 11th floor</a:t>
-            </a:r>
-          </a:p>
-          <a:p>
-            <a:pPr lvl="0"/>
-            <a:r>
-              <a:rPr/>
-              <a:t>NG tube in nose to drain stomach and esophagus</a:t>
-            </a:r>
-          </a:p>
-          <a:p>
-            <a:pPr lvl="0"/>
-            <a:r>
-              <a:rPr/>
-              <a:t>Catheter in bladder</a:t>
-            </a:r>
-          </a:p>
-          <a:p>
-            <a:pPr lvl="0"/>
-            <a:r>
-              <a:rPr/>
-              <a:t>Chest tube right chest</a:t>
-            </a:r>
-          </a:p>
-          <a:p>
-            <a:pPr lvl="0"/>
-            <a:r>
-              <a:rPr/>
-              <a:t>Abdominal drains (usually 2)</a:t>
-            </a:r>
-          </a:p>
-          <a:p>
-            <a:pPr lvl="0"/>
-            <a:r>
-              <a:rPr/>
-              <a:t>Feeding jejunostomy (usually stays in 8 wks)</a:t>
+              <a:t>Clear liquids for 24 hours prior to surgery</a:t>
+            </a:r>
+          </a:p>
+          <a:p>
+            <a:pPr lvl="0"/>
+            <a:r>
+              <a:rPr/>
+              <a:t>Check with Pre-op nurse regarding medicines day prior to surgery</a:t>
+            </a:r>
+          </a:p>
+          <a:p>
+            <a:pPr lvl="0"/>
+            <a:r>
+              <a:rPr/>
+              <a:t>No tube feedings the night before surgery</a:t>
             </a:r>
           </a:p>
         </p:txBody>
@@ -5645,7 +5707,7 @@
             </a:pPr>
             <a:r>
               <a:rPr/>
-              <a:t>Intensive Care Unit (ICU)</a:t>
+              <a:t>Day of Surgery</a:t>
             </a:r>
           </a:p>
         </p:txBody>
@@ -5668,35 +5730,43 @@
             <a:pPr lvl="0"/>
             <a:r>
               <a:rPr/>
-              <a:t>Bladder catheter removed → check that bladder empties properly</a:t>
-            </a:r>
-          </a:p>
-          <a:p>
-            <a:pPr lvl="0"/>
-            <a:r>
-              <a:rPr/>
-              <a:t>Chest tube removed (day 2-4) → follow-up x-ray</a:t>
-            </a:r>
-          </a:p>
-          <a:p>
-            <a:pPr lvl="0"/>
-            <a:r>
-              <a:rPr/>
-              <a:t>Fluid emptied from drains every few hours</a:t>
-            </a:r>
-          </a:p>
-          <a:p>
-            <a:pPr lvl="0"/>
-            <a:r>
-              <a:rPr/>
-              <a:t>Start tube feedings by feeding</a:t>
-            </a:r>
-          </a:p>
-          <a:p>
-            <a:pPr lvl="0"/>
-            <a:r>
-              <a:rPr/>
-              <a:t>Feeding jejunostomy (stays in 8 weeks)</a:t>
+              <a:t>Arrive at 5am – nothing to eat or drink after midnight.</a:t>
+            </a:r>
+          </a:p>
+          <a:p>
+            <a:pPr lvl="0"/>
+            <a:r>
+              <a:rPr/>
+              <a:t>Medicines OK w/ a sip of water</a:t>
+            </a:r>
+          </a:p>
+          <a:p>
+            <a:pPr lvl="0"/>
+            <a:r>
+              <a:rPr/>
+              <a:t>sip of black coffee but </a:t>
+            </a:r>
+            <a:r>
+              <a:rPr b="1"/>
+              <a:t>no cream</a:t>
+            </a:r>
+            <a:r>
+              <a:rPr/>
+              <a:t>.</a:t>
+            </a:r>
+          </a:p>
+          <a:p>
+            <a:pPr lvl="0"/>
+            <a:r>
+              <a:rPr/>
+              <a:t>Surgery will be cancelled if you have cream/milk</a:t>
+            </a:r>
+          </a:p>
+          <a:p>
+            <a:pPr lvl="0"/>
+            <a:r>
+              <a:rPr/>
+              <a:t>Waiting room for family and friends on 5th floor</a:t>
             </a:r>
           </a:p>
         </p:txBody>
@@ -5748,7 +5818,7 @@
             </a:pPr>
             <a:r>
               <a:rPr/>
-              <a:t>Ward - 6Tower</a:t>
+              <a:t>Epidural Catheter for Pain Control</a:t>
             </a:r>
           </a:p>
         </p:txBody>
@@ -5771,42 +5841,35 @@
             <a:pPr lvl="0"/>
             <a:r>
               <a:rPr/>
-              <a:t>Jejunostomy feeds started</a:t>
-            </a:r>
-          </a:p>
-          <a:p>
-            <a:pPr lvl="0"/>
-            <a:r>
-              <a:rPr/>
-              <a:t>Up in a chair most of the day</a:t>
-            </a:r>
-          </a:p>
-          <a:p>
-            <a:pPr lvl="0"/>
-            <a:r>
-              <a:rPr/>
-              <a:t>Walking in the halls</a:t>
-            </a:r>
-          </a:p>
-          <a:p>
-            <a:pPr lvl="1"/>
-            <a:r>
-              <a:rPr/>
-              <a:t>Start with assistance</a:t>
-            </a:r>
-          </a:p>
-          <a:p>
-            <a:pPr lvl="1"/>
-            <a:r>
-              <a:rPr/>
-              <a:t>Improves lung function</a:t>
-            </a:r>
-          </a:p>
-          <a:p>
-            <a:pPr lvl="1"/>
-            <a:r>
-              <a:rPr/>
-              <a:t>Prevents loss of muscle strength</a:t>
+              <a:t>Remains in place for 2-5 days</a:t>
+            </a:r>
+          </a:p>
+          <a:p>
+            <a:pPr lvl="0"/>
+            <a:r>
+              <a:rPr/>
+              <a:t>Dosage can be adjusted as needed</a:t>
+            </a:r>
+          </a:p>
+          <a:p>
+            <a:pPr lvl="0"/>
+            <a:r>
+              <a:rPr/>
+              <a:t>Can make it more difficult to urinate</a:t>
+            </a:r>
+          </a:p>
+          <a:p>
+            <a:pPr lvl="0"/>
+            <a:r>
+              <a:rPr/>
+              <a:t>May require foley catheter in bladder</a:t>
+            </a:r>
+          </a:p>
+          <a:p>
+            <a:pPr lvl="0"/>
+            <a:r>
+              <a:rPr/>
+              <a:t>Foley catheter removed after epidural removed</a:t>
             </a:r>
           </a:p>
         </p:txBody>
@@ -5858,7 +5921,7 @@
             </a:pPr>
             <a:r>
               <a:rPr/>
-              <a:t>Jejunostomy Feeds</a:t>
+              <a:t>Intensive Care Unit (ICU) (2-4 days)</a:t>
             </a:r>
           </a:p>
         </p:txBody>
@@ -5878,49 +5941,45 @@
           <a:bodyPr/>
           <a:lstStyle/>
           <a:p>
-            <a:pPr lvl="0" indent="0" marL="0">
-              <a:buNone/>
-            </a:pPr>
-            <a:r>
-              <a:rPr/>
-              <a:t>Jejunostomy tube feeds</a:t>
-            </a:r>
-          </a:p>
-          <a:p>
-            <a:pPr lvl="0"/>
-            <a:r>
-              <a:rPr/>
-              <a:t>Start continuous (24 hours)</a:t>
-            </a:r>
-          </a:p>
-          <a:p>
-            <a:pPr lvl="0"/>
-            <a:r>
-              <a:rPr/>
-              <a:t>Convert to night-time only (16 hours)</a:t>
-            </a:r>
-          </a:p>
-          <a:p>
-            <a:pPr lvl="0" indent="0" marL="0">
-              <a:buNone/>
-            </a:pPr>
-            <a:r>
-              <a:rPr/>
-              <a:t>Water administered through feeding tube</a:t>
-            </a:r>
-          </a:p>
-          <a:p>
-            <a:pPr lvl="0"/>
-            <a:r>
-              <a:rPr/>
-              <a:t>Usually 8oz 4 times/day</a:t>
-            </a:r>
-          </a:p>
-          <a:p>
-            <a:pPr lvl="0"/>
-            <a:r>
-              <a:rPr/>
-              <a:t>Important to prevent dehydration</a:t>
+            <a:pPr lvl="0"/>
+            <a:r>
+              <a:rPr/>
+              <a:t>Surgical ICU on 11th floor</a:t>
+            </a:r>
+          </a:p>
+          <a:p>
+            <a:pPr lvl="0"/>
+            <a:r>
+              <a:rPr/>
+              <a:t>NG tube in nose to drain stomach and esophagus</a:t>
+            </a:r>
+          </a:p>
+          <a:p>
+            <a:pPr lvl="0"/>
+            <a:r>
+              <a:rPr/>
+              <a:t>Catheter in bladder</a:t>
+            </a:r>
+          </a:p>
+          <a:p>
+            <a:pPr lvl="0"/>
+            <a:r>
+              <a:rPr/>
+              <a:t>Chest tube right chest</a:t>
+            </a:r>
+          </a:p>
+          <a:p>
+            <a:pPr lvl="0"/>
+            <a:r>
+              <a:rPr/>
+              <a:t>Abdominal drains (usually 2)</a:t>
+            </a:r>
+          </a:p>
+          <a:p>
+            <a:pPr lvl="0"/>
+            <a:r>
+              <a:rPr/>
+              <a:t>Feeding jejunostomy (usually stays in 8 wks)</a:t>
             </a:r>
           </a:p>
         </p:txBody>
@@ -5959,20 +6018,20 @@
         </p:nvSpPr>
         <p:spPr>
           <a:xfrm>
-            <a:off x="315045" y="205979"/>
-            <a:ext cx="8529278" cy="857250"/>
-          </a:xfrm>
-        </p:spPr>
-        <p:txBody>
-          <a:bodyPr/>
-          <a:lstStyle/>
-          <a:p>
-            <a:pPr lvl="0" indent="0" marL="0">
-              <a:buNone/>
-            </a:pPr>
-            <a:r>
-              <a:rPr/>
-              <a:t>Jejunostomy Tube</a:t>
+            <a:off x="284309" y="205979"/>
+            <a:ext cx="8552330" cy="662317"/>
+          </a:xfrm>
+        </p:spPr>
+        <p:txBody>
+          <a:bodyPr/>
+          <a:lstStyle/>
+          <a:p>
+            <a:pPr lvl="0" indent="0" marL="0">
+              <a:buNone/>
+            </a:pPr>
+            <a:r>
+              <a:rPr/>
+              <a:t>Intensive Care Unit (ICU)</a:t>
             </a:r>
           </a:p>
         </p:txBody>
@@ -5984,7 +6043,7 @@
             <a:spLocks noGrp="1"/>
           </p:cNvSpPr>
           <p:nvPr>
-            <p:ph idx="1" sz="half"/>
+            <p:ph idx="1"/>
           </p:nvPr>
         </p:nvSpPr>
         <p:spPr/>
@@ -5995,62 +6054,39 @@
             <a:pPr lvl="0"/>
             <a:r>
               <a:rPr/>
-              <a:t>Nutrition to bypasses the esophagus and stomach</a:t>
-            </a:r>
-          </a:p>
-          <a:p>
-            <a:pPr lvl="0"/>
-            <a:r>
-              <a:rPr/>
-              <a:t>Placed in small intestine</a:t>
-            </a:r>
-          </a:p>
-          <a:p>
-            <a:pPr lvl="0"/>
-            <a:r>
-              <a:rPr/>
-              <a:t>Pump administers feedings slowly</a:t>
-            </a:r>
-          </a:p>
-          <a:p>
-            <a:pPr lvl="0"/>
-            <a:r>
-              <a:rPr/>
-              <a:t>Feeding done at night</a:t>
-            </a:r>
-          </a:p>
-        </p:txBody>
-      </p:sp>
-      <p:pic>
-        <p:nvPicPr>
-          <p:cNvPr descr="images/nutrition_jtube.png" id="0" name="Picture 1"/>
-          <p:cNvPicPr>
-            <a:picLocks noGrp="1" noChangeAspect="1"/>
-          </p:cNvPicPr>
-          <p:nvPr/>
-        </p:nvPicPr>
-        <p:blipFill>
-          <a:blip r:embed="rId2"/>
-          <a:stretch>
-            <a:fillRect/>
-          </a:stretch>
-        </p:blipFill>
-        <p:spPr bwMode="auto">
-          <a:xfrm>
-            <a:off x="4902200" y="1193800"/>
-            <a:ext cx="3644900" cy="3733800"/>
-          </a:xfrm>
-          <a:prstGeom prst="rect">
-            <a:avLst/>
-          </a:prstGeom>
-          <a:noFill/>
-          <a:ln w="9525">
-            <a:noFill/>
-            <a:headEnd/>
-            <a:tailEnd/>
-          </a:ln>
-        </p:spPr>
-      </p:pic>
+              <a:t>Bladder catheter removed → check that bladder empties properly</a:t>
+            </a:r>
+          </a:p>
+          <a:p>
+            <a:pPr lvl="0"/>
+            <a:r>
+              <a:rPr/>
+              <a:t>Chest tube removed (day 2-4) → follow-up x-ray</a:t>
+            </a:r>
+          </a:p>
+          <a:p>
+            <a:pPr lvl="0"/>
+            <a:r>
+              <a:rPr/>
+              <a:t>Fluid emptied from drains every few hours</a:t>
+            </a:r>
+          </a:p>
+          <a:p>
+            <a:pPr lvl="0"/>
+            <a:r>
+              <a:rPr/>
+              <a:t>Start tube feedings by feeding</a:t>
+            </a:r>
+          </a:p>
+          <a:p>
+            <a:pPr lvl="0"/>
+            <a:r>
+              <a:rPr/>
+              <a:t>Feeding jejunostomy (stays in 8 weeks)</a:t>
+            </a:r>
+          </a:p>
+        </p:txBody>
+      </p:sp>
     </p:spTree>
   </p:cSld>
 </p:sld>
@@ -6085,91 +6121,132 @@
         </p:nvSpPr>
         <p:spPr>
           <a:xfrm>
-            <a:off x="315045" y="205979"/>
-            <a:ext cx="8529278" cy="857250"/>
-          </a:xfrm>
-        </p:spPr>
-        <p:txBody>
-          <a:bodyPr/>
-          <a:lstStyle/>
-          <a:p>
-            <a:pPr lvl="0" indent="0" marL="0">
-              <a:buNone/>
-            </a:pPr>
-            <a:r>
-              <a:rPr/>
-              <a:t>Goals of Surgery</a:t>
-            </a:r>
-          </a:p>
-        </p:txBody>
-      </p:sp>
-      <p:sp>
-        <p:nvSpPr>
-          <p:cNvPr id="3" name="Content Placeholder 2"/>
-          <p:cNvSpPr>
-            <a:spLocks noGrp="1"/>
-          </p:cNvSpPr>
-          <p:nvPr>
-            <p:ph idx="1" sz="half"/>
-          </p:nvPr>
-        </p:nvSpPr>
-        <p:spPr/>
-        <p:txBody>
-          <a:bodyPr/>
-          <a:lstStyle/>
-          <a:p>
-            <a:pPr lvl="0"/>
-            <a:r>
-              <a:rPr/>
-              <a:t>Remove tumor from esophagus</a:t>
-            </a:r>
-          </a:p>
-          <a:p>
-            <a:pPr lvl="0"/>
-            <a:r>
-              <a:rPr/>
-              <a:t>Remove surrounding lymph nodes</a:t>
-            </a:r>
-          </a:p>
-          <a:p>
-            <a:pPr lvl="0"/>
-            <a:r>
-              <a:rPr/>
-              <a:t>Create a new esophagus</a:t>
-            </a:r>
-          </a:p>
-        </p:txBody>
-      </p:sp>
-      <p:pic>
-        <p:nvPicPr>
-          <p:cNvPr descr="images/Eso_Resection1_ai.png" id="0" name="Picture 1"/>
-          <p:cNvPicPr>
-            <a:picLocks noGrp="1" noChangeAspect="1"/>
-          </p:cNvPicPr>
-          <p:nvPr/>
-        </p:nvPicPr>
-        <p:blipFill>
-          <a:blip r:embed="rId2"/>
-          <a:stretch>
-            <a:fillRect/>
-          </a:stretch>
-        </p:blipFill>
-        <p:spPr bwMode="auto">
-          <a:xfrm>
-            <a:off x="4914900" y="1193800"/>
-            <a:ext cx="3632200" cy="3733800"/>
-          </a:xfrm>
-          <a:prstGeom prst="rect">
-            <a:avLst/>
-          </a:prstGeom>
-          <a:noFill/>
-          <a:ln w="9525">
-            <a:noFill/>
-            <a:headEnd/>
-            <a:tailEnd/>
-          </a:ln>
-        </p:spPr>
-      </p:pic>
+            <a:off x="284309" y="205979"/>
+            <a:ext cx="8552330" cy="662317"/>
+          </a:xfrm>
+        </p:spPr>
+        <p:txBody>
+          <a:bodyPr/>
+          <a:lstStyle/>
+          <a:p>
+            <a:pPr lvl="0" indent="0" marL="0">
+              <a:buNone/>
+            </a:pPr>
+            <a:r>
+              <a:rPr/>
+              <a:t>Esophagectomy for Cancers of the Esophagus or GE Junction</a:t>
+            </a:r>
+          </a:p>
+        </p:txBody>
+      </p:sp>
+      <mc:AlternateContent xmlns:mc="http://schemas.openxmlformats.org/markup-compatibility/2006">
+        <mc:Choice xmlns:a14="http://schemas.microsoft.com/office/drawing/2010/main" Requires="a14">
+          <p:sp>
+            <p:nvSpPr>
+              <p:cNvPr id="3" name="Content Placeholder 2"/>
+              <p:cNvSpPr>
+                <a:spLocks noGrp="1"/>
+              </p:cNvSpPr>
+              <p:nvPr>
+                <p:ph idx="1"/>
+              </p:nvPr>
+            </p:nvSpPr>
+            <p:spPr/>
+            <p:txBody>
+              <a:bodyPr/>
+              <a:lstStyle/>
+              <a:p>
+                <a:pPr lvl="0" indent="0" marL="0">
+                  <a:buNone/>
+                </a:pPr>
+                <a:r>
+                  <a:rPr/>
+                  <a:t>Primary Surgery</a:t>
+                </a:r>
+              </a:p>
+              <a:p>
+                <a:pPr lvl="0"/>
+                <a:r>
+                  <a:rPr/>
+                  <a:t>Superficial Tumors (T1) not completely removed by endoscopy</a:t>
+                </a:r>
+              </a:p>
+              <a:p>
+                <a:pPr lvl="0"/>
+                <a:r>
+                  <a:rPr/>
+                  <a:t>Localized Tumors (T2 N0 M0)</a:t>
+                </a:r>
+              </a:p>
+              <a:p>
+                <a:pPr lvl="0"/>
+                <a:r>
+                  <a:rPr/>
+                  <a:t>Surgery scheduled after medical evaluation</a:t>
+                </a:r>
+              </a:p>
+              <a:p>
+                <a:pPr lvl="0" indent="0" marL="0">
+                  <a:buNone/>
+                </a:pPr>
+                <a:r>
+                  <a:rPr/>
+                  <a:t>Preoperative Therapy </a:t>
+                </a:r>
+                <a14:m>
+                  <m:oMath xmlns:m="http://schemas.openxmlformats.org/officeDocument/2006/math">
+                    <m:r>
+                      <m:rPr>
+                        <m:sty m:val="p"/>
+                      </m:rPr>
+                      <m:t>→</m:t>
+                    </m:r>
+                  </m:oMath>
+                </a14:m>
+                <a:r>
+                  <a:rPr/>
+                  <a:t> Surgery</a:t>
+                </a:r>
+              </a:p>
+              <a:p>
+                <a:pPr lvl="0"/>
+                <a:r>
+                  <a:rPr/>
+                  <a:t>Locally Advanced (T3 Nx M0)</a:t>
+                </a:r>
+              </a:p>
+              <a:p>
+                <a:pPr lvl="0"/>
+                <a:r>
+                  <a:rPr/>
+                  <a:t>Surgery scheduled after</a:t>
+                </a:r>
+              </a:p>
+              <a:p>
+                <a:pPr lvl="1"/>
+                <a:r>
+                  <a:rPr/>
+                  <a:t>Recovery from preoperative therapy</a:t>
+                </a:r>
+              </a:p>
+              <a:p>
+                <a:pPr lvl="1"/>
+                <a:r>
+                  <a:rPr/>
+                  <a:t>Restaging scans (CT or PET)</a:t>
+                </a:r>
+              </a:p>
+              <a:p>
+                <a:pPr lvl="1"/>
+                <a:r>
+                  <a:rPr/>
+                  <a:t>Medical evaluation</a:t>
+                </a:r>
+              </a:p>
+            </p:txBody>
+          </p:sp>
+        </mc:Choice>
+      </mc:AlternateContent>
     </p:spTree>
   </p:cSld>
 </p:sld>
@@ -6217,7 +6294,7 @@
             </a:pPr>
             <a:r>
               <a:rPr/>
-              <a:t>Jejunostomy Typical Regimen</a:t>
+              <a:t>Ward - 6Tower</a:t>
             </a:r>
           </a:p>
         </p:txBody>
@@ -6240,37 +6317,42 @@
             <a:pPr lvl="0"/>
             <a:r>
               <a:rPr/>
-              <a:t>Jejunostomy tube feeds for 16 hours (6pm-10am)</a:t>
+              <a:t>Jejunostomy feeds started</a:t>
+            </a:r>
+          </a:p>
+          <a:p>
+            <a:pPr lvl="0"/>
+            <a:r>
+              <a:rPr/>
+              <a:t>Up in a chair most of the day</a:t>
+            </a:r>
+          </a:p>
+          <a:p>
+            <a:pPr lvl="0"/>
+            <a:r>
+              <a:rPr/>
+              <a:t>Walking in the halls</a:t>
             </a:r>
           </a:p>
           <a:p>
             <a:pPr lvl="1"/>
             <a:r>
               <a:rPr/>
-              <a:t>Men: 75mL/hour x 16 hours = 5 cartons</a:t>
+              <a:t>Start with assistance</a:t>
             </a:r>
           </a:p>
           <a:p>
             <a:pPr lvl="1"/>
             <a:r>
               <a:rPr/>
-              <a:t>Women: 60mL/hour x 16 hours = 4 cartons</a:t>
-            </a:r>
-          </a:p>
-          <a:p>
-            <a:pPr lvl="0"/>
-            <a:r>
-              <a:rPr/>
-              <a:t>Water 240ml (8oz) via syringe 4x/day</a:t>
-            </a:r>
-          </a:p>
-          <a:p>
-            <a:pPr lvl="0" indent="0" marL="0">
-              <a:buNone/>
-            </a:pPr>
-            <a:r>
-              <a:rPr/>
-              <a:t>Hospital nurses will teach use of the feeding tube</a:t>
+              <a:t>Improves lung function</a:t>
+            </a:r>
+          </a:p>
+          <a:p>
+            <a:pPr lvl="1"/>
+            <a:r>
+              <a:rPr/>
+              <a:t>Prevents loss of muscle strength</a:t>
             </a:r>
           </a:p>
         </p:txBody>
@@ -6322,7 +6404,7 @@
             </a:pPr>
             <a:r>
               <a:rPr/>
-              <a:t>Jejunostomy Feeds with Diabetes</a:t>
+              <a:t>Jejunostomy Feeds</a:t>
             </a:r>
           </a:p>
         </p:txBody>
@@ -6347,51 +6429,44 @@
             </a:pPr>
             <a:r>
               <a:rPr/>
-              <a:t>Jejunostomy feedings elevate blood sugars</a:t>
-            </a:r>
-          </a:p>
-          <a:p>
-            <a:pPr lvl="0"/>
-            <a:r>
-              <a:rPr/>
-              <a:t>Insulin may be required along with feeds</a:t>
-            </a:r>
-          </a:p>
-          <a:p>
-            <a:pPr lvl="0" indent="0" marL="0">
-              <a:buNone/>
-            </a:pPr>
-            <a:r>
-              <a:rPr/>
-              <a:t>Typical Pattern for tube feeds</a:t>
-            </a:r>
-          </a:p>
-          <a:p>
-            <a:pPr lvl="0"/>
-            <a:r>
-              <a:rPr/>
-              <a:t>Feeds run via pump from 6pm to 10am</a:t>
-            </a:r>
-          </a:p>
-          <a:p>
-            <a:pPr lvl="0"/>
-            <a:r>
-              <a:rPr/>
-              <a:t>Insulin at 6pm (70/30 insulin)</a:t>
-            </a:r>
-          </a:p>
-          <a:p>
-            <a:pPr lvl="0"/>
-            <a:r>
-              <a:rPr/>
-              <a:t>Insulin at Midnight (70/30 insulin)</a:t>
-            </a:r>
-          </a:p>
-          <a:p>
-            <a:pPr lvl="0"/>
-            <a:r>
-              <a:rPr/>
-              <a:t>No insulin if tube feedings are not run</a:t>
+              <a:t>Jejunostomy tube feeds</a:t>
+            </a:r>
+          </a:p>
+          <a:p>
+            <a:pPr lvl="0"/>
+            <a:r>
+              <a:rPr/>
+              <a:t>Start continuous (24 hours)</a:t>
+            </a:r>
+          </a:p>
+          <a:p>
+            <a:pPr lvl="0"/>
+            <a:r>
+              <a:rPr/>
+              <a:t>Convert to night-time only (16 hours)</a:t>
+            </a:r>
+          </a:p>
+          <a:p>
+            <a:pPr lvl="0" indent="0" marL="0">
+              <a:buNone/>
+            </a:pPr>
+            <a:r>
+              <a:rPr/>
+              <a:t>Water administered through feeding tube</a:t>
+            </a:r>
+          </a:p>
+          <a:p>
+            <a:pPr lvl="0"/>
+            <a:r>
+              <a:rPr/>
+              <a:t>Usually 8oz 4 times/day</a:t>
+            </a:r>
+          </a:p>
+          <a:p>
+            <a:pPr lvl="0"/>
+            <a:r>
+              <a:rPr/>
+              <a:t>Important to prevent dehydration</a:t>
             </a:r>
           </a:p>
         </p:txBody>
@@ -6443,7 +6518,7 @@
             </a:pPr>
             <a:r>
               <a:rPr/>
-              <a:t>Jejunostomy Video</a:t>
+              <a:t>Jejunostomy Tube</a:t>
             </a:r>
           </a:p>
         </p:txBody>
@@ -6463,19 +6538,38 @@
           <a:bodyPr/>
           <a:lstStyle/>
           <a:p>
-            <a:pPr lvl="0" indent="0" marL="0">
-              <a:buNone/>
-            </a:pPr>
-            <a:r>
-              <a:rPr/>
-              <a:t>A video is available to help become familiar with the feeding jejunostomy</a:t>
+            <a:pPr lvl="0"/>
+            <a:r>
+              <a:rPr/>
+              <a:t>Nutrition to bypasses the esophagus and stomach</a:t>
+            </a:r>
+          </a:p>
+          <a:p>
+            <a:pPr lvl="0"/>
+            <a:r>
+              <a:rPr/>
+              <a:t>Placed in small intestine</a:t>
+            </a:r>
+          </a:p>
+          <a:p>
+            <a:pPr lvl="0"/>
+            <a:r>
+              <a:rPr/>
+              <a:t>Pump administers feedings slowly</a:t>
+            </a:r>
+          </a:p>
+          <a:p>
+            <a:pPr lvl="0"/>
+            <a:r>
+              <a:rPr/>
+              <a:t>Feeding done at night</a:t>
             </a:r>
           </a:p>
         </p:txBody>
       </p:sp>
       <p:pic>
         <p:nvPicPr>
-          <p:cNvPr descr="images/nutrition_jejunostomy_qrcode.png" id="0" name="Picture 1"/>
+          <p:cNvPr descr="images/nutrition_jtube.png" id="0" name="Picture 1"/>
           <p:cNvPicPr>
             <a:picLocks noGrp="1" noChangeAspect="1"/>
           </p:cNvPicPr>
@@ -6489,8 +6583,8 @@
         </p:blipFill>
         <p:spPr bwMode="auto">
           <a:xfrm>
-            <a:off x="5067300" y="1193800"/>
-            <a:ext cx="3327400" cy="3733800"/>
+            <a:off x="4902200" y="1193800"/>
+            <a:ext cx="3644900" cy="3733800"/>
           </a:xfrm>
           <a:prstGeom prst="rect">
             <a:avLst/>
@@ -6550,7 +6644,7 @@
             </a:pPr>
             <a:r>
               <a:rPr/>
-              <a:t>Activity after Surgery</a:t>
+              <a:t>Jejunostomy Typical Regimen</a:t>
             </a:r>
           </a:p>
         </p:txBody>
@@ -6573,35 +6667,37 @@
             <a:pPr lvl="0"/>
             <a:r>
               <a:rPr/>
-              <a:t>Up in chair most of the day</a:t>
-            </a:r>
-          </a:p>
-          <a:p>
-            <a:pPr lvl="0"/>
-            <a:r>
-              <a:rPr/>
-              <a:t>Walking with help from nurse/Physical Therapist</a:t>
-            </a:r>
-          </a:p>
-          <a:p>
-            <a:pPr lvl="0"/>
-            <a:r>
-              <a:rPr/>
-              <a:t>Goals:</a:t>
+              <a:t>Jejunostomy tube feeds for 16 hours (6pm-10am)</a:t>
             </a:r>
           </a:p>
           <a:p>
             <a:pPr lvl="1"/>
             <a:r>
               <a:rPr/>
-              <a:t>Improve lung function</a:t>
+              <a:t>Men: 75mL/hour x 16 hours = 5 cartons</a:t>
             </a:r>
           </a:p>
           <a:p>
             <a:pPr lvl="1"/>
             <a:r>
               <a:rPr/>
-              <a:t>Prevent muscle loss</a:t>
+              <a:t>Women: 60mL/hour x 16 hours = 4 cartons</a:t>
+            </a:r>
+          </a:p>
+          <a:p>
+            <a:pPr lvl="0"/>
+            <a:r>
+              <a:rPr/>
+              <a:t>Water 240ml (8oz) via syringe 4x/day</a:t>
+            </a:r>
+          </a:p>
+          <a:p>
+            <a:pPr lvl="0" indent="0" marL="0">
+              <a:buNone/>
+            </a:pPr>
+            <a:r>
+              <a:rPr/>
+              <a:t>Hospital nurses will teach use of the feeding tube</a:t>
             </a:r>
           </a:p>
         </p:txBody>
@@ -6612,6 +6708,337 @@
 </file>
 
 <file path=ppt/slides/slide34.xml><?xml version="1.0" encoding="utf-8"?>
+<p:sld xmlns:a="http://schemas.openxmlformats.org/drawingml/2006/main" xmlns:r="http://schemas.openxmlformats.org/officeDocument/2006/relationships" xmlns:p="http://schemas.openxmlformats.org/presentationml/2006/main">
+  <p:cSld>
+    <p:spTree>
+      <p:nvGrpSpPr>
+        <p:cNvPr id="1" name=""/>
+        <p:cNvGrpSpPr/>
+        <p:nvPr/>
+      </p:nvGrpSpPr>
+      <p:grpSpPr>
+        <a:xfrm>
+          <a:off x="0" y="0"/>
+          <a:ext cx="0" cy="0"/>
+          <a:chOff x="0" y="0"/>
+          <a:chExt cx="0" cy="0"/>
+        </a:xfrm>
+      </p:grpSpPr>
+      <p:sp>
+        <p:nvSpPr>
+          <p:cNvPr id="2" name="Title 1"/>
+          <p:cNvSpPr>
+            <a:spLocks noGrp="1"/>
+          </p:cNvSpPr>
+          <p:nvPr>
+            <p:ph type="title"/>
+          </p:nvPr>
+        </p:nvSpPr>
+        <p:spPr>
+          <a:xfrm>
+            <a:off x="284309" y="205979"/>
+            <a:ext cx="8552330" cy="662317"/>
+          </a:xfrm>
+        </p:spPr>
+        <p:txBody>
+          <a:bodyPr/>
+          <a:lstStyle/>
+          <a:p>
+            <a:pPr lvl="0" indent="0" marL="0">
+              <a:buNone/>
+            </a:pPr>
+            <a:r>
+              <a:rPr/>
+              <a:t>Jejunostomy Feeds with Diabetes</a:t>
+            </a:r>
+          </a:p>
+        </p:txBody>
+      </p:sp>
+      <p:sp>
+        <p:nvSpPr>
+          <p:cNvPr id="3" name="Content Placeholder 2"/>
+          <p:cNvSpPr>
+            <a:spLocks noGrp="1"/>
+          </p:cNvSpPr>
+          <p:nvPr>
+            <p:ph idx="1"/>
+          </p:nvPr>
+        </p:nvSpPr>
+        <p:spPr/>
+        <p:txBody>
+          <a:bodyPr/>
+          <a:lstStyle/>
+          <a:p>
+            <a:pPr lvl="0" indent="0" marL="0">
+              <a:buNone/>
+            </a:pPr>
+            <a:r>
+              <a:rPr/>
+              <a:t>Jejunostomy feedings elevate blood sugars</a:t>
+            </a:r>
+          </a:p>
+          <a:p>
+            <a:pPr lvl="0"/>
+            <a:r>
+              <a:rPr/>
+              <a:t>Insulin may be required along with feeds</a:t>
+            </a:r>
+          </a:p>
+          <a:p>
+            <a:pPr lvl="0" indent="0" marL="0">
+              <a:buNone/>
+            </a:pPr>
+            <a:r>
+              <a:rPr/>
+              <a:t>Typical Pattern for tube feeds</a:t>
+            </a:r>
+          </a:p>
+          <a:p>
+            <a:pPr lvl="0"/>
+            <a:r>
+              <a:rPr/>
+              <a:t>Feeds run via pump from 6pm to 10am</a:t>
+            </a:r>
+          </a:p>
+          <a:p>
+            <a:pPr lvl="0"/>
+            <a:r>
+              <a:rPr/>
+              <a:t>Insulin at 6pm (70/30 insulin)</a:t>
+            </a:r>
+          </a:p>
+          <a:p>
+            <a:pPr lvl="0"/>
+            <a:r>
+              <a:rPr/>
+              <a:t>Insulin at Midnight (70/30 insulin)</a:t>
+            </a:r>
+          </a:p>
+          <a:p>
+            <a:pPr lvl="0"/>
+            <a:r>
+              <a:rPr/>
+              <a:t>No insulin if tube feedings are not run</a:t>
+            </a:r>
+          </a:p>
+        </p:txBody>
+      </p:sp>
+    </p:spTree>
+  </p:cSld>
+</p:sld>
+</file>
+
+<file path=ppt/slides/slide35.xml><?xml version="1.0" encoding="utf-8"?>
+<p:sld xmlns:a="http://schemas.openxmlformats.org/drawingml/2006/main" xmlns:r="http://schemas.openxmlformats.org/officeDocument/2006/relationships" xmlns:p="http://schemas.openxmlformats.org/presentationml/2006/main">
+  <p:cSld>
+    <p:spTree>
+      <p:nvGrpSpPr>
+        <p:cNvPr id="1" name=""/>
+        <p:cNvGrpSpPr/>
+        <p:nvPr/>
+      </p:nvGrpSpPr>
+      <p:grpSpPr>
+        <a:xfrm>
+          <a:off x="0" y="0"/>
+          <a:ext cx="0" cy="0"/>
+          <a:chOff x="0" y="0"/>
+          <a:chExt cx="0" cy="0"/>
+        </a:xfrm>
+      </p:grpSpPr>
+      <p:sp>
+        <p:nvSpPr>
+          <p:cNvPr id="2" name="Title 1"/>
+          <p:cNvSpPr>
+            <a:spLocks noGrp="1"/>
+          </p:cNvSpPr>
+          <p:nvPr>
+            <p:ph type="title"/>
+          </p:nvPr>
+        </p:nvSpPr>
+        <p:spPr>
+          <a:xfrm>
+            <a:off x="315045" y="205979"/>
+            <a:ext cx="8529278" cy="857250"/>
+          </a:xfrm>
+        </p:spPr>
+        <p:txBody>
+          <a:bodyPr/>
+          <a:lstStyle/>
+          <a:p>
+            <a:pPr lvl="0" indent="0" marL="0">
+              <a:buNone/>
+            </a:pPr>
+            <a:r>
+              <a:rPr/>
+              <a:t>Jejunostomy Video</a:t>
+            </a:r>
+          </a:p>
+        </p:txBody>
+      </p:sp>
+      <p:sp>
+        <p:nvSpPr>
+          <p:cNvPr id="3" name="Content Placeholder 2"/>
+          <p:cNvSpPr>
+            <a:spLocks noGrp="1"/>
+          </p:cNvSpPr>
+          <p:nvPr>
+            <p:ph idx="1" sz="half"/>
+          </p:nvPr>
+        </p:nvSpPr>
+        <p:spPr/>
+        <p:txBody>
+          <a:bodyPr/>
+          <a:lstStyle/>
+          <a:p>
+            <a:pPr lvl="0" indent="0" marL="0">
+              <a:buNone/>
+            </a:pPr>
+            <a:r>
+              <a:rPr/>
+              <a:t>A video is available to help become familiar with the feeding jejunostomy</a:t>
+            </a:r>
+          </a:p>
+        </p:txBody>
+      </p:sp>
+      <p:pic>
+        <p:nvPicPr>
+          <p:cNvPr descr="images/nutrition_jejunostomy_qrcode.png" id="0" name="Picture 1"/>
+          <p:cNvPicPr>
+            <a:picLocks noGrp="1" noChangeAspect="1"/>
+          </p:cNvPicPr>
+          <p:nvPr/>
+        </p:nvPicPr>
+        <p:blipFill>
+          <a:blip r:embed="rId2"/>
+          <a:stretch>
+            <a:fillRect/>
+          </a:stretch>
+        </p:blipFill>
+        <p:spPr bwMode="auto">
+          <a:xfrm>
+            <a:off x="5067300" y="1193800"/>
+            <a:ext cx="3327400" cy="3733800"/>
+          </a:xfrm>
+          <a:prstGeom prst="rect">
+            <a:avLst/>
+          </a:prstGeom>
+          <a:noFill/>
+          <a:ln w="9525">
+            <a:noFill/>
+            <a:headEnd/>
+            <a:tailEnd/>
+          </a:ln>
+        </p:spPr>
+      </p:pic>
+    </p:spTree>
+  </p:cSld>
+</p:sld>
+</file>
+
+<file path=ppt/slides/slide36.xml><?xml version="1.0" encoding="utf-8"?>
+<p:sld xmlns:a="http://schemas.openxmlformats.org/drawingml/2006/main" xmlns:r="http://schemas.openxmlformats.org/officeDocument/2006/relationships" xmlns:p="http://schemas.openxmlformats.org/presentationml/2006/main">
+  <p:cSld>
+    <p:spTree>
+      <p:nvGrpSpPr>
+        <p:cNvPr id="1" name=""/>
+        <p:cNvGrpSpPr/>
+        <p:nvPr/>
+      </p:nvGrpSpPr>
+      <p:grpSpPr>
+        <a:xfrm>
+          <a:off x="0" y="0"/>
+          <a:ext cx="0" cy="0"/>
+          <a:chOff x="0" y="0"/>
+          <a:chExt cx="0" cy="0"/>
+        </a:xfrm>
+      </p:grpSpPr>
+      <p:sp>
+        <p:nvSpPr>
+          <p:cNvPr id="2" name="Title 1"/>
+          <p:cNvSpPr>
+            <a:spLocks noGrp="1"/>
+          </p:cNvSpPr>
+          <p:nvPr>
+            <p:ph type="title"/>
+          </p:nvPr>
+        </p:nvSpPr>
+        <p:spPr>
+          <a:xfrm>
+            <a:off x="284309" y="205979"/>
+            <a:ext cx="8552330" cy="662317"/>
+          </a:xfrm>
+        </p:spPr>
+        <p:txBody>
+          <a:bodyPr/>
+          <a:lstStyle/>
+          <a:p>
+            <a:pPr lvl="0" indent="0" marL="0">
+              <a:buNone/>
+            </a:pPr>
+            <a:r>
+              <a:rPr/>
+              <a:t>Activity after Surgery</a:t>
+            </a:r>
+          </a:p>
+        </p:txBody>
+      </p:sp>
+      <p:sp>
+        <p:nvSpPr>
+          <p:cNvPr id="3" name="Content Placeholder 2"/>
+          <p:cNvSpPr>
+            <a:spLocks noGrp="1"/>
+          </p:cNvSpPr>
+          <p:nvPr>
+            <p:ph idx="1"/>
+          </p:nvPr>
+        </p:nvSpPr>
+        <p:spPr/>
+        <p:txBody>
+          <a:bodyPr/>
+          <a:lstStyle/>
+          <a:p>
+            <a:pPr lvl="0"/>
+            <a:r>
+              <a:rPr/>
+              <a:t>Up in chair most of the day</a:t>
+            </a:r>
+          </a:p>
+          <a:p>
+            <a:pPr lvl="0"/>
+            <a:r>
+              <a:rPr/>
+              <a:t>Walking with help from nurse/Physical Therapist</a:t>
+            </a:r>
+          </a:p>
+          <a:p>
+            <a:pPr lvl="0"/>
+            <a:r>
+              <a:rPr/>
+              <a:t>Goals:</a:t>
+            </a:r>
+          </a:p>
+          <a:p>
+            <a:pPr lvl="1"/>
+            <a:r>
+              <a:rPr/>
+              <a:t>Improve lung function</a:t>
+            </a:r>
+          </a:p>
+          <a:p>
+            <a:pPr lvl="1"/>
+            <a:r>
+              <a:rPr/>
+              <a:t>Prevent muscle loss</a:t>
+            </a:r>
+          </a:p>
+        </p:txBody>
+      </p:sp>
+    </p:spTree>
+  </p:cSld>
+</p:sld>
+</file>
+
+<file path=ppt/slides/slide37.xml><?xml version="1.0" encoding="utf-8"?>
 <p:sld xmlns:a="http://schemas.openxmlformats.org/drawingml/2006/main" xmlns:r="http://schemas.openxmlformats.org/officeDocument/2006/relationships" xmlns:p="http://schemas.openxmlformats.org/presentationml/2006/main">
   <p:cSld>
     <p:spTree>
@@ -6743,7 +7170,7 @@
 </p:sld>
 </file>
 
-<file path=ppt/slides/slide35.xml><?xml version="1.0" encoding="utf-8"?>
+<file path=ppt/slides/slide38.xml><?xml version="1.0" encoding="utf-8"?>
 <p:sld xmlns:a="http://schemas.openxmlformats.org/drawingml/2006/main" xmlns:r="http://schemas.openxmlformats.org/officeDocument/2006/relationships" xmlns:p="http://schemas.openxmlformats.org/presentationml/2006/main">
   <p:cSld>
     <p:spTree>
@@ -6868,7 +7295,7 @@
 </p:sld>
 </file>
 
-<file path=ppt/slides/slide36.xml><?xml version="1.0" encoding="utf-8"?>
+<file path=ppt/slides/slide39.xml><?xml version="1.0" encoding="utf-8"?>
 <p:sld xmlns:a="http://schemas.openxmlformats.org/drawingml/2006/main" xmlns:r="http://schemas.openxmlformats.org/officeDocument/2006/relationships" xmlns:p="http://schemas.openxmlformats.org/presentationml/2006/main">
   <p:cSld>
     <p:spTree>
@@ -6969,7 +7396,7 @@
 </p:sld>
 </file>
 
-<file path=ppt/slides/slide37.xml><?xml version="1.0" encoding="utf-8"?>
+<file path=ppt/slides/slide4.xml><?xml version="1.0" encoding="utf-8"?>
 <p:sld xmlns:a="http://schemas.openxmlformats.org/drawingml/2006/main" xmlns:r="http://schemas.openxmlformats.org/officeDocument/2006/relationships" xmlns:p="http://schemas.openxmlformats.org/presentationml/2006/main">
   <p:cSld>
     <p:spTree>
@@ -7011,7 +7438,7 @@
             </a:pPr>
             <a:r>
               <a:rPr/>
-              <a:t>Discharge</a:t>
+              <a:t>Preoperative Visits</a:t>
             </a:r>
           </a:p>
         </p:txBody>
@@ -7036,56 +7463,53 @@
             </a:pPr>
             <a:r>
               <a:rPr/>
-              <a:t>Goal: ready to leave day #6/7 after surgery</a:t>
-            </a:r>
-          </a:p>
-          <a:p>
-            <a:pPr lvl="0"/>
-            <a:r>
-              <a:rPr/>
-              <a:t>Night-time tube feedings (6pm to 10am)</a:t>
-            </a:r>
-          </a:p>
-          <a:p>
-            <a:pPr lvl="0"/>
-            <a:r>
-              <a:rPr/>
-              <a:t>Nutrition by mouth (70% of patients)</a:t>
-            </a:r>
-          </a:p>
-          <a:p>
-            <a:pPr lvl="1"/>
-            <a:r>
-              <a:rPr/>
-              <a:t>1 oz of water per hour by mouth OR</a:t>
-            </a:r>
-          </a:p>
-          <a:p>
-            <a:pPr lvl="1"/>
-            <a:r>
-              <a:rPr/>
-              <a:t>Protein shakes 4oz every 2 hours</a:t>
-            </a:r>
-          </a:p>
-          <a:p>
-            <a:pPr lvl="0"/>
-            <a:r>
-              <a:rPr/>
-              <a:t>Water through tube 8oz four times per day</a:t>
-            </a:r>
-          </a:p>
-          <a:p>
-            <a:pPr lvl="0"/>
-            <a:r>
-              <a:rPr/>
-              <a:t>Home care nursing (feeding tube teaching)</a:t>
-            </a:r>
-          </a:p>
-          <a:p>
-            <a:pPr lvl="0"/>
-            <a:r>
-              <a:rPr/>
-              <a:t>Home infusion (tube feeding supplies)</a:t>
+              <a:t>Medical Oncology - Monitor chemotherapy and side effects</a:t>
+            </a:r>
+          </a:p>
+          <a:p>
+            <a:pPr lvl="0" indent="0" marL="0">
+              <a:buNone/>
+            </a:pPr>
+            <a:r>
+              <a:rPr/>
+              <a:t>Radiation Oncology - Monitor radiation and side effects</a:t>
+            </a:r>
+          </a:p>
+          <a:p>
+            <a:pPr lvl="0" indent="0" marL="0">
+              <a:buNone/>
+            </a:pPr>
+            <a:r>
+              <a:rPr/>
+              <a:t>Surgical Oncology</a:t>
+            </a:r>
+          </a:p>
+          <a:p>
+            <a:pPr lvl="0"/>
+            <a:r>
+              <a:rPr/>
+              <a:t>Consult visit with Dr Salo</a:t>
+            </a:r>
+          </a:p>
+          <a:p>
+            <a:pPr lvl="0"/>
+            <a:r>
+              <a:rPr/>
+              <a:t>Mid-treatment visits with Dr Salo / Kate Duncan</a:t>
+            </a:r>
+          </a:p>
+          <a:p>
+            <a:pPr lvl="0"/>
+            <a:r>
+              <a:rPr/>
+              <a:t>Preop visit with Dr Salo (may be virtual)</a:t>
+            </a:r>
+          </a:p>
+          <a:p>
+            <a:pPr lvl="0"/>
+            <a:r>
+              <a:rPr/>
+              <a:t>In-person preop visit with Kate Duncan and Liz Koch</a:t>
             </a:r>
           </a:p>
         </p:txBody>
@@ -7095,7 +7519,7 @@
 </p:sld>
 </file>
 
-<file path=ppt/slides/slide38.xml><?xml version="1.0" encoding="utf-8"?>
+<file path=ppt/slides/slide40.xml><?xml version="1.0" encoding="utf-8"?>
 <p:sld xmlns:a="http://schemas.openxmlformats.org/drawingml/2006/main" xmlns:r="http://schemas.openxmlformats.org/officeDocument/2006/relationships" xmlns:p="http://schemas.openxmlformats.org/presentationml/2006/main">
   <p:cSld>
     <p:spTree>
@@ -7137,7 +7561,7 @@
             </a:pPr>
             <a:r>
               <a:rPr/>
-              <a:t>Nutrition after Surgery</a:t>
+              <a:t>Discharge</a:t>
             </a:r>
           </a:p>
         </p:txBody>
@@ -7162,55 +7586,56 @@
             </a:pPr>
             <a:r>
               <a:rPr/>
-              <a:t>At discharge home:</a:t>
-            </a:r>
-          </a:p>
-          <a:p>
-            <a:pPr lvl="0"/>
-            <a:r>
-              <a:rPr/>
-              <a:t>Protein shakes 4oz every 2 hrs</a:t>
-            </a:r>
-          </a:p>
-          <a:p>
-            <a:pPr lvl="0"/>
-            <a:r>
-              <a:rPr/>
-              <a:t>Tube feeds 4-5 cans at night (6pm-10am)</a:t>
-            </a:r>
-          </a:p>
-          <a:p>
-            <a:pPr lvl="0" indent="0" marL="0">
-              <a:buNone/>
-            </a:pPr>
-            <a:r>
-              <a:rPr/>
-              <a:t>10-12 Days: Increase protein shakes</a:t>
-            </a:r>
-          </a:p>
-          <a:p>
-            <a:pPr lvl="0"/>
-            <a:r>
-              <a:rPr/>
-              <a:t>Tube feeds 3-4 cans at night</a:t>
-            </a:r>
-          </a:p>
-          <a:p>
-            <a:pPr lvl="0" indent="0" marL="0">
-              <a:buNone/>
-            </a:pPr>
-            <a:r>
-              <a:rPr/>
-              <a:t>Three weeks: Post-esophagectomy Diet</a:t>
-            </a:r>
-          </a:p>
-          <a:p>
-            <a:pPr lvl="0" indent="0" marL="0">
-              <a:buNone/>
-            </a:pPr>
-            <a:r>
-              <a:rPr/>
-              <a:t>8-12 weeks: Remove feeding tube (in office)</a:t>
+              <a:t>Goal: ready to leave day #6/7 after surgery</a:t>
+            </a:r>
+          </a:p>
+          <a:p>
+            <a:pPr lvl="0"/>
+            <a:r>
+              <a:rPr/>
+              <a:t>Night-time tube feedings (6pm to 10am)</a:t>
+            </a:r>
+          </a:p>
+          <a:p>
+            <a:pPr lvl="0"/>
+            <a:r>
+              <a:rPr/>
+              <a:t>Nutrition by mouth (70% of patients)</a:t>
+            </a:r>
+          </a:p>
+          <a:p>
+            <a:pPr lvl="1"/>
+            <a:r>
+              <a:rPr/>
+              <a:t>1 oz of water per hour by mouth OR</a:t>
+            </a:r>
+          </a:p>
+          <a:p>
+            <a:pPr lvl="1"/>
+            <a:r>
+              <a:rPr/>
+              <a:t>Protein shakes 4oz every 2 hours</a:t>
+            </a:r>
+          </a:p>
+          <a:p>
+            <a:pPr lvl="0"/>
+            <a:r>
+              <a:rPr/>
+              <a:t>Water through tube 8oz four times per day</a:t>
+            </a:r>
+          </a:p>
+          <a:p>
+            <a:pPr lvl="0"/>
+            <a:r>
+              <a:rPr/>
+              <a:t>Home care nursing (feeding tube teaching)</a:t>
+            </a:r>
+          </a:p>
+          <a:p>
+            <a:pPr lvl="0"/>
+            <a:r>
+              <a:rPr/>
+              <a:t>Home infusion (tube feeding supplies)</a:t>
             </a:r>
           </a:p>
         </p:txBody>
@@ -7220,7 +7645,132 @@
 </p:sld>
 </file>
 
-<file path=ppt/slides/slide39.xml><?xml version="1.0" encoding="utf-8"?>
+<file path=ppt/slides/slide41.xml><?xml version="1.0" encoding="utf-8"?>
+<p:sld xmlns:a="http://schemas.openxmlformats.org/drawingml/2006/main" xmlns:r="http://schemas.openxmlformats.org/officeDocument/2006/relationships" xmlns:p="http://schemas.openxmlformats.org/presentationml/2006/main">
+  <p:cSld>
+    <p:spTree>
+      <p:nvGrpSpPr>
+        <p:cNvPr id="1" name=""/>
+        <p:cNvGrpSpPr/>
+        <p:nvPr/>
+      </p:nvGrpSpPr>
+      <p:grpSpPr>
+        <a:xfrm>
+          <a:off x="0" y="0"/>
+          <a:ext cx="0" cy="0"/>
+          <a:chOff x="0" y="0"/>
+          <a:chExt cx="0" cy="0"/>
+        </a:xfrm>
+      </p:grpSpPr>
+      <p:sp>
+        <p:nvSpPr>
+          <p:cNvPr id="2" name="Title 1"/>
+          <p:cNvSpPr>
+            <a:spLocks noGrp="1"/>
+          </p:cNvSpPr>
+          <p:nvPr>
+            <p:ph type="title"/>
+          </p:nvPr>
+        </p:nvSpPr>
+        <p:spPr>
+          <a:xfrm>
+            <a:off x="284309" y="205979"/>
+            <a:ext cx="8552330" cy="662317"/>
+          </a:xfrm>
+        </p:spPr>
+        <p:txBody>
+          <a:bodyPr/>
+          <a:lstStyle/>
+          <a:p>
+            <a:pPr lvl="0" indent="0" marL="0">
+              <a:buNone/>
+            </a:pPr>
+            <a:r>
+              <a:rPr/>
+              <a:t>Nutrition after Surgery</a:t>
+            </a:r>
+          </a:p>
+        </p:txBody>
+      </p:sp>
+      <p:sp>
+        <p:nvSpPr>
+          <p:cNvPr id="3" name="Content Placeholder 2"/>
+          <p:cNvSpPr>
+            <a:spLocks noGrp="1"/>
+          </p:cNvSpPr>
+          <p:nvPr>
+            <p:ph idx="1"/>
+          </p:nvPr>
+        </p:nvSpPr>
+        <p:spPr/>
+        <p:txBody>
+          <a:bodyPr/>
+          <a:lstStyle/>
+          <a:p>
+            <a:pPr lvl="0" indent="0" marL="0">
+              <a:buNone/>
+            </a:pPr>
+            <a:r>
+              <a:rPr/>
+              <a:t>At discharge home:</a:t>
+            </a:r>
+          </a:p>
+          <a:p>
+            <a:pPr lvl="0"/>
+            <a:r>
+              <a:rPr/>
+              <a:t>Protein shakes 4oz every 2 hrs</a:t>
+            </a:r>
+          </a:p>
+          <a:p>
+            <a:pPr lvl="0"/>
+            <a:r>
+              <a:rPr/>
+              <a:t>Tube feeds 4-5 cans at night (6pm-10am)</a:t>
+            </a:r>
+          </a:p>
+          <a:p>
+            <a:pPr lvl="0" indent="0" marL="0">
+              <a:buNone/>
+            </a:pPr>
+            <a:r>
+              <a:rPr/>
+              <a:t>10-12 Days: Increase protein shakes</a:t>
+            </a:r>
+          </a:p>
+          <a:p>
+            <a:pPr lvl="0"/>
+            <a:r>
+              <a:rPr/>
+              <a:t>Tube feeds 3-4 cans at night</a:t>
+            </a:r>
+          </a:p>
+          <a:p>
+            <a:pPr lvl="0" indent="0" marL="0">
+              <a:buNone/>
+            </a:pPr>
+            <a:r>
+              <a:rPr/>
+              <a:t>Three weeks: Post-esophagectomy Diet</a:t>
+            </a:r>
+          </a:p>
+          <a:p>
+            <a:pPr lvl="0" indent="0" marL="0">
+              <a:buNone/>
+            </a:pPr>
+            <a:r>
+              <a:rPr/>
+              <a:t>8-12 weeks: Remove feeding tube (in office)</a:t>
+            </a:r>
+          </a:p>
+        </p:txBody>
+      </p:sp>
+    </p:spTree>
+  </p:cSld>
+</p:sld>
+</file>
+
+<file path=ppt/slides/slide42.xml><?xml version="1.0" encoding="utf-8"?>
 <p:sld xmlns:a="http://schemas.openxmlformats.org/drawingml/2006/main" xmlns:r="http://schemas.openxmlformats.org/officeDocument/2006/relationships" xmlns:p="http://schemas.openxmlformats.org/presentationml/2006/main">
   <p:cSld>
     <p:spTree>
@@ -7377,472 +7927,6 @@
 </p:sld>
 </file>
 
-<file path=ppt/slides/slide4.xml><?xml version="1.0" encoding="utf-8"?>
-<p:sld xmlns:a="http://schemas.openxmlformats.org/drawingml/2006/main" xmlns:r="http://schemas.openxmlformats.org/officeDocument/2006/relationships" xmlns:p="http://schemas.openxmlformats.org/presentationml/2006/main">
-  <p:cSld>
-    <p:spTree>
-      <p:nvGrpSpPr>
-        <p:cNvPr id="1" name=""/>
-        <p:cNvGrpSpPr/>
-        <p:nvPr/>
-      </p:nvGrpSpPr>
-      <p:grpSpPr>
-        <a:xfrm>
-          <a:off x="0" y="0"/>
-          <a:ext cx="0" cy="0"/>
-          <a:chOff x="0" y="0"/>
-          <a:chExt cx="0" cy="0"/>
-        </a:xfrm>
-      </p:grpSpPr>
-      <p:sp>
-        <p:nvSpPr>
-          <p:cNvPr id="2" name="Title 1"/>
-          <p:cNvSpPr>
-            <a:spLocks noGrp="1"/>
-          </p:cNvSpPr>
-          <p:nvPr>
-            <p:ph type="title"/>
-          </p:nvPr>
-        </p:nvSpPr>
-        <p:spPr>
-          <a:xfrm>
-            <a:off x="315045" y="205979"/>
-            <a:ext cx="8529278" cy="857250"/>
-          </a:xfrm>
-        </p:spPr>
-        <p:txBody>
-          <a:bodyPr/>
-          <a:lstStyle/>
-          <a:p>
-            <a:pPr lvl="0" indent="0" marL="0">
-              <a:buNone/>
-            </a:pPr>
-            <a:r>
-              <a:rPr/>
-              <a:t>Ivor Lewis (Transthoracic) Esophagectomy</a:t>
-            </a:r>
-          </a:p>
-        </p:txBody>
-      </p:sp>
-      <p:sp>
-        <p:nvSpPr>
-          <p:cNvPr id="3" name="Content Placeholder 2"/>
-          <p:cNvSpPr>
-            <a:spLocks noGrp="1"/>
-          </p:cNvSpPr>
-          <p:nvPr>
-            <p:ph idx="1" sz="half"/>
-          </p:nvPr>
-        </p:nvSpPr>
-        <p:spPr/>
-        <p:txBody>
-          <a:bodyPr/>
-          <a:lstStyle/>
-          <a:p>
-            <a:pPr lvl="0"/>
-            <a:r>
-              <a:rPr/>
-              <a:t>Removes tumor and lower 1/3 esophagus</a:t>
-            </a:r>
-          </a:p>
-          <a:p>
-            <a:pPr lvl="0"/>
-            <a:r>
-              <a:rPr/>
-              <a:t>Removes surrounding lymph nodes</a:t>
-            </a:r>
-          </a:p>
-          <a:p>
-            <a:pPr lvl="0"/>
-            <a:r>
-              <a:rPr/>
-              <a:t>GI tract reconstructed</a:t>
-            </a:r>
-          </a:p>
-        </p:txBody>
-      </p:sp>
-      <p:pic>
-        <p:nvPicPr>
-          <p:cNvPr descr="images/Eso_Resection2_ai.png" id="0" name="Picture 1"/>
-          <p:cNvPicPr>
-            <a:picLocks noGrp="1" noChangeAspect="1"/>
-          </p:cNvPicPr>
-          <p:nvPr/>
-        </p:nvPicPr>
-        <p:blipFill>
-          <a:blip r:embed="rId2"/>
-          <a:stretch>
-            <a:fillRect/>
-          </a:stretch>
-        </p:blipFill>
-        <p:spPr bwMode="auto">
-          <a:xfrm>
-            <a:off x="4914900" y="1193800"/>
-            <a:ext cx="3632200" cy="3733800"/>
-          </a:xfrm>
-          <a:prstGeom prst="rect">
-            <a:avLst/>
-          </a:prstGeom>
-          <a:noFill/>
-          <a:ln w="9525">
-            <a:noFill/>
-            <a:headEnd/>
-            <a:tailEnd/>
-          </a:ln>
-        </p:spPr>
-      </p:pic>
-    </p:spTree>
-  </p:cSld>
-</p:sld>
-</file>
-
-<file path=ppt/slides/slide40.xml><?xml version="1.0" encoding="utf-8"?>
-<p:sld xmlns:a="http://schemas.openxmlformats.org/drawingml/2006/main" xmlns:r="http://schemas.openxmlformats.org/officeDocument/2006/relationships" xmlns:p="http://schemas.openxmlformats.org/presentationml/2006/main">
-  <p:cSld>
-    <p:spTree>
-      <p:nvGrpSpPr>
-        <p:cNvPr id="1" name=""/>
-        <p:cNvGrpSpPr/>
-        <p:nvPr/>
-      </p:nvGrpSpPr>
-      <p:grpSpPr>
-        <a:xfrm>
-          <a:off x="0" y="0"/>
-          <a:ext cx="0" cy="0"/>
-          <a:chOff x="0" y="0"/>
-          <a:chExt cx="0" cy="0"/>
-        </a:xfrm>
-      </p:grpSpPr>
-      <p:sp>
-        <p:nvSpPr>
-          <p:cNvPr id="2" name="Title 1"/>
-          <p:cNvSpPr>
-            <a:spLocks noGrp="1"/>
-          </p:cNvSpPr>
-          <p:nvPr>
-            <p:ph type="title"/>
-          </p:nvPr>
-        </p:nvSpPr>
-        <p:spPr>
-          <a:xfrm>
-            <a:off x="284309" y="205979"/>
-            <a:ext cx="8552330" cy="662317"/>
-          </a:xfrm>
-        </p:spPr>
-        <p:txBody>
-          <a:bodyPr/>
-          <a:lstStyle/>
-          <a:p>
-            <a:pPr lvl="0" indent="0" marL="0">
-              <a:buNone/>
-            </a:pPr>
-            <a:r>
-              <a:rPr/>
-              <a:t>Post-esophagectomy Diet</a:t>
-            </a:r>
-          </a:p>
-        </p:txBody>
-      </p:sp>
-      <p:sp>
-        <p:nvSpPr>
-          <p:cNvPr id="3" name="Content Placeholder 2"/>
-          <p:cNvSpPr>
-            <a:spLocks noGrp="1"/>
-          </p:cNvSpPr>
-          <p:nvPr>
-            <p:ph idx="1"/>
-          </p:nvPr>
-        </p:nvSpPr>
-        <p:spPr/>
-        <p:txBody>
-          <a:bodyPr/>
-          <a:lstStyle/>
-          <a:p>
-            <a:pPr lvl="0"/>
-            <a:r>
-              <a:rPr/>
-              <a:t>Soft Consistency</a:t>
-            </a:r>
-          </a:p>
-          <a:p>
-            <a:pPr lvl="0"/>
-            <a:r>
-              <a:rPr/>
-              <a:t>High Protein</a:t>
-            </a:r>
-          </a:p>
-          <a:p>
-            <a:pPr lvl="0"/>
-            <a:r>
-              <a:rPr/>
-              <a:t>Avoid sugary liquids (can cause ‘dumping’)</a:t>
-            </a:r>
-          </a:p>
-          <a:p>
-            <a:pPr lvl="0"/>
-            <a:r>
-              <a:rPr/>
-              <a:t>Avoid raw vegetables (and salads)</a:t>
-            </a:r>
-          </a:p>
-          <a:p>
-            <a:pPr lvl="0"/>
-            <a:r>
-              <a:rPr/>
-              <a:t>Eating</a:t>
-            </a:r>
-          </a:p>
-          <a:p>
-            <a:pPr lvl="1"/>
-            <a:r>
-              <a:rPr/>
-              <a:t>Small, frequent meals</a:t>
-            </a:r>
-          </a:p>
-          <a:p>
-            <a:pPr lvl="1"/>
-            <a:r>
-              <a:rPr/>
-              <a:t>Sit up for 30-45 minutes after eating</a:t>
-            </a:r>
-          </a:p>
-          <a:p>
-            <a:pPr lvl="1"/>
-            <a:r>
-              <a:rPr/>
-              <a:t>Avoid eating within 2 hours of bedtime</a:t>
-            </a:r>
-          </a:p>
-        </p:txBody>
-      </p:sp>
-    </p:spTree>
-  </p:cSld>
-</p:sld>
-</file>
-
-<file path=ppt/slides/slide41.xml><?xml version="1.0" encoding="utf-8"?>
-<p:sld xmlns:a="http://schemas.openxmlformats.org/drawingml/2006/main" xmlns:r="http://schemas.openxmlformats.org/officeDocument/2006/relationships" xmlns:p="http://schemas.openxmlformats.org/presentationml/2006/main">
-  <p:cSld>
-    <p:spTree>
-      <p:nvGrpSpPr>
-        <p:cNvPr id="1" name=""/>
-        <p:cNvGrpSpPr/>
-        <p:nvPr/>
-      </p:nvGrpSpPr>
-      <p:grpSpPr>
-        <a:xfrm>
-          <a:off x="0" y="0"/>
-          <a:ext cx="0" cy="0"/>
-          <a:chOff x="0" y="0"/>
-          <a:chExt cx="0" cy="0"/>
-        </a:xfrm>
-      </p:grpSpPr>
-      <p:sp>
-        <p:nvSpPr>
-          <p:cNvPr id="2" name="Title 1"/>
-          <p:cNvSpPr>
-            <a:spLocks noGrp="1"/>
-          </p:cNvSpPr>
-          <p:nvPr>
-            <p:ph type="title"/>
-          </p:nvPr>
-        </p:nvSpPr>
-        <p:spPr>
-          <a:xfrm>
-            <a:off x="284309" y="205979"/>
-            <a:ext cx="8552330" cy="662317"/>
-          </a:xfrm>
-        </p:spPr>
-        <p:txBody>
-          <a:bodyPr/>
-          <a:lstStyle/>
-          <a:p>
-            <a:pPr lvl="0" indent="0" marL="0">
-              <a:buNone/>
-            </a:pPr>
-            <a:r>
-              <a:rPr/>
-              <a:t>Medicines at Home - Pain</a:t>
-            </a:r>
-          </a:p>
-        </p:txBody>
-      </p:sp>
-      <p:sp>
-        <p:nvSpPr>
-          <p:cNvPr id="3" name="Content Placeholder 2"/>
-          <p:cNvSpPr>
-            <a:spLocks noGrp="1"/>
-          </p:cNvSpPr>
-          <p:nvPr>
-            <p:ph idx="1"/>
-          </p:nvPr>
-        </p:nvSpPr>
-        <p:spPr/>
-        <p:txBody>
-          <a:bodyPr/>
-          <a:lstStyle/>
-          <a:p>
-            <a:pPr lvl="0" indent="0" marL="0">
-              <a:buNone/>
-            </a:pPr>
-            <a:r>
-              <a:rPr/>
-              <a:t>Acetaminophen (Tylenol) 1000mg 4x/day</a:t>
-            </a:r>
-          </a:p>
-          <a:p>
-            <a:pPr lvl="0" indent="0" marL="0">
-              <a:buNone/>
-            </a:pPr>
-            <a:r>
-              <a:rPr/>
-              <a:t>Gabapentin 300mg 3 times/day</a:t>
-            </a:r>
-          </a:p>
-          <a:p>
-            <a:pPr lvl="0" indent="0" marL="0">
-              <a:buNone/>
-            </a:pPr>
-            <a:r>
-              <a:rPr/>
-              <a:t>Oxycodone</a:t>
-            </a:r>
-          </a:p>
-          <a:p>
-            <a:pPr lvl="0"/>
-            <a:r>
-              <a:rPr/>
-              <a:t>As needed in addition to Tylenol/gabapentin</a:t>
-            </a:r>
-          </a:p>
-          <a:p>
-            <a:pPr lvl="0"/>
-            <a:r>
-              <a:rPr/>
-              <a:t>Will begin reducing dose at first postop visit</a:t>
-            </a:r>
-          </a:p>
-          <a:p>
-            <a:pPr lvl="0"/>
-            <a:r>
-              <a:rPr/>
-              <a:t>Can usually discontinue by 4 weeks</a:t>
-            </a:r>
-          </a:p>
-          <a:p>
-            <a:pPr lvl="0"/>
-            <a:r>
-              <a:rPr/>
-              <a:t>NO DRIVING WHILE ON OXYCODONE</a:t>
-            </a:r>
-          </a:p>
-        </p:txBody>
-      </p:sp>
-    </p:spTree>
-  </p:cSld>
-</p:sld>
-</file>
-
-<file path=ppt/slides/slide42.xml><?xml version="1.0" encoding="utf-8"?>
-<p:sld xmlns:a="http://schemas.openxmlformats.org/drawingml/2006/main" xmlns:r="http://schemas.openxmlformats.org/officeDocument/2006/relationships" xmlns:p="http://schemas.openxmlformats.org/presentationml/2006/main">
-  <p:cSld>
-    <p:spTree>
-      <p:nvGrpSpPr>
-        <p:cNvPr id="1" name=""/>
-        <p:cNvGrpSpPr/>
-        <p:nvPr/>
-      </p:nvGrpSpPr>
-      <p:grpSpPr>
-        <a:xfrm>
-          <a:off x="0" y="0"/>
-          <a:ext cx="0" cy="0"/>
-          <a:chOff x="0" y="0"/>
-          <a:chExt cx="0" cy="0"/>
-        </a:xfrm>
-      </p:grpSpPr>
-      <p:sp>
-        <p:nvSpPr>
-          <p:cNvPr id="2" name="Title 1"/>
-          <p:cNvSpPr>
-            <a:spLocks noGrp="1"/>
-          </p:cNvSpPr>
-          <p:nvPr>
-            <p:ph type="title"/>
-          </p:nvPr>
-        </p:nvSpPr>
-        <p:spPr>
-          <a:xfrm>
-            <a:off x="284309" y="205979"/>
-            <a:ext cx="8552330" cy="662317"/>
-          </a:xfrm>
-        </p:spPr>
-        <p:txBody>
-          <a:bodyPr/>
-          <a:lstStyle/>
-          <a:p>
-            <a:pPr lvl="0" indent="0" marL="0">
-              <a:buNone/>
-            </a:pPr>
-            <a:r>
-              <a:rPr/>
-              <a:t>Non-steroidals Anti Inflammatory (NSAID)</a:t>
-            </a:r>
-          </a:p>
-        </p:txBody>
-      </p:sp>
-      <p:sp>
-        <p:nvSpPr>
-          <p:cNvPr id="3" name="Content Placeholder 2"/>
-          <p:cNvSpPr>
-            <a:spLocks noGrp="1"/>
-          </p:cNvSpPr>
-          <p:nvPr>
-            <p:ph idx="1"/>
-          </p:nvPr>
-        </p:nvSpPr>
-        <p:spPr/>
-        <p:txBody>
-          <a:bodyPr/>
-          <a:lstStyle/>
-          <a:p>
-            <a:pPr lvl="0" indent="0" marL="0">
-              <a:buNone/>
-            </a:pPr>
-            <a:r>
-              <a:rPr/>
-              <a:t>Non-steroidal anti-inflammatories (Celebrex)</a:t>
-            </a:r>
-          </a:p>
-          <a:p>
-            <a:pPr lvl="0"/>
-            <a:r>
-              <a:rPr/>
-              <a:t>200 mg every 12 hours starting at 2 weeks</a:t>
-            </a:r>
-          </a:p>
-          <a:p>
-            <a:pPr lvl="0" indent="0" marL="0">
-              <a:buNone/>
-            </a:pPr>
-            <a:r>
-              <a:rPr/>
-              <a:t>NO GOODY POWDERS OR BCs</a:t>
-            </a:r>
-          </a:p>
-          <a:p>
-            <a:pPr lvl="0"/>
-            <a:r>
-              <a:rPr/>
-              <a:t>(Can cause permanent scarring at the surgery site)</a:t>
-            </a:r>
-          </a:p>
-        </p:txBody>
-      </p:sp>
-    </p:spTree>
-  </p:cSld>
-</p:sld>
-</file>
-
 <file path=ppt/slides/slide43.xml><?xml version="1.0" encoding="utf-8"?>
 <p:sld xmlns:a="http://schemas.openxmlformats.org/drawingml/2006/main" xmlns:r="http://schemas.openxmlformats.org/officeDocument/2006/relationships" xmlns:p="http://schemas.openxmlformats.org/presentationml/2006/main">
   <p:cSld>
@@ -7885,7 +7969,7 @@
             </a:pPr>
             <a:r>
               <a:rPr/>
-              <a:t>Acid Blockers = Proton Pump Inhibitors</a:t>
+              <a:t>Post-esophagectomy Diet</a:t>
             </a:r>
           </a:p>
         </p:txBody>
@@ -7905,33 +7989,59 @@
           <a:bodyPr/>
           <a:lstStyle/>
           <a:p>
-            <a:pPr lvl="0" indent="0" marL="0">
-              <a:buNone/>
-            </a:pPr>
-            <a:r>
-              <a:rPr/>
-              <a:t>Examples include ompeprazole and pantoprazole</a:t>
-            </a:r>
-          </a:p>
-          <a:p>
-            <a:pPr lvl="0"/>
-            <a:r>
-              <a:rPr/>
-              <a:t>Will stay on for at 1-2 years to prevent acid reflux</a:t>
-            </a:r>
-          </a:p>
-          <a:p>
-            <a:pPr lvl="0"/>
-            <a:r>
-              <a:rPr/>
-              <a:t>Important in preventing scarring at anastomosis (new connection between esophagus and stomach)</a:t>
-            </a:r>
-          </a:p>
-          <a:p>
-            <a:pPr lvl="0"/>
-            <a:r>
-              <a:rPr/>
-              <a:t>To administer through feeding tube, open capsule and resuspend beads in 60mL (2oz) of water</a:t>
+            <a:pPr lvl="0"/>
+            <a:r>
+              <a:rPr/>
+              <a:t>Soft Consistency</a:t>
+            </a:r>
+          </a:p>
+          <a:p>
+            <a:pPr lvl="0"/>
+            <a:r>
+              <a:rPr/>
+              <a:t>High Protein</a:t>
+            </a:r>
+          </a:p>
+          <a:p>
+            <a:pPr lvl="0"/>
+            <a:r>
+              <a:rPr/>
+              <a:t>Avoid sugary liquids (can cause ‘dumping’)</a:t>
+            </a:r>
+          </a:p>
+          <a:p>
+            <a:pPr lvl="0"/>
+            <a:r>
+              <a:rPr/>
+              <a:t>Avoid raw vegetables (and salads)</a:t>
+            </a:r>
+          </a:p>
+          <a:p>
+            <a:pPr lvl="0"/>
+            <a:r>
+              <a:rPr/>
+              <a:t>Eating</a:t>
+            </a:r>
+          </a:p>
+          <a:p>
+            <a:pPr lvl="1"/>
+            <a:r>
+              <a:rPr/>
+              <a:t>Small, frequent meals</a:t>
+            </a:r>
+          </a:p>
+          <a:p>
+            <a:pPr lvl="1"/>
+            <a:r>
+              <a:rPr/>
+              <a:t>Sit up for 30-45 minutes after eating</a:t>
+            </a:r>
+          </a:p>
+          <a:p>
+            <a:pPr lvl="1"/>
+            <a:r>
+              <a:rPr/>
+              <a:t>Avoid eating within 2 hours of bedtime</a:t>
             </a:r>
           </a:p>
         </p:txBody>
@@ -7983,7 +8093,7 @@
             </a:pPr>
             <a:r>
               <a:rPr/>
-              <a:t>Medicines at Home</a:t>
+              <a:t>Medicines at Home - Pain</a:t>
             </a:r>
           </a:p>
         </p:txBody>
@@ -8008,51 +8118,53 @@
             </a:pPr>
             <a:r>
               <a:rPr/>
-              <a:t>Reglan – Helps stomach empty</a:t>
-            </a:r>
-          </a:p>
-          <a:p>
-            <a:pPr lvl="0"/>
-            <a:r>
-              <a:rPr/>
-              <a:t>Will plan to stop after six weeks</a:t>
-            </a:r>
-          </a:p>
-          <a:p>
-            <a:pPr lvl="0"/>
-            <a:r>
-              <a:rPr/>
-              <a:t>0.1% risk of tardive dyskinesia (nervous tic)</a:t>
-            </a:r>
-          </a:p>
-          <a:p>
-            <a:pPr lvl="0" indent="0" marL="0">
-              <a:buNone/>
-            </a:pPr>
-            <a:r>
-              <a:rPr/>
-              <a:t>Remeron – Helps improve appetite</a:t>
-            </a:r>
-          </a:p>
-          <a:p>
-            <a:pPr lvl="0"/>
-            <a:r>
-              <a:rPr/>
-              <a:t>Can cause vivid dreams</a:t>
-            </a:r>
-          </a:p>
-          <a:p>
-            <a:pPr lvl="0"/>
-            <a:r>
-              <a:rPr/>
-              <a:t>Used for several weeks after surgery</a:t>
-            </a:r>
-          </a:p>
-          <a:p>
-            <a:pPr lvl="0"/>
-            <a:r>
-              <a:rPr/>
-              <a:t>Will stop within first three months of surgery</a:t>
+              <a:t>Acetaminophen (Tylenol) 1000mg 4x/day</a:t>
+            </a:r>
+          </a:p>
+          <a:p>
+            <a:pPr lvl="0" indent="0" marL="0">
+              <a:buNone/>
+            </a:pPr>
+            <a:r>
+              <a:rPr/>
+              <a:t>Gabapentin 300mg 3 times/day</a:t>
+            </a:r>
+          </a:p>
+          <a:p>
+            <a:pPr lvl="0" indent="0" marL="0">
+              <a:buNone/>
+            </a:pPr>
+            <a:r>
+              <a:rPr/>
+              <a:t>Oxycodone</a:t>
+            </a:r>
+          </a:p>
+          <a:p>
+            <a:pPr lvl="0"/>
+            <a:r>
+              <a:rPr/>
+              <a:t>As needed in addition to Tylenol/gabapentin</a:t>
+            </a:r>
+          </a:p>
+          <a:p>
+            <a:pPr lvl="0"/>
+            <a:r>
+              <a:rPr/>
+              <a:t>Will begin reducing dose at first postop visit</a:t>
+            </a:r>
+          </a:p>
+          <a:p>
+            <a:pPr lvl="0"/>
+            <a:r>
+              <a:rPr/>
+              <a:t>Can usually discontinue by 4 weeks</a:t>
+            </a:r>
+          </a:p>
+          <a:p>
+            <a:pPr lvl="0"/>
+            <a:r>
+              <a:rPr/>
+              <a:t>NO DRIVING WHILE ON OXYCODONE</a:t>
             </a:r>
           </a:p>
         </p:txBody>
@@ -8063,6 +8175,325 @@
 </file>
 
 <file path=ppt/slides/slide45.xml><?xml version="1.0" encoding="utf-8"?>
+<p:sld xmlns:a="http://schemas.openxmlformats.org/drawingml/2006/main" xmlns:r="http://schemas.openxmlformats.org/officeDocument/2006/relationships" xmlns:p="http://schemas.openxmlformats.org/presentationml/2006/main">
+  <p:cSld>
+    <p:spTree>
+      <p:nvGrpSpPr>
+        <p:cNvPr id="1" name=""/>
+        <p:cNvGrpSpPr/>
+        <p:nvPr/>
+      </p:nvGrpSpPr>
+      <p:grpSpPr>
+        <a:xfrm>
+          <a:off x="0" y="0"/>
+          <a:ext cx="0" cy="0"/>
+          <a:chOff x="0" y="0"/>
+          <a:chExt cx="0" cy="0"/>
+        </a:xfrm>
+      </p:grpSpPr>
+      <p:sp>
+        <p:nvSpPr>
+          <p:cNvPr id="2" name="Title 1"/>
+          <p:cNvSpPr>
+            <a:spLocks noGrp="1"/>
+          </p:cNvSpPr>
+          <p:nvPr>
+            <p:ph type="title"/>
+          </p:nvPr>
+        </p:nvSpPr>
+        <p:spPr>
+          <a:xfrm>
+            <a:off x="284309" y="205979"/>
+            <a:ext cx="8552330" cy="662317"/>
+          </a:xfrm>
+        </p:spPr>
+        <p:txBody>
+          <a:bodyPr/>
+          <a:lstStyle/>
+          <a:p>
+            <a:pPr lvl="0" indent="0" marL="0">
+              <a:buNone/>
+            </a:pPr>
+            <a:r>
+              <a:rPr/>
+              <a:t>Non-steroidals Anti Inflammatory (NSAID)</a:t>
+            </a:r>
+          </a:p>
+        </p:txBody>
+      </p:sp>
+      <p:sp>
+        <p:nvSpPr>
+          <p:cNvPr id="3" name="Content Placeholder 2"/>
+          <p:cNvSpPr>
+            <a:spLocks noGrp="1"/>
+          </p:cNvSpPr>
+          <p:nvPr>
+            <p:ph idx="1"/>
+          </p:nvPr>
+        </p:nvSpPr>
+        <p:spPr/>
+        <p:txBody>
+          <a:bodyPr/>
+          <a:lstStyle/>
+          <a:p>
+            <a:pPr lvl="0" indent="0" marL="0">
+              <a:buNone/>
+            </a:pPr>
+            <a:r>
+              <a:rPr/>
+              <a:t>Non-steroidal anti-inflammatories (Celebrex)</a:t>
+            </a:r>
+          </a:p>
+          <a:p>
+            <a:pPr lvl="0"/>
+            <a:r>
+              <a:rPr/>
+              <a:t>200 mg every 12 hours starting at 2 weeks</a:t>
+            </a:r>
+          </a:p>
+          <a:p>
+            <a:pPr lvl="0" indent="0" marL="0">
+              <a:buNone/>
+            </a:pPr>
+            <a:r>
+              <a:rPr/>
+              <a:t>NO GOODY POWDERS OR BCs</a:t>
+            </a:r>
+          </a:p>
+          <a:p>
+            <a:pPr lvl="0"/>
+            <a:r>
+              <a:rPr/>
+              <a:t>(Can cause permanent scarring at the surgery site)</a:t>
+            </a:r>
+          </a:p>
+        </p:txBody>
+      </p:sp>
+    </p:spTree>
+  </p:cSld>
+</p:sld>
+</file>
+
+<file path=ppt/slides/slide46.xml><?xml version="1.0" encoding="utf-8"?>
+<p:sld xmlns:a="http://schemas.openxmlformats.org/drawingml/2006/main" xmlns:r="http://schemas.openxmlformats.org/officeDocument/2006/relationships" xmlns:p="http://schemas.openxmlformats.org/presentationml/2006/main">
+  <p:cSld>
+    <p:spTree>
+      <p:nvGrpSpPr>
+        <p:cNvPr id="1" name=""/>
+        <p:cNvGrpSpPr/>
+        <p:nvPr/>
+      </p:nvGrpSpPr>
+      <p:grpSpPr>
+        <a:xfrm>
+          <a:off x="0" y="0"/>
+          <a:ext cx="0" cy="0"/>
+          <a:chOff x="0" y="0"/>
+          <a:chExt cx="0" cy="0"/>
+        </a:xfrm>
+      </p:grpSpPr>
+      <p:sp>
+        <p:nvSpPr>
+          <p:cNvPr id="2" name="Title 1"/>
+          <p:cNvSpPr>
+            <a:spLocks noGrp="1"/>
+          </p:cNvSpPr>
+          <p:nvPr>
+            <p:ph type="title"/>
+          </p:nvPr>
+        </p:nvSpPr>
+        <p:spPr>
+          <a:xfrm>
+            <a:off x="284309" y="205979"/>
+            <a:ext cx="8552330" cy="662317"/>
+          </a:xfrm>
+        </p:spPr>
+        <p:txBody>
+          <a:bodyPr/>
+          <a:lstStyle/>
+          <a:p>
+            <a:pPr lvl="0" indent="0" marL="0">
+              <a:buNone/>
+            </a:pPr>
+            <a:r>
+              <a:rPr/>
+              <a:t>Acid Blockers = Proton Pump Inhibitors</a:t>
+            </a:r>
+          </a:p>
+        </p:txBody>
+      </p:sp>
+      <p:sp>
+        <p:nvSpPr>
+          <p:cNvPr id="3" name="Content Placeholder 2"/>
+          <p:cNvSpPr>
+            <a:spLocks noGrp="1"/>
+          </p:cNvSpPr>
+          <p:nvPr>
+            <p:ph idx="1"/>
+          </p:nvPr>
+        </p:nvSpPr>
+        <p:spPr/>
+        <p:txBody>
+          <a:bodyPr/>
+          <a:lstStyle/>
+          <a:p>
+            <a:pPr lvl="0" indent="0" marL="0">
+              <a:buNone/>
+            </a:pPr>
+            <a:r>
+              <a:rPr/>
+              <a:t>Examples include ompeprazole and pantoprazole</a:t>
+            </a:r>
+          </a:p>
+          <a:p>
+            <a:pPr lvl="0"/>
+            <a:r>
+              <a:rPr/>
+              <a:t>Will stay on for at 1-2 years to prevent acid reflux</a:t>
+            </a:r>
+          </a:p>
+          <a:p>
+            <a:pPr lvl="0"/>
+            <a:r>
+              <a:rPr/>
+              <a:t>Important in preventing scarring at anastomosis (new connection between esophagus and stomach)</a:t>
+            </a:r>
+          </a:p>
+          <a:p>
+            <a:pPr lvl="0"/>
+            <a:r>
+              <a:rPr/>
+              <a:t>To administer through feeding tube, open capsule and resuspend beads in 60mL (2oz) of water</a:t>
+            </a:r>
+          </a:p>
+        </p:txBody>
+      </p:sp>
+    </p:spTree>
+  </p:cSld>
+</p:sld>
+</file>
+
+<file path=ppt/slides/slide47.xml><?xml version="1.0" encoding="utf-8"?>
+<p:sld xmlns:a="http://schemas.openxmlformats.org/drawingml/2006/main" xmlns:r="http://schemas.openxmlformats.org/officeDocument/2006/relationships" xmlns:p="http://schemas.openxmlformats.org/presentationml/2006/main">
+  <p:cSld>
+    <p:spTree>
+      <p:nvGrpSpPr>
+        <p:cNvPr id="1" name=""/>
+        <p:cNvGrpSpPr/>
+        <p:nvPr/>
+      </p:nvGrpSpPr>
+      <p:grpSpPr>
+        <a:xfrm>
+          <a:off x="0" y="0"/>
+          <a:ext cx="0" cy="0"/>
+          <a:chOff x="0" y="0"/>
+          <a:chExt cx="0" cy="0"/>
+        </a:xfrm>
+      </p:grpSpPr>
+      <p:sp>
+        <p:nvSpPr>
+          <p:cNvPr id="2" name="Title 1"/>
+          <p:cNvSpPr>
+            <a:spLocks noGrp="1"/>
+          </p:cNvSpPr>
+          <p:nvPr>
+            <p:ph type="title"/>
+          </p:nvPr>
+        </p:nvSpPr>
+        <p:spPr>
+          <a:xfrm>
+            <a:off x="284309" y="205979"/>
+            <a:ext cx="8552330" cy="662317"/>
+          </a:xfrm>
+        </p:spPr>
+        <p:txBody>
+          <a:bodyPr/>
+          <a:lstStyle/>
+          <a:p>
+            <a:pPr lvl="0" indent="0" marL="0">
+              <a:buNone/>
+            </a:pPr>
+            <a:r>
+              <a:rPr/>
+              <a:t>Medicines at Home</a:t>
+            </a:r>
+          </a:p>
+        </p:txBody>
+      </p:sp>
+      <p:sp>
+        <p:nvSpPr>
+          <p:cNvPr id="3" name="Content Placeholder 2"/>
+          <p:cNvSpPr>
+            <a:spLocks noGrp="1"/>
+          </p:cNvSpPr>
+          <p:nvPr>
+            <p:ph idx="1"/>
+          </p:nvPr>
+        </p:nvSpPr>
+        <p:spPr/>
+        <p:txBody>
+          <a:bodyPr/>
+          <a:lstStyle/>
+          <a:p>
+            <a:pPr lvl="0" indent="0" marL="0">
+              <a:buNone/>
+            </a:pPr>
+            <a:r>
+              <a:rPr/>
+              <a:t>Reglan – Helps stomach empty</a:t>
+            </a:r>
+          </a:p>
+          <a:p>
+            <a:pPr lvl="0"/>
+            <a:r>
+              <a:rPr/>
+              <a:t>Will plan to stop after six weeks</a:t>
+            </a:r>
+          </a:p>
+          <a:p>
+            <a:pPr lvl="0"/>
+            <a:r>
+              <a:rPr/>
+              <a:t>0.1% risk of tardive dyskinesia (nervous tic)</a:t>
+            </a:r>
+          </a:p>
+          <a:p>
+            <a:pPr lvl="0" indent="0" marL="0">
+              <a:buNone/>
+            </a:pPr>
+            <a:r>
+              <a:rPr/>
+              <a:t>Remeron – Helps improve appetite</a:t>
+            </a:r>
+          </a:p>
+          <a:p>
+            <a:pPr lvl="0"/>
+            <a:r>
+              <a:rPr/>
+              <a:t>Can cause vivid dreams</a:t>
+            </a:r>
+          </a:p>
+          <a:p>
+            <a:pPr lvl="0"/>
+            <a:r>
+              <a:rPr/>
+              <a:t>Used for several weeks after surgery</a:t>
+            </a:r>
+          </a:p>
+          <a:p>
+            <a:pPr lvl="0"/>
+            <a:r>
+              <a:rPr/>
+              <a:t>Will stop within first three months of surgery</a:t>
+            </a:r>
+          </a:p>
+        </p:txBody>
+      </p:sp>
+    </p:spTree>
+  </p:cSld>
+</p:sld>
+</file>
+
+<file path=ppt/slides/slide48.xml><?xml version="1.0" encoding="utf-8"?>
 <p:sld xmlns:a="http://schemas.openxmlformats.org/drawingml/2006/main" xmlns:r="http://schemas.openxmlformats.org/officeDocument/2006/relationships" xmlns:p="http://schemas.openxmlformats.org/presentationml/2006/main">
   <p:cSld>
     <p:spTree>
@@ -8191,363 +8622,6 @@
 </p:sld>
 </file>
 
-<file path=ppt/slides/slide46.xml><?xml version="1.0" encoding="utf-8"?>
-<p:sld xmlns:a="http://schemas.openxmlformats.org/drawingml/2006/main" xmlns:r="http://schemas.openxmlformats.org/officeDocument/2006/relationships" xmlns:p="http://schemas.openxmlformats.org/presentationml/2006/main">
-  <p:cSld>
-    <p:spTree>
-      <p:nvGrpSpPr>
-        <p:cNvPr id="1" name=""/>
-        <p:cNvGrpSpPr/>
-        <p:nvPr/>
-      </p:nvGrpSpPr>
-      <p:grpSpPr>
-        <a:xfrm>
-          <a:off x="0" y="0"/>
-          <a:ext cx="0" cy="0"/>
-          <a:chOff x="0" y="0"/>
-          <a:chExt cx="0" cy="0"/>
-        </a:xfrm>
-      </p:grpSpPr>
-      <p:sp>
-        <p:nvSpPr>
-          <p:cNvPr id="2" name="Title 1"/>
-          <p:cNvSpPr>
-            <a:spLocks noGrp="1"/>
-          </p:cNvSpPr>
-          <p:nvPr>
-            <p:ph type="title"/>
-          </p:nvPr>
-        </p:nvSpPr>
-        <p:spPr>
-          <a:xfrm>
-            <a:off x="315045" y="205979"/>
-            <a:ext cx="8529278" cy="857250"/>
-          </a:xfrm>
-        </p:spPr>
-        <p:txBody>
-          <a:bodyPr/>
-          <a:lstStyle/>
-          <a:p>
-            <a:pPr lvl="0" indent="0" marL="0">
-              <a:buNone/>
-            </a:pPr>
-            <a:r>
-              <a:rPr/>
-              <a:t>Sleeping at Home</a:t>
-            </a:r>
-          </a:p>
-        </p:txBody>
-      </p:sp>
-      <p:sp>
-        <p:nvSpPr>
-          <p:cNvPr id="3" name="Content Placeholder 2"/>
-          <p:cNvSpPr>
-            <a:spLocks noGrp="1"/>
-          </p:cNvSpPr>
-          <p:nvPr>
-            <p:ph idx="1" sz="half"/>
-          </p:nvPr>
-        </p:nvSpPr>
-        <p:spPr/>
-        <p:txBody>
-          <a:bodyPr/>
-          <a:lstStyle/>
-          <a:p>
-            <a:pPr lvl="0" indent="0" marL="0">
-              <a:buNone/>
-            </a:pPr>
-            <a:r>
-              <a:rPr/>
-              <a:t>Reflux can occur the first few weeks/months after surgery</a:t>
-            </a:r>
-          </a:p>
-          <a:p>
-            <a:pPr lvl="0" indent="0" marL="0">
-              <a:buNone/>
-            </a:pPr>
-            <a:r>
-              <a:rPr/>
-              <a:t>This improves over the first few months</a:t>
-            </a:r>
-          </a:p>
-          <a:p>
-            <a:pPr lvl="0" indent="0" marL="0">
-              <a:buNone/>
-            </a:pPr>
-            <a:r>
-              <a:rPr/>
-              <a:t>A wedge pillow can be helpful for sleep</a:t>
-            </a:r>
-          </a:p>
-        </p:txBody>
-      </p:sp>
-      <p:pic>
-        <p:nvPicPr>
-          <p:cNvPr descr="images/wedge_pillow_comm.jpg" id="0" name="Picture 1"/>
-          <p:cNvPicPr>
-            <a:picLocks noGrp="1" noChangeAspect="1"/>
-          </p:cNvPicPr>
-          <p:nvPr/>
-        </p:nvPicPr>
-        <p:blipFill>
-          <a:blip r:embed="rId2"/>
-          <a:stretch>
-            <a:fillRect/>
-          </a:stretch>
-        </p:blipFill>
-        <p:spPr bwMode="auto">
-          <a:xfrm>
-            <a:off x="4864100" y="1193800"/>
-            <a:ext cx="3733800" cy="3733800"/>
-          </a:xfrm>
-          <a:prstGeom prst="rect">
-            <a:avLst/>
-          </a:prstGeom>
-          <a:noFill/>
-          <a:ln w="9525">
-            <a:noFill/>
-            <a:headEnd/>
-            <a:tailEnd/>
-          </a:ln>
-        </p:spPr>
-      </p:pic>
-    </p:spTree>
-  </p:cSld>
-</p:sld>
-</file>
-
-<file path=ppt/slides/slide47.xml><?xml version="1.0" encoding="utf-8"?>
-<p:sld xmlns:a="http://schemas.openxmlformats.org/drawingml/2006/main" xmlns:r="http://schemas.openxmlformats.org/officeDocument/2006/relationships" xmlns:p="http://schemas.openxmlformats.org/presentationml/2006/main">
-  <p:cSld>
-    <p:spTree>
-      <p:nvGrpSpPr>
-        <p:cNvPr id="1" name=""/>
-        <p:cNvGrpSpPr/>
-        <p:nvPr/>
-      </p:nvGrpSpPr>
-      <p:grpSpPr>
-        <a:xfrm>
-          <a:off x="0" y="0"/>
-          <a:ext cx="0" cy="0"/>
-          <a:chOff x="0" y="0"/>
-          <a:chExt cx="0" cy="0"/>
-        </a:xfrm>
-      </p:grpSpPr>
-      <p:sp>
-        <p:nvSpPr>
-          <p:cNvPr id="2" name="Title 1"/>
-          <p:cNvSpPr>
-            <a:spLocks noGrp="1"/>
-          </p:cNvSpPr>
-          <p:nvPr>
-            <p:ph type="title"/>
-          </p:nvPr>
-        </p:nvSpPr>
-        <p:spPr>
-          <a:xfrm>
-            <a:off x="284309" y="205979"/>
-            <a:ext cx="8552330" cy="662317"/>
-          </a:xfrm>
-        </p:spPr>
-        <p:txBody>
-          <a:bodyPr/>
-          <a:lstStyle/>
-          <a:p>
-            <a:pPr lvl="0" indent="0" marL="0">
-              <a:buNone/>
-            </a:pPr>
-            <a:r>
-              <a:rPr/>
-              <a:t>Postoperative Visit at 7-10 Days</a:t>
-            </a:r>
-          </a:p>
-        </p:txBody>
-      </p:sp>
-      <p:sp>
-        <p:nvSpPr>
-          <p:cNvPr id="3" name="Content Placeholder 2"/>
-          <p:cNvSpPr>
-            <a:spLocks noGrp="1"/>
-          </p:cNvSpPr>
-          <p:nvPr>
-            <p:ph idx="1"/>
-          </p:nvPr>
-        </p:nvSpPr>
-        <p:spPr/>
-        <p:txBody>
-          <a:bodyPr/>
-          <a:lstStyle/>
-          <a:p>
-            <a:pPr lvl="0" indent="0" marL="0">
-              <a:buNone/>
-            </a:pPr>
-            <a:r>
-              <a:rPr/>
-              <a:t>Check surgical site</a:t>
-            </a:r>
-          </a:p>
-          <a:p>
-            <a:pPr lvl="0"/>
-            <a:r>
-              <a:rPr/>
-              <a:t>Remove staples (if needed)</a:t>
-            </a:r>
-          </a:p>
-          <a:p>
-            <a:pPr lvl="0" indent="0" marL="0">
-              <a:buNone/>
-            </a:pPr>
-            <a:r>
-              <a:rPr/>
-              <a:t>Adjust medicines as needed</a:t>
-            </a:r>
-          </a:p>
-          <a:p>
-            <a:pPr lvl="0"/>
-            <a:r>
-              <a:rPr/>
-              <a:t>Insulin (for diabetic patients on insulin)</a:t>
-            </a:r>
-          </a:p>
-          <a:p>
-            <a:pPr lvl="0"/>
-            <a:r>
-              <a:rPr/>
-              <a:t>Reduce beta blocker medicines</a:t>
-            </a:r>
-          </a:p>
-          <a:p>
-            <a:pPr lvl="0" indent="0" marL="0">
-              <a:buNone/>
-            </a:pPr>
-            <a:r>
-              <a:rPr/>
-              <a:t>Advance diet</a:t>
-            </a:r>
-          </a:p>
-          <a:p>
-            <a:pPr lvl="0" indent="0" marL="0">
-              <a:buNone/>
-            </a:pPr>
-            <a:r>
-              <a:rPr/>
-              <a:t>Reduce tube feeds</a:t>
-            </a:r>
-          </a:p>
-        </p:txBody>
-      </p:sp>
-    </p:spTree>
-  </p:cSld>
-</p:sld>
-</file>
-
-<file path=ppt/slides/slide48.xml><?xml version="1.0" encoding="utf-8"?>
-<p:sld xmlns:a="http://schemas.openxmlformats.org/drawingml/2006/main" xmlns:r="http://schemas.openxmlformats.org/officeDocument/2006/relationships" xmlns:p="http://schemas.openxmlformats.org/presentationml/2006/main">
-  <p:cSld>
-    <p:spTree>
-      <p:nvGrpSpPr>
-        <p:cNvPr id="1" name=""/>
-        <p:cNvGrpSpPr/>
-        <p:nvPr/>
-      </p:nvGrpSpPr>
-      <p:grpSpPr>
-        <a:xfrm>
-          <a:off x="0" y="0"/>
-          <a:ext cx="0" cy="0"/>
-          <a:chOff x="0" y="0"/>
-          <a:chExt cx="0" cy="0"/>
-        </a:xfrm>
-      </p:grpSpPr>
-      <p:sp>
-        <p:nvSpPr>
-          <p:cNvPr id="2" name="Title 1"/>
-          <p:cNvSpPr>
-            <a:spLocks noGrp="1"/>
-          </p:cNvSpPr>
-          <p:nvPr>
-            <p:ph type="title"/>
-          </p:nvPr>
-        </p:nvSpPr>
-        <p:spPr>
-          <a:xfrm>
-            <a:off x="284309" y="205979"/>
-            <a:ext cx="8552330" cy="662317"/>
-          </a:xfrm>
-        </p:spPr>
-        <p:txBody>
-          <a:bodyPr/>
-          <a:lstStyle/>
-          <a:p>
-            <a:pPr lvl="0" indent="0" marL="0">
-              <a:buNone/>
-            </a:pPr>
-            <a:r>
-              <a:rPr/>
-              <a:t>After surgery</a:t>
-            </a:r>
-          </a:p>
-        </p:txBody>
-      </p:sp>
-      <p:sp>
-        <p:nvSpPr>
-          <p:cNvPr id="3" name="Content Placeholder 2"/>
-          <p:cNvSpPr>
-            <a:spLocks noGrp="1"/>
-          </p:cNvSpPr>
-          <p:nvPr>
-            <p:ph idx="1"/>
-          </p:nvPr>
-        </p:nvSpPr>
-        <p:spPr/>
-        <p:txBody>
-          <a:bodyPr/>
-          <a:lstStyle/>
-          <a:p>
-            <a:pPr lvl="0" indent="0" marL="0">
-              <a:buNone/>
-            </a:pPr>
-            <a:r>
-              <a:rPr/>
-              <a:t>Wean off medicines added after surgery</a:t>
-            </a:r>
-          </a:p>
-          <a:p>
-            <a:pPr lvl="0"/>
-            <a:r>
-              <a:rPr/>
-              <a:t>Pain medicines</a:t>
-            </a:r>
-          </a:p>
-          <a:p>
-            <a:pPr lvl="0"/>
-            <a:r>
-              <a:rPr/>
-              <a:t>Beta-blockers</a:t>
-            </a:r>
-          </a:p>
-          <a:p>
-            <a:pPr lvl="0"/>
-            <a:r>
-              <a:rPr/>
-              <a:t>Reglan and Remeron</a:t>
-            </a:r>
-          </a:p>
-          <a:p>
-            <a:pPr lvl="0" indent="0" marL="0">
-              <a:buNone/>
-            </a:pPr>
-            <a:r>
-              <a:rPr/>
-              <a:t>Continue acid blockers for at least 1 year</a:t>
-            </a:r>
-          </a:p>
-        </p:txBody>
-      </p:sp>
-    </p:spTree>
-  </p:cSld>
-</p:sld>
-</file>
-
 <file path=ppt/slides/slide49.xml><?xml version="1.0" encoding="utf-8"?>
 <p:sld xmlns:a="http://schemas.openxmlformats.org/drawingml/2006/main" xmlns:r="http://schemas.openxmlformats.org/officeDocument/2006/relationships" xmlns:p="http://schemas.openxmlformats.org/presentationml/2006/main">
   <p:cSld>
@@ -8577,20 +8651,20 @@
         </p:nvSpPr>
         <p:spPr>
           <a:xfrm>
-            <a:off x="284309" y="205979"/>
-            <a:ext cx="8552330" cy="662317"/>
-          </a:xfrm>
-        </p:spPr>
-        <p:txBody>
-          <a:bodyPr/>
-          <a:lstStyle/>
-          <a:p>
-            <a:pPr lvl="0" indent="0" marL="0">
-              <a:buNone/>
-            </a:pPr>
-            <a:r>
-              <a:rPr/>
-              <a:t>Jejunostomy Removal</a:t>
+            <a:off x="315045" y="205979"/>
+            <a:ext cx="8529278" cy="857250"/>
+          </a:xfrm>
+        </p:spPr>
+        <p:txBody>
+          <a:bodyPr/>
+          <a:lstStyle/>
+          <a:p>
+            <a:pPr lvl="0" indent="0" marL="0">
+              <a:buNone/>
+            </a:pPr>
+            <a:r>
+              <a:rPr/>
+              <a:t>Sleeping at Home</a:t>
             </a:r>
           </a:p>
         </p:txBody>
@@ -8602,7 +8676,7 @@
             <a:spLocks noGrp="1"/>
           </p:cNvSpPr>
           <p:nvPr>
-            <p:ph idx="1"/>
+            <p:ph idx="1" sz="half"/>
           </p:nvPr>
         </p:nvSpPr>
         <p:spPr/>
@@ -8615,29 +8689,59 @@
             </a:pPr>
             <a:r>
               <a:rPr/>
-              <a:t>Jejunostomy tube is removed in the office once you can take in enough nutrients by mouth</a:t>
-            </a:r>
-          </a:p>
-          <a:p>
-            <a:pPr lvl="0" indent="0" marL="0">
-              <a:buNone/>
-            </a:pPr>
-            <a:r>
-              <a:rPr/>
-              <a:t>Removal usually around 8 weeks after surgery</a:t>
-            </a:r>
-          </a:p>
-          <a:p>
-            <a:pPr lvl="0" indent="0" marL="0">
-              <a:buNone/>
-            </a:pPr>
-            <a:r>
-              <a:rPr/>
-              <a:t>May take 30 minutes and some local anesthetic to loosen up the tube for removal.</a:t>
-            </a:r>
-          </a:p>
-        </p:txBody>
-      </p:sp>
+              <a:t>Reflux can occur the first few weeks/months after surgery</a:t>
+            </a:r>
+          </a:p>
+          <a:p>
+            <a:pPr lvl="0" indent="0" marL="0">
+              <a:buNone/>
+            </a:pPr>
+            <a:r>
+              <a:rPr/>
+              <a:t>This improves over the first few months</a:t>
+            </a:r>
+          </a:p>
+          <a:p>
+            <a:pPr lvl="0" indent="0" marL="0">
+              <a:buNone/>
+            </a:pPr>
+            <a:r>
+              <a:rPr/>
+              <a:t>A wedge pillow can be helpful for sleep</a:t>
+            </a:r>
+          </a:p>
+        </p:txBody>
+      </p:sp>
+      <p:pic>
+        <p:nvPicPr>
+          <p:cNvPr descr="images/wedge_pillow_comm.jpg" id="0" name="Picture 1"/>
+          <p:cNvPicPr>
+            <a:picLocks noGrp="1" noChangeAspect="1"/>
+          </p:cNvPicPr>
+          <p:nvPr/>
+        </p:nvPicPr>
+        <p:blipFill>
+          <a:blip r:embed="rId2"/>
+          <a:stretch>
+            <a:fillRect/>
+          </a:stretch>
+        </p:blipFill>
+        <p:spPr bwMode="auto">
+          <a:xfrm>
+            <a:off x="4864100" y="1193800"/>
+            <a:ext cx="3733800" cy="3733800"/>
+          </a:xfrm>
+          <a:prstGeom prst="rect">
+            <a:avLst/>
+          </a:prstGeom>
+          <a:noFill/>
+          <a:ln w="9525">
+            <a:noFill/>
+            <a:headEnd/>
+            <a:tailEnd/>
+          </a:ln>
+        </p:spPr>
+      </p:pic>
     </p:spTree>
   </p:cSld>
 </p:sld>
@@ -8672,20 +8776,20 @@
         </p:nvSpPr>
         <p:spPr>
           <a:xfrm>
-            <a:off x="315045" y="205979"/>
-            <a:ext cx="8529278" cy="857250"/>
-          </a:xfrm>
-        </p:spPr>
-        <p:txBody>
-          <a:bodyPr/>
-          <a:lstStyle/>
-          <a:p>
-            <a:pPr lvl="0" indent="0" marL="0">
-              <a:buNone/>
-            </a:pPr>
-            <a:r>
-              <a:rPr/>
-              <a:t>Reconstruction</a:t>
+            <a:off x="284309" y="205979"/>
+            <a:ext cx="8552330" cy="662317"/>
+          </a:xfrm>
+        </p:spPr>
+        <p:txBody>
+          <a:bodyPr/>
+          <a:lstStyle/>
+          <a:p>
+            <a:pPr lvl="0" indent="0" marL="0">
+              <a:buNone/>
+            </a:pPr>
+            <a:r>
+              <a:rPr/>
+              <a:t>Surgery for Esophageal Cancer</a:t>
             </a:r>
           </a:p>
         </p:txBody>
@@ -8697,7 +8801,7 @@
             <a:spLocks noGrp="1"/>
           </p:cNvSpPr>
           <p:nvPr>
-            <p:ph idx="1" sz="half"/>
+            <p:ph idx="1"/>
           </p:nvPr>
         </p:nvSpPr>
         <p:spPr/>
@@ -8710,41 +8814,32 @@
             </a:pPr>
             <a:r>
               <a:rPr/>
-              <a:t>New esophagus is created from the stomach in the abdomen by fashioning it into a tube.</a:t>
-            </a:r>
-          </a:p>
-        </p:txBody>
-      </p:sp>
-      <p:pic>
-        <p:nvPicPr>
-          <p:cNvPr descr="images/Eso_Resection3_ai.png" id="0" name="Picture 1"/>
-          <p:cNvPicPr>
-            <a:picLocks noGrp="1" noChangeAspect="1"/>
-          </p:cNvPicPr>
-          <p:nvPr/>
-        </p:nvPicPr>
-        <p:blipFill>
-          <a:blip r:embed="rId2"/>
-          <a:stretch>
-            <a:fillRect/>
-          </a:stretch>
-        </p:blipFill>
-        <p:spPr bwMode="auto">
-          <a:xfrm>
-            <a:off x="4914900" y="1193800"/>
-            <a:ext cx="3632200" cy="3733800"/>
-          </a:xfrm>
-          <a:prstGeom prst="rect">
-            <a:avLst/>
-          </a:prstGeom>
-          <a:noFill/>
-          <a:ln w="9525">
-            <a:noFill/>
-            <a:headEnd/>
-            <a:tailEnd/>
-          </a:ln>
-        </p:spPr>
-      </p:pic>
+              <a:t>Surgery for esophageal cancer is performed for:</a:t>
+            </a:r>
+          </a:p>
+          <a:p>
+            <a:pPr lvl="0"/>
+            <a:r>
+              <a:rPr/>
+              <a:t>Superficial Tumors (T1) not removed by endoscopy</a:t>
+            </a:r>
+          </a:p>
+          <a:p>
+            <a:pPr lvl="0"/>
+            <a:r>
+              <a:rPr/>
+              <a:t>Localized Tumors (T2 N0 M0)</a:t>
+            </a:r>
+          </a:p>
+          <a:p>
+            <a:pPr lvl="0"/>
+            <a:r>
+              <a:rPr/>
+              <a:t>Locally Advanced (T3 M0) after preop therapy</a:t>
+            </a:r>
+          </a:p>
+        </p:txBody>
+      </p:sp>
     </p:spTree>
   </p:cSld>
 </p:sld>
@@ -8792,7 +8887,7 @@
             </a:pPr>
             <a:r>
               <a:rPr/>
-              <a:t>Nutritional Monitoring after Surgery</a:t>
+              <a:t>Postoperative Visit at 7-10 Days</a:t>
             </a:r>
           </a:p>
         </p:txBody>
@@ -8817,28 +8912,55 @@
             </a:pPr>
             <a:r>
               <a:rPr/>
-              <a:t>You may have difficulty absorbing some nutrients:</a:t>
-            </a:r>
-          </a:p>
-          <a:p>
-            <a:pPr lvl="0"/>
-            <a:r>
-              <a:rPr/>
-              <a:t>Iron</a:t>
-            </a:r>
-          </a:p>
-          <a:p>
-            <a:pPr lvl="0"/>
-            <a:r>
-              <a:rPr/>
-              <a:t>Vitamin B12</a:t>
-            </a:r>
-          </a:p>
-          <a:p>
-            <a:pPr lvl="0"/>
-            <a:r>
-              <a:rPr/>
-              <a:t>Vitamin D</a:t>
+              <a:t>Check surgical site</a:t>
+            </a:r>
+          </a:p>
+          <a:p>
+            <a:pPr lvl="0"/>
+            <a:r>
+              <a:rPr/>
+              <a:t>Remove staples (if needed)</a:t>
+            </a:r>
+          </a:p>
+          <a:p>
+            <a:pPr lvl="0" indent="0" marL="0">
+              <a:buNone/>
+            </a:pPr>
+            <a:r>
+              <a:rPr/>
+              <a:t>Adjust medicines as needed</a:t>
+            </a:r>
+          </a:p>
+          <a:p>
+            <a:pPr lvl="0"/>
+            <a:r>
+              <a:rPr/>
+              <a:t>Insulin (for diabetic patients on insulin)</a:t>
+            </a:r>
+          </a:p>
+          <a:p>
+            <a:pPr lvl="0"/>
+            <a:r>
+              <a:rPr/>
+              <a:t>Reduce beta blocker medicines</a:t>
+            </a:r>
+          </a:p>
+          <a:p>
+            <a:pPr lvl="0" indent="0" marL="0">
+              <a:buNone/>
+            </a:pPr>
+            <a:r>
+              <a:rPr/>
+              <a:t>Advance diet</a:t>
+            </a:r>
+          </a:p>
+          <a:p>
+            <a:pPr lvl="0" indent="0" marL="0">
+              <a:buNone/>
+            </a:pPr>
+            <a:r>
+              <a:rPr/>
+              <a:t>Reduce tube feeds</a:t>
             </a:r>
           </a:p>
         </p:txBody>
@@ -8890,7 +9012,7 @@
             </a:pPr>
             <a:r>
               <a:rPr/>
-              <a:t>Nutritional Monitoring after Surgery</a:t>
+              <a:t>After surgery</a:t>
             </a:r>
           </a:p>
         </p:txBody>
@@ -8915,28 +9037,37 @@
             </a:pPr>
             <a:r>
               <a:rPr/>
-              <a:t>About 3 months after the jejunostomy tube is removed, we will check blood levels:</a:t>
-            </a:r>
-          </a:p>
-          <a:p>
-            <a:pPr lvl="0"/>
-            <a:r>
-              <a:rPr/>
-              <a:t>Iron (ferritin)</a:t>
-            </a:r>
-          </a:p>
-          <a:p>
-            <a:pPr lvl="0"/>
-            <a:r>
-              <a:rPr/>
-              <a:t>Vitamin B12</a:t>
-            </a:r>
-          </a:p>
-          <a:p>
-            <a:pPr lvl="0"/>
-            <a:r>
-              <a:rPr/>
-              <a:t>Vitamin D</a:t>
+              <a:t>Wean off medicines added after surgery</a:t>
+            </a:r>
+          </a:p>
+          <a:p>
+            <a:pPr lvl="0"/>
+            <a:r>
+              <a:rPr/>
+              <a:t>Pain medicines</a:t>
+            </a:r>
+          </a:p>
+          <a:p>
+            <a:pPr lvl="0"/>
+            <a:r>
+              <a:rPr/>
+              <a:t>Beta-blockers</a:t>
+            </a:r>
+          </a:p>
+          <a:p>
+            <a:pPr lvl="0"/>
+            <a:r>
+              <a:rPr/>
+              <a:t>Reglan and Remeron</a:t>
+            </a:r>
+          </a:p>
+          <a:p>
+            <a:pPr lvl="0" indent="0" marL="0">
+              <a:buNone/>
+            </a:pPr>
+            <a:r>
+              <a:rPr/>
+              <a:t>Continue acid blockers for at least 1 year</a:t>
             </a:r>
           </a:p>
         </p:txBody>
@@ -8988,7 +9119,7 @@
             </a:pPr>
             <a:r>
               <a:rPr/>
-              <a:t>Nutritional Replacements after Surgery</a:t>
+              <a:t>Jejunostomy Removal</a:t>
             </a:r>
           </a:p>
         </p:txBody>
@@ -9013,51 +9144,25 @@
             </a:pPr>
             <a:r>
               <a:rPr/>
-              <a:t>Vitamin or iron replacements can be ordered by:</a:t>
-            </a:r>
-          </a:p>
-          <a:p>
-            <a:pPr lvl="0"/>
-            <a:r>
-              <a:rPr/>
-              <a:t>Primary Care Provider (PCP)</a:t>
-            </a:r>
-          </a:p>
-          <a:p>
-            <a:pPr lvl="0"/>
-            <a:r>
-              <a:rPr/>
-              <a:t>Medical Oncologist</a:t>
-            </a:r>
-          </a:p>
-          <a:p>
-            <a:pPr lvl="0"/>
-            <a:r>
-              <a:rPr/>
-              <a:t>Surgeon</a:t>
-            </a:r>
-          </a:p>
-          <a:p>
-            <a:pPr lvl="0" indent="0" marL="0">
-              <a:buNone/>
-            </a:pPr>
-            <a:r>
-              <a:rPr/>
-              <a:t>If levels are low</a:t>
-            </a:r>
-          </a:p>
-          <a:p>
-            <a:pPr lvl="0"/>
-            <a:r>
-              <a:rPr/>
-              <a:t>Replacement</a:t>
-            </a:r>
-          </a:p>
-          <a:p>
-            <a:pPr lvl="0"/>
-            <a:r>
-              <a:rPr/>
-              <a:t>Repeat testing in 3-6 months</a:t>
+              <a:t>Jejunostomy tube is removed in the office once you can take in enough nutrients by mouth</a:t>
+            </a:r>
+          </a:p>
+          <a:p>
+            <a:pPr lvl="0" indent="0" marL="0">
+              <a:buNone/>
+            </a:pPr>
+            <a:r>
+              <a:rPr/>
+              <a:t>Removal usually around 8 weeks after surgery</a:t>
+            </a:r>
+          </a:p>
+          <a:p>
+            <a:pPr lvl="0" indent="0" marL="0">
+              <a:buNone/>
+            </a:pPr>
+            <a:r>
+              <a:rPr/>
+              <a:t>May take 30 minutes and some local anesthetic to loosen up the tube for removal.</a:t>
             </a:r>
           </a:p>
         </p:txBody>
@@ -9109,7 +9214,7 @@
             </a:pPr>
             <a:r>
               <a:rPr/>
-              <a:t>Team Members - Physicians</a:t>
+              <a:t>Nutritional Monitoring after Surgery</a:t>
             </a:r>
           </a:p>
         </p:txBody>
@@ -9134,64 +9239,28 @@
             </a:pPr>
             <a:r>
               <a:rPr/>
-              <a:t>Primary Care Provider</a:t>
-            </a:r>
-          </a:p>
-          <a:p>
-            <a:pPr lvl="0" indent="0" marL="0">
-              <a:buNone/>
-            </a:pPr>
-            <a:r>
-              <a:rPr/>
-              <a:t>Gastroenterologist</a:t>
-            </a:r>
-          </a:p>
-          <a:p>
-            <a:pPr lvl="0" indent="0" marL="0">
-              <a:buNone/>
-            </a:pPr>
-            <a:r>
-              <a:rPr/>
-              <a:t>Medical Oncologist (chemotherapy)</a:t>
-            </a:r>
-          </a:p>
-          <a:p>
-            <a:pPr lvl="0" indent="0" marL="0">
-              <a:buNone/>
-            </a:pPr>
-            <a:r>
-              <a:rPr/>
-              <a:t>Radiation Oncologist (radiation)</a:t>
-            </a:r>
-          </a:p>
-          <a:p>
-            <a:pPr lvl="0" indent="0" marL="0">
-              <a:buNone/>
-            </a:pPr>
-            <a:r>
-              <a:rPr/>
-              <a:t>Surgeons</a:t>
-            </a:r>
-          </a:p>
-          <a:p>
-            <a:pPr lvl="0"/>
-            <a:r>
-              <a:rPr/>
-              <a:t>Jonathan Salo MD</a:t>
-            </a:r>
-          </a:p>
-          <a:p>
-            <a:pPr lvl="0"/>
-            <a:r>
-              <a:rPr/>
-              <a:t>Jeffrey Hagen MD</a:t>
-            </a:r>
-          </a:p>
-          <a:p>
-            <a:pPr lvl="0"/>
-            <a:r>
-              <a:rPr/>
-              <a:t>Michael Roach MD</a:t>
+              <a:t>You may have difficulty absorbing some nutrients:</a:t>
+            </a:r>
+          </a:p>
+          <a:p>
+            <a:pPr lvl="0"/>
+            <a:r>
+              <a:rPr/>
+              <a:t>Iron</a:t>
+            </a:r>
+          </a:p>
+          <a:p>
+            <a:pPr lvl="0"/>
+            <a:r>
+              <a:rPr/>
+              <a:t>Vitamin B12</a:t>
+            </a:r>
+          </a:p>
+          <a:p>
+            <a:pPr lvl="0"/>
+            <a:r>
+              <a:rPr/>
+              <a:t>Vitamin D</a:t>
             </a:r>
           </a:p>
         </p:txBody>
@@ -9243,6 +9312,359 @@
             </a:pPr>
             <a:r>
               <a:rPr/>
+              <a:t>Nutritional Monitoring after Surgery</a:t>
+            </a:r>
+          </a:p>
+        </p:txBody>
+      </p:sp>
+      <p:sp>
+        <p:nvSpPr>
+          <p:cNvPr id="3" name="Content Placeholder 2"/>
+          <p:cNvSpPr>
+            <a:spLocks noGrp="1"/>
+          </p:cNvSpPr>
+          <p:nvPr>
+            <p:ph idx="1"/>
+          </p:nvPr>
+        </p:nvSpPr>
+        <p:spPr/>
+        <p:txBody>
+          <a:bodyPr/>
+          <a:lstStyle/>
+          <a:p>
+            <a:pPr lvl="0" indent="0" marL="0">
+              <a:buNone/>
+            </a:pPr>
+            <a:r>
+              <a:rPr/>
+              <a:t>About 3 months after the jejunostomy tube is removed, we will check blood levels:</a:t>
+            </a:r>
+          </a:p>
+          <a:p>
+            <a:pPr lvl="0"/>
+            <a:r>
+              <a:rPr/>
+              <a:t>Iron (ferritin)</a:t>
+            </a:r>
+          </a:p>
+          <a:p>
+            <a:pPr lvl="0"/>
+            <a:r>
+              <a:rPr/>
+              <a:t>Vitamin B12</a:t>
+            </a:r>
+          </a:p>
+          <a:p>
+            <a:pPr lvl="0"/>
+            <a:r>
+              <a:rPr/>
+              <a:t>Vitamin D</a:t>
+            </a:r>
+          </a:p>
+        </p:txBody>
+      </p:sp>
+    </p:spTree>
+  </p:cSld>
+</p:sld>
+</file>
+
+<file path=ppt/slides/slide55.xml><?xml version="1.0" encoding="utf-8"?>
+<p:sld xmlns:a="http://schemas.openxmlformats.org/drawingml/2006/main" xmlns:r="http://schemas.openxmlformats.org/officeDocument/2006/relationships" xmlns:p="http://schemas.openxmlformats.org/presentationml/2006/main">
+  <p:cSld>
+    <p:spTree>
+      <p:nvGrpSpPr>
+        <p:cNvPr id="1" name=""/>
+        <p:cNvGrpSpPr/>
+        <p:nvPr/>
+      </p:nvGrpSpPr>
+      <p:grpSpPr>
+        <a:xfrm>
+          <a:off x="0" y="0"/>
+          <a:ext cx="0" cy="0"/>
+          <a:chOff x="0" y="0"/>
+          <a:chExt cx="0" cy="0"/>
+        </a:xfrm>
+      </p:grpSpPr>
+      <p:sp>
+        <p:nvSpPr>
+          <p:cNvPr id="2" name="Title 1"/>
+          <p:cNvSpPr>
+            <a:spLocks noGrp="1"/>
+          </p:cNvSpPr>
+          <p:nvPr>
+            <p:ph type="title"/>
+          </p:nvPr>
+        </p:nvSpPr>
+        <p:spPr>
+          <a:xfrm>
+            <a:off x="284309" y="205979"/>
+            <a:ext cx="8552330" cy="662317"/>
+          </a:xfrm>
+        </p:spPr>
+        <p:txBody>
+          <a:bodyPr/>
+          <a:lstStyle/>
+          <a:p>
+            <a:pPr lvl="0" indent="0" marL="0">
+              <a:buNone/>
+            </a:pPr>
+            <a:r>
+              <a:rPr/>
+              <a:t>Nutritional Replacements after Surgery</a:t>
+            </a:r>
+          </a:p>
+        </p:txBody>
+      </p:sp>
+      <p:sp>
+        <p:nvSpPr>
+          <p:cNvPr id="3" name="Content Placeholder 2"/>
+          <p:cNvSpPr>
+            <a:spLocks noGrp="1"/>
+          </p:cNvSpPr>
+          <p:nvPr>
+            <p:ph idx="1"/>
+          </p:nvPr>
+        </p:nvSpPr>
+        <p:spPr/>
+        <p:txBody>
+          <a:bodyPr/>
+          <a:lstStyle/>
+          <a:p>
+            <a:pPr lvl="0" indent="0" marL="0">
+              <a:buNone/>
+            </a:pPr>
+            <a:r>
+              <a:rPr/>
+              <a:t>Vitamin or iron replacements can be ordered by:</a:t>
+            </a:r>
+          </a:p>
+          <a:p>
+            <a:pPr lvl="0"/>
+            <a:r>
+              <a:rPr/>
+              <a:t>Primary Care Provider (PCP)</a:t>
+            </a:r>
+          </a:p>
+          <a:p>
+            <a:pPr lvl="0"/>
+            <a:r>
+              <a:rPr/>
+              <a:t>Medical Oncologist</a:t>
+            </a:r>
+          </a:p>
+          <a:p>
+            <a:pPr lvl="0"/>
+            <a:r>
+              <a:rPr/>
+              <a:t>Surgeon</a:t>
+            </a:r>
+          </a:p>
+          <a:p>
+            <a:pPr lvl="0" indent="0" marL="0">
+              <a:buNone/>
+            </a:pPr>
+            <a:r>
+              <a:rPr/>
+              <a:t>If levels are low</a:t>
+            </a:r>
+          </a:p>
+          <a:p>
+            <a:pPr lvl="0"/>
+            <a:r>
+              <a:rPr/>
+              <a:t>Replacement</a:t>
+            </a:r>
+          </a:p>
+          <a:p>
+            <a:pPr lvl="0"/>
+            <a:r>
+              <a:rPr/>
+              <a:t>Repeat testing in 3-6 months</a:t>
+            </a:r>
+          </a:p>
+        </p:txBody>
+      </p:sp>
+    </p:spTree>
+  </p:cSld>
+</p:sld>
+</file>
+
+<file path=ppt/slides/slide56.xml><?xml version="1.0" encoding="utf-8"?>
+<p:sld xmlns:a="http://schemas.openxmlformats.org/drawingml/2006/main" xmlns:r="http://schemas.openxmlformats.org/officeDocument/2006/relationships" xmlns:p="http://schemas.openxmlformats.org/presentationml/2006/main">
+  <p:cSld>
+    <p:spTree>
+      <p:nvGrpSpPr>
+        <p:cNvPr id="1" name=""/>
+        <p:cNvGrpSpPr/>
+        <p:nvPr/>
+      </p:nvGrpSpPr>
+      <p:grpSpPr>
+        <a:xfrm>
+          <a:off x="0" y="0"/>
+          <a:ext cx="0" cy="0"/>
+          <a:chOff x="0" y="0"/>
+          <a:chExt cx="0" cy="0"/>
+        </a:xfrm>
+      </p:grpSpPr>
+      <p:sp>
+        <p:nvSpPr>
+          <p:cNvPr id="2" name="Title 1"/>
+          <p:cNvSpPr>
+            <a:spLocks noGrp="1"/>
+          </p:cNvSpPr>
+          <p:nvPr>
+            <p:ph type="title"/>
+          </p:nvPr>
+        </p:nvSpPr>
+        <p:spPr>
+          <a:xfrm>
+            <a:off x="284309" y="205979"/>
+            <a:ext cx="8552330" cy="662317"/>
+          </a:xfrm>
+        </p:spPr>
+        <p:txBody>
+          <a:bodyPr/>
+          <a:lstStyle/>
+          <a:p>
+            <a:pPr lvl="0" indent="0" marL="0">
+              <a:buNone/>
+            </a:pPr>
+            <a:r>
+              <a:rPr/>
+              <a:t>Team Members - Physicians</a:t>
+            </a:r>
+          </a:p>
+        </p:txBody>
+      </p:sp>
+      <p:sp>
+        <p:nvSpPr>
+          <p:cNvPr id="3" name="Content Placeholder 2"/>
+          <p:cNvSpPr>
+            <a:spLocks noGrp="1"/>
+          </p:cNvSpPr>
+          <p:nvPr>
+            <p:ph idx="1"/>
+          </p:nvPr>
+        </p:nvSpPr>
+        <p:spPr/>
+        <p:txBody>
+          <a:bodyPr/>
+          <a:lstStyle/>
+          <a:p>
+            <a:pPr lvl="0" indent="0" marL="0">
+              <a:buNone/>
+            </a:pPr>
+            <a:r>
+              <a:rPr/>
+              <a:t>Primary Care Provider</a:t>
+            </a:r>
+          </a:p>
+          <a:p>
+            <a:pPr lvl="0" indent="0" marL="0">
+              <a:buNone/>
+            </a:pPr>
+            <a:r>
+              <a:rPr/>
+              <a:t>Gastroenterologist</a:t>
+            </a:r>
+          </a:p>
+          <a:p>
+            <a:pPr lvl="0" indent="0" marL="0">
+              <a:buNone/>
+            </a:pPr>
+            <a:r>
+              <a:rPr/>
+              <a:t>Medical Oncologist (chemotherapy)</a:t>
+            </a:r>
+          </a:p>
+          <a:p>
+            <a:pPr lvl="0" indent="0" marL="0">
+              <a:buNone/>
+            </a:pPr>
+            <a:r>
+              <a:rPr/>
+              <a:t>Radiation Oncologist (radiation)</a:t>
+            </a:r>
+          </a:p>
+          <a:p>
+            <a:pPr lvl="0" indent="0" marL="0">
+              <a:buNone/>
+            </a:pPr>
+            <a:r>
+              <a:rPr/>
+              <a:t>Surgeons</a:t>
+            </a:r>
+          </a:p>
+          <a:p>
+            <a:pPr lvl="0"/>
+            <a:r>
+              <a:rPr/>
+              <a:t>Jonathan Salo MD</a:t>
+            </a:r>
+          </a:p>
+          <a:p>
+            <a:pPr lvl="0"/>
+            <a:r>
+              <a:rPr/>
+              <a:t>Kelli Salter MD</a:t>
+            </a:r>
+          </a:p>
+          <a:p>
+            <a:pPr lvl="0"/>
+            <a:r>
+              <a:rPr/>
+              <a:t>Michael Roach MD</a:t>
+            </a:r>
+          </a:p>
+        </p:txBody>
+      </p:sp>
+    </p:spTree>
+  </p:cSld>
+</p:sld>
+</file>
+
+<file path=ppt/slides/slide57.xml><?xml version="1.0" encoding="utf-8"?>
+<p:sld xmlns:a="http://schemas.openxmlformats.org/drawingml/2006/main" xmlns:r="http://schemas.openxmlformats.org/officeDocument/2006/relationships" xmlns:p="http://schemas.openxmlformats.org/presentationml/2006/main">
+  <p:cSld>
+    <p:spTree>
+      <p:nvGrpSpPr>
+        <p:cNvPr id="1" name=""/>
+        <p:cNvGrpSpPr/>
+        <p:nvPr/>
+      </p:nvGrpSpPr>
+      <p:grpSpPr>
+        <a:xfrm>
+          <a:off x="0" y="0"/>
+          <a:ext cx="0" cy="0"/>
+          <a:chOff x="0" y="0"/>
+          <a:chExt cx="0" cy="0"/>
+        </a:xfrm>
+      </p:grpSpPr>
+      <p:sp>
+        <p:nvSpPr>
+          <p:cNvPr id="2" name="Title 1"/>
+          <p:cNvSpPr>
+            <a:spLocks noGrp="1"/>
+          </p:cNvSpPr>
+          <p:nvPr>
+            <p:ph type="title"/>
+          </p:nvPr>
+        </p:nvSpPr>
+        <p:spPr>
+          <a:xfrm>
+            <a:off x="284309" y="205979"/>
+            <a:ext cx="8552330" cy="662317"/>
+          </a:xfrm>
+        </p:spPr>
+        <p:txBody>
+          <a:bodyPr/>
+          <a:lstStyle/>
+          <a:p>
+            <a:pPr lvl="0" indent="0" marL="0">
+              <a:buNone/>
+            </a:pPr>
+            <a:r>
+              <a:rPr/>
               <a:t>Team Members - Support Staff</a:t>
             </a:r>
           </a:p>
@@ -9384,7 +9806,7 @@
             </a:pPr>
             <a:r>
               <a:rPr/>
-              <a:t>Ivor Lewis esophagectomy</a:t>
+              <a:t>Goals of Surgery</a:t>
             </a:r>
           </a:p>
         </p:txBody>
@@ -9404,27 +9826,31 @@
           <a:bodyPr/>
           <a:lstStyle/>
           <a:p>
-            <a:pPr lvl="0" indent="0" marL="0">
-              <a:buNone/>
-            </a:pPr>
-            <a:r>
-              <a:rPr/>
-              <a:t>The new esophagus is now brought up into the chest. A connection is made between the esophagus and the stomach, called an </a:t>
-            </a:r>
-            <a:r>
-              <a:rPr i="1"/>
-              <a:t>anastomosis</a:t>
-            </a:r>
-            <a:r>
-              <a:rPr/>
-              <a:t>.</a:t>
+            <a:pPr lvl="0"/>
+            <a:r>
+              <a:rPr/>
+              <a:t>Remove tumor from esophagus</a:t>
+            </a:r>
+          </a:p>
+          <a:p>
+            <a:pPr lvl="0"/>
+            <a:r>
+              <a:rPr/>
+              <a:t>Remove surrounding lymph nodes</a:t>
+            </a:r>
+          </a:p>
+          <a:p>
+            <a:pPr lvl="0"/>
+            <a:r>
+              <a:rPr/>
+              <a:t>Create a new esophagus</a:t>
             </a:r>
           </a:p>
         </p:txBody>
       </p:sp>
       <p:pic>
         <p:nvPicPr>
-          <p:cNvPr descr="images/Eso_IvorLewis_Anastomosis.png" id="0" name="Picture 1"/>
+          <p:cNvPr descr="images/Eso_Resection1_ai.png" id="0" name="Picture 1"/>
           <p:cNvPicPr>
             <a:picLocks noGrp="1" noChangeAspect="1"/>
           </p:cNvPicPr>
@@ -9499,69 +9925,51 @@
             </a:pPr>
             <a:r>
               <a:rPr/>
-              <a:t>Minimally-invasive Ivor Lewis</a:t>
-            </a:r>
-          </a:p>
-        </p:txBody>
-      </p:sp>
-      <mc:AlternateContent xmlns:mc="http://schemas.openxmlformats.org/markup-compatibility/2006">
-        <mc:Choice xmlns:a14="http://schemas.microsoft.com/office/drawing/2010/main" Requires="a14">
-          <p:sp>
-            <p:nvSpPr>
-              <p:cNvPr id="3" name="Content Placeholder 2"/>
-              <p:cNvSpPr>
-                <a:spLocks noGrp="1"/>
-              </p:cNvSpPr>
-              <p:nvPr>
-                <p:ph idx="1" sz="half"/>
-              </p:nvPr>
-            </p:nvSpPr>
-            <p:spPr/>
-            <p:txBody>
-              <a:bodyPr/>
-              <a:lstStyle/>
-              <a:p>
-                <a:pPr lvl="0"/>
-                <a:r>
-                  <a:rPr/>
-                  <a:t>Small incisions abdomen and chest</a:t>
-                </a:r>
-              </a:p>
-              <a:p>
-                <a:pPr lvl="0"/>
-                <a:r>
-                  <a:rPr/>
-                  <a:t>Surgical telescope and instruments</a:t>
-                </a:r>
-              </a:p>
-              <a:p>
-                <a:pPr lvl="0"/>
-                <a:r>
-                  <a:rPr/>
-                  <a:t>Smaller incisions </a:t>
-                </a:r>
-                <a14:m>
-                  <m:oMath xmlns:m="http://schemas.openxmlformats.org/officeDocument/2006/math">
-                    <m:r>
-                      <m:rPr>
-                        <m:sty m:val="p"/>
-                      </m:rPr>
-                      <m:t>→</m:t>
-                    </m:r>
-                  </m:oMath>
-                </a14:m>
-                <a:r>
-                  <a:rPr/>
-                  <a:t> faster recovery and less discomfort</a:t>
-                </a:r>
-              </a:p>
-            </p:txBody>
-          </p:sp>
-        </mc:Choice>
-      </mc:AlternateContent>
+              <a:t>Ivor Lewis (Transthoracic) Esophagectomy</a:t>
+            </a:r>
+          </a:p>
+        </p:txBody>
+      </p:sp>
+      <p:sp>
+        <p:nvSpPr>
+          <p:cNvPr id="3" name="Content Placeholder 2"/>
+          <p:cNvSpPr>
+            <a:spLocks noGrp="1"/>
+          </p:cNvSpPr>
+          <p:nvPr>
+            <p:ph idx="1" sz="half"/>
+          </p:nvPr>
+        </p:nvSpPr>
+        <p:spPr/>
+        <p:txBody>
+          <a:bodyPr/>
+          <a:lstStyle/>
+          <a:p>
+            <a:pPr lvl="0"/>
+            <a:r>
+              <a:rPr/>
+              <a:t>Removes tumor and lower 1/3 esophagus</a:t>
+            </a:r>
+          </a:p>
+          <a:p>
+            <a:pPr lvl="0"/>
+            <a:r>
+              <a:rPr/>
+              <a:t>Removes surrounding lymph nodes</a:t>
+            </a:r>
+          </a:p>
+          <a:p>
+            <a:pPr lvl="0"/>
+            <a:r>
+              <a:rPr/>
+              <a:t>GI tract reconstructed</a:t>
+            </a:r>
+          </a:p>
+        </p:txBody>
+      </p:sp>
       <p:pic>
         <p:nvPicPr>
-          <p:cNvPr descr="images/MIE_IvorLewisArtboard.png" id="0" name="Picture 1"/>
+          <p:cNvPr descr="images/Eso_Resection2_ai.png" id="0" name="Picture 1"/>
           <p:cNvPicPr>
             <a:picLocks noGrp="1" noChangeAspect="1"/>
           </p:cNvPicPr>
@@ -9636,7 +10044,7 @@
             </a:pPr>
             <a:r>
               <a:rPr/>
-              <a:t>Open Ivor Lewis</a:t>
+              <a:t>Reconstruction</a:t>
             </a:r>
           </a:p>
         </p:txBody>
@@ -9661,23 +10069,14 @@
             </a:pPr>
             <a:r>
               <a:rPr/>
-              <a:t>Mininally-invasive approach feasible in 95% of cases</a:t>
-            </a:r>
-          </a:p>
-          <a:p>
-            <a:pPr lvl="0" indent="0" marL="0">
-              <a:buNone/>
-            </a:pPr>
-            <a:r>
-              <a:rPr/>
-              <a:t>In some cases, an open approach is still necessary.</a:t>
+              <a:t>New esophagus is created from the stomach in the abdomen by fashioning it into a tube.</a:t>
             </a:r>
           </a:p>
         </p:txBody>
       </p:sp>
       <p:pic>
         <p:nvPicPr>
-          <p:cNvPr descr="images/IvorLewisArtboard.png" id="0" name="Picture 1"/>
+          <p:cNvPr descr="images/Eso_Resection3_ai.png" id="0" name="Picture 1"/>
           <p:cNvPicPr>
             <a:picLocks noGrp="1" noChangeAspect="1"/>
           </p:cNvPicPr>
@@ -9752,7 +10151,7 @@
             </a:pPr>
             <a:r>
               <a:rPr/>
-              <a:t>Total Esophagectomy</a:t>
+              <a:t>Ivor Lewis esophagectomy</a:t>
             </a:r>
           </a:p>
         </p:txBody>
@@ -9777,23 +10176,22 @@
             </a:pPr>
             <a:r>
               <a:rPr/>
-              <a:t>For patients with tumors in the upper esophagus, we need to remove more of the esophagus</a:t>
-            </a:r>
-          </a:p>
-          <a:p>
-            <a:pPr lvl="0" indent="0" marL="0">
-              <a:buNone/>
-            </a:pPr>
-            <a:r>
-              <a:rPr/>
-              <a:t>We need to remove the whole esophagus, including the portion in the neck</a:t>
+              <a:t>The new esophagus is now brought up into the chest. A connection is made between the esophagus and the stomach, called an </a:t>
+            </a:r>
+            <a:r>
+              <a:rPr i="1"/>
+              <a:t>anastomosis</a:t>
+            </a:r>
+            <a:r>
+              <a:rPr/>
+              <a:t>.</a:t>
             </a:r>
           </a:p>
         </p:txBody>
       </p:sp>
       <p:pic>
         <p:nvPicPr>
-          <p:cNvPr descr="images/Eso_ProxTumorArtboard.png" id="0" name="Picture 1"/>
+          <p:cNvPr descr="images/Eso_IvorLewis_Anastomosis.png" id="0" name="Picture 1"/>
           <p:cNvPicPr>
             <a:picLocks noGrp="1" noChangeAspect="1"/>
           </p:cNvPicPr>

--- a/lci_esophagectomy.pptx
+++ b/lci_esophagectomy.pptx
@@ -62,6 +62,7 @@
     <p:sldId id="310" r:id="rId56"/>
     <p:sldId id="311" r:id="rId57"/>
     <p:sldId id="312" r:id="rId58"/>
+    <p:sldId id="313" r:id="rId59"/>
   </p:sldIdLst>
   <p:sldSz cx="9144000" cy="5143500" type="screen16x9"/>
   <p:notesSz cx="6858000" cy="9144000"/>
@@ -3762,16 +3763,16 @@
             </a:pPr>
             <a:r>
               <a:rPr/>
-              <a:t>Mininally-invasive approach feasible in 95% of cases</a:t>
-            </a:r>
-          </a:p>
-          <a:p>
-            <a:pPr lvl="0" indent="0" marL="0">
-              <a:buNone/>
-            </a:pPr>
-            <a:r>
-              <a:rPr/>
-              <a:t>In some cases, an open approach is still necessary.</a:t>
+              <a:t>Mininally-invasive approach feasible in 98% of cases</a:t>
+            </a:r>
+          </a:p>
+          <a:p>
+            <a:pPr lvl="0" indent="0" marL="0">
+              <a:buNone/>
+            </a:pPr>
+            <a:r>
+              <a:rPr/>
+              <a:t>In some cases, an open approach is still necessary (2%)</a:t>
             </a:r>
           </a:p>
         </p:txBody>
@@ -5618,7 +5619,7 @@
             </a:pPr>
             <a:r>
               <a:rPr/>
-              <a:t>Day Prior to Surgery</a:t>
+              <a:t>Epidural Catheter for Pain Control</a:t>
             </a:r>
           </a:p>
         </p:txBody>
@@ -5641,21 +5642,35 @@
             <a:pPr lvl="0"/>
             <a:r>
               <a:rPr/>
-              <a:t>Clear liquids for 24 hours prior to surgery</a:t>
-            </a:r>
-          </a:p>
-          <a:p>
-            <a:pPr lvl="0"/>
-            <a:r>
-              <a:rPr/>
-              <a:t>Check with Pre-op nurse regarding medicines day prior to surgery</a:t>
-            </a:r>
-          </a:p>
-          <a:p>
-            <a:pPr lvl="0"/>
-            <a:r>
-              <a:rPr/>
-              <a:t>No tube feedings the night before surgery</a:t>
+              <a:t>Remains in place for 2-5 days</a:t>
+            </a:r>
+          </a:p>
+          <a:p>
+            <a:pPr lvl="0"/>
+            <a:r>
+              <a:rPr/>
+              <a:t>Dosage can be adjusted as needed</a:t>
+            </a:r>
+          </a:p>
+          <a:p>
+            <a:pPr lvl="0"/>
+            <a:r>
+              <a:rPr/>
+              <a:t>Can make it more difficult to urinate</a:t>
+            </a:r>
+          </a:p>
+          <a:p>
+            <a:pPr lvl="0"/>
+            <a:r>
+              <a:rPr/>
+              <a:t>May require foley catheter in bladder</a:t>
+            </a:r>
+          </a:p>
+          <a:p>
+            <a:pPr lvl="0"/>
+            <a:r>
+              <a:rPr/>
+              <a:t>Foley catheter removed after epidural removed</a:t>
             </a:r>
           </a:p>
         </p:txBody>
@@ -5707,7 +5722,7 @@
             </a:pPr>
             <a:r>
               <a:rPr/>
-              <a:t>Day of Surgery</a:t>
+              <a:t>Intensive Care Unit (ICU) (2-4 days)</a:t>
             </a:r>
           </a:p>
         </p:txBody>
@@ -5730,43 +5745,42 @@
             <a:pPr lvl="0"/>
             <a:r>
               <a:rPr/>
-              <a:t>Arrive at 5am – nothing to eat or drink after midnight.</a:t>
-            </a:r>
-          </a:p>
-          <a:p>
-            <a:pPr lvl="0"/>
-            <a:r>
-              <a:rPr/>
-              <a:t>Medicines OK w/ a sip of water</a:t>
-            </a:r>
-          </a:p>
-          <a:p>
-            <a:pPr lvl="0"/>
-            <a:r>
-              <a:rPr/>
-              <a:t>sip of black coffee but </a:t>
-            </a:r>
-            <a:r>
-              <a:rPr b="1"/>
-              <a:t>no cream</a:t>
-            </a:r>
-            <a:r>
-              <a:rPr/>
-              <a:t>.</a:t>
-            </a:r>
-          </a:p>
-          <a:p>
-            <a:pPr lvl="0"/>
-            <a:r>
-              <a:rPr/>
-              <a:t>Surgery will be cancelled if you have cream/milk</a:t>
-            </a:r>
-          </a:p>
-          <a:p>
-            <a:pPr lvl="0"/>
-            <a:r>
-              <a:rPr/>
-              <a:t>Waiting room for family and friends on 5th floor</a:t>
+              <a:t>Surgical ICU on 11th floor</a:t>
+            </a:r>
+          </a:p>
+          <a:p>
+            <a:pPr lvl="0"/>
+            <a:r>
+              <a:rPr/>
+              <a:t>NG tube in nose to drain stomach and esophagus</a:t>
+            </a:r>
+          </a:p>
+          <a:p>
+            <a:pPr lvl="0"/>
+            <a:r>
+              <a:rPr/>
+              <a:t>Catheter in bladder</a:t>
+            </a:r>
+          </a:p>
+          <a:p>
+            <a:pPr lvl="0"/>
+            <a:r>
+              <a:rPr/>
+              <a:t>Chest tube right chest</a:t>
+            </a:r>
+          </a:p>
+          <a:p>
+            <a:pPr lvl="0"/>
+            <a:r>
+              <a:rPr/>
+              <a:t>Abdominal drains (usually 2)</a:t>
+            </a:r>
+          </a:p>
+          <a:p>
+            <a:pPr lvl="0"/>
+            <a:r>
+              <a:rPr/>
+              <a:t>Feeding jejunostomy (usually stays in 8 wks)</a:t>
             </a:r>
           </a:p>
         </p:txBody>
@@ -5818,7 +5832,7 @@
             </a:pPr>
             <a:r>
               <a:rPr/>
-              <a:t>Epidural Catheter for Pain Control</a:t>
+              <a:t>Intensive Care Unit (ICU)</a:t>
             </a:r>
           </a:p>
         </p:txBody>
@@ -5841,35 +5855,35 @@
             <a:pPr lvl="0"/>
             <a:r>
               <a:rPr/>
-              <a:t>Remains in place for 2-5 days</a:t>
-            </a:r>
-          </a:p>
-          <a:p>
-            <a:pPr lvl="0"/>
-            <a:r>
-              <a:rPr/>
-              <a:t>Dosage can be adjusted as needed</a:t>
-            </a:r>
-          </a:p>
-          <a:p>
-            <a:pPr lvl="0"/>
-            <a:r>
-              <a:rPr/>
-              <a:t>Can make it more difficult to urinate</a:t>
-            </a:r>
-          </a:p>
-          <a:p>
-            <a:pPr lvl="0"/>
-            <a:r>
-              <a:rPr/>
-              <a:t>May require foley catheter in bladder</a:t>
-            </a:r>
-          </a:p>
-          <a:p>
-            <a:pPr lvl="0"/>
-            <a:r>
-              <a:rPr/>
-              <a:t>Foley catheter removed after epidural removed</a:t>
+              <a:t>Bladder catheter removed → check that bladder empties properly</a:t>
+            </a:r>
+          </a:p>
+          <a:p>
+            <a:pPr lvl="0"/>
+            <a:r>
+              <a:rPr/>
+              <a:t>Chest tube removed (day 2-4) → follow-up x-ray</a:t>
+            </a:r>
+          </a:p>
+          <a:p>
+            <a:pPr lvl="0"/>
+            <a:r>
+              <a:rPr/>
+              <a:t>Fluid emptied from drains every few hours</a:t>
+            </a:r>
+          </a:p>
+          <a:p>
+            <a:pPr lvl="0"/>
+            <a:r>
+              <a:rPr/>
+              <a:t>Start tube feedings by feeding</a:t>
+            </a:r>
+          </a:p>
+          <a:p>
+            <a:pPr lvl="0"/>
+            <a:r>
+              <a:rPr/>
+              <a:t>Feeding jejunostomy (stays in 8 weeks)</a:t>
             </a:r>
           </a:p>
         </p:txBody>
@@ -5921,7 +5935,7 @@
             </a:pPr>
             <a:r>
               <a:rPr/>
-              <a:t>Intensive Care Unit (ICU) (2-4 days)</a:t>
+              <a:t>Ward - 6Tower</a:t>
             </a:r>
           </a:p>
         </p:txBody>
@@ -5944,42 +5958,42 @@
             <a:pPr lvl="0"/>
             <a:r>
               <a:rPr/>
-              <a:t>Surgical ICU on 11th floor</a:t>
-            </a:r>
-          </a:p>
-          <a:p>
-            <a:pPr lvl="0"/>
-            <a:r>
-              <a:rPr/>
-              <a:t>NG tube in nose to drain stomach and esophagus</a:t>
-            </a:r>
-          </a:p>
-          <a:p>
-            <a:pPr lvl="0"/>
-            <a:r>
-              <a:rPr/>
-              <a:t>Catheter in bladder</a:t>
-            </a:r>
-          </a:p>
-          <a:p>
-            <a:pPr lvl="0"/>
-            <a:r>
-              <a:rPr/>
-              <a:t>Chest tube right chest</a:t>
-            </a:r>
-          </a:p>
-          <a:p>
-            <a:pPr lvl="0"/>
-            <a:r>
-              <a:rPr/>
-              <a:t>Abdominal drains (usually 2)</a:t>
-            </a:r>
-          </a:p>
-          <a:p>
-            <a:pPr lvl="0"/>
-            <a:r>
-              <a:rPr/>
-              <a:t>Feeding jejunostomy (usually stays in 8 wks)</a:t>
+              <a:t>Jejunostomy feeds started</a:t>
+            </a:r>
+          </a:p>
+          <a:p>
+            <a:pPr lvl="0"/>
+            <a:r>
+              <a:rPr/>
+              <a:t>Up in a chair most of the day</a:t>
+            </a:r>
+          </a:p>
+          <a:p>
+            <a:pPr lvl="0"/>
+            <a:r>
+              <a:rPr/>
+              <a:t>Walking in the halls</a:t>
+            </a:r>
+          </a:p>
+          <a:p>
+            <a:pPr lvl="1"/>
+            <a:r>
+              <a:rPr/>
+              <a:t>Start with assistance</a:t>
+            </a:r>
+          </a:p>
+          <a:p>
+            <a:pPr lvl="1"/>
+            <a:r>
+              <a:rPr/>
+              <a:t>Improves lung function</a:t>
+            </a:r>
+          </a:p>
+          <a:p>
+            <a:pPr lvl="1"/>
+            <a:r>
+              <a:rPr/>
+              <a:t>Prevents loss of muscle strength</a:t>
             </a:r>
           </a:p>
         </p:txBody>
@@ -6031,7 +6045,7 @@
             </a:pPr>
             <a:r>
               <a:rPr/>
-              <a:t>Intensive Care Unit (ICU)</a:t>
+              <a:t>Jejunostomy Feeds</a:t>
             </a:r>
           </a:p>
         </p:txBody>
@@ -6051,38 +6065,49 @@
           <a:bodyPr/>
           <a:lstStyle/>
           <a:p>
-            <a:pPr lvl="0"/>
-            <a:r>
-              <a:rPr/>
-              <a:t>Bladder catheter removed → check that bladder empties properly</a:t>
-            </a:r>
-          </a:p>
-          <a:p>
-            <a:pPr lvl="0"/>
-            <a:r>
-              <a:rPr/>
-              <a:t>Chest tube removed (day 2-4) → follow-up x-ray</a:t>
-            </a:r>
-          </a:p>
-          <a:p>
-            <a:pPr lvl="0"/>
-            <a:r>
-              <a:rPr/>
-              <a:t>Fluid emptied from drains every few hours</a:t>
-            </a:r>
-          </a:p>
-          <a:p>
-            <a:pPr lvl="0"/>
-            <a:r>
-              <a:rPr/>
-              <a:t>Start tube feedings by feeding</a:t>
-            </a:r>
-          </a:p>
-          <a:p>
-            <a:pPr lvl="0"/>
-            <a:r>
-              <a:rPr/>
-              <a:t>Feeding jejunostomy (stays in 8 weeks)</a:t>
+            <a:pPr lvl="0" indent="0" marL="0">
+              <a:buNone/>
+            </a:pPr>
+            <a:r>
+              <a:rPr/>
+              <a:t>Jejunostomy tube feeds</a:t>
+            </a:r>
+          </a:p>
+          <a:p>
+            <a:pPr lvl="0"/>
+            <a:r>
+              <a:rPr/>
+              <a:t>Start continuous (24 hours)</a:t>
+            </a:r>
+          </a:p>
+          <a:p>
+            <a:pPr lvl="0"/>
+            <a:r>
+              <a:rPr/>
+              <a:t>Convert to night-time only (16 hours)</a:t>
+            </a:r>
+          </a:p>
+          <a:p>
+            <a:pPr lvl="0" indent="0" marL="0">
+              <a:buNone/>
+            </a:pPr>
+            <a:r>
+              <a:rPr/>
+              <a:t>Water administered through feeding tube</a:t>
+            </a:r>
+          </a:p>
+          <a:p>
+            <a:pPr lvl="0"/>
+            <a:r>
+              <a:rPr/>
+              <a:t>Usually 8oz 4 times/day</a:t>
+            </a:r>
+          </a:p>
+          <a:p>
+            <a:pPr lvl="0"/>
+            <a:r>
+              <a:rPr/>
+              <a:t>Important to prevent dehydration</a:t>
             </a:r>
           </a:p>
         </p:txBody>
@@ -6183,6 +6208,13 @@
                 <a:r>
                   <a:rPr/>
                   <a:t>Surgery scheduled after medical evaluation</a:t>
+                </a:r>
+              </a:p>
+              <a:p>
+                <a:pPr lvl="0"/>
+                <a:r>
+                  <a:rPr/>
+                  <a:t>Aim for surgery within 6 weeks of consultation</a:t>
                 </a:r>
               </a:p>
               <a:p>
@@ -6243,6 +6275,27 @@
                   <a:t>Medical evaluation</a:t>
                 </a:r>
               </a:p>
+              <a:p>
+                <a:pPr lvl="0"/>
+                <a:r>
+                  <a:rPr/>
+                  <a:t>Timing between end of preoperative therapy and surgery</a:t>
+                </a:r>
+              </a:p>
+              <a:p>
+                <a:pPr lvl="1"/>
+                <a:r>
+                  <a:rPr/>
+                  <a:t>Chemotherapy + radiation: 6-8 weeks</a:t>
+                </a:r>
+              </a:p>
+              <a:p>
+                <a:pPr lvl="1"/>
+                <a:r>
+                  <a:rPr/>
+                  <a:t>Chemotherapy: 4-8 weeks</a:t>
+                </a:r>
+              </a:p>
             </p:txBody>
           </p:sp>
         </mc:Choice>
@@ -6281,20 +6334,20 @@
         </p:nvSpPr>
         <p:spPr>
           <a:xfrm>
-            <a:off x="284309" y="205979"/>
-            <a:ext cx="8552330" cy="662317"/>
-          </a:xfrm>
-        </p:spPr>
-        <p:txBody>
-          <a:bodyPr/>
-          <a:lstStyle/>
-          <a:p>
-            <a:pPr lvl="0" indent="0" marL="0">
-              <a:buNone/>
-            </a:pPr>
-            <a:r>
-              <a:rPr/>
-              <a:t>Ward - 6Tower</a:t>
+            <a:off x="315045" y="205979"/>
+            <a:ext cx="8529278" cy="857250"/>
+          </a:xfrm>
+        </p:spPr>
+        <p:txBody>
+          <a:bodyPr/>
+          <a:lstStyle/>
+          <a:p>
+            <a:pPr lvl="0" indent="0" marL="0">
+              <a:buNone/>
+            </a:pPr>
+            <a:r>
+              <a:rPr/>
+              <a:t>Jejunostomy Tube</a:t>
             </a:r>
           </a:p>
         </p:txBody>
@@ -6306,7 +6359,7 @@
             <a:spLocks noGrp="1"/>
           </p:cNvSpPr>
           <p:nvPr>
-            <p:ph idx="1"/>
+            <p:ph idx="1" sz="half"/>
           </p:nvPr>
         </p:nvSpPr>
         <p:spPr/>
@@ -6317,46 +6370,62 @@
             <a:pPr lvl="0"/>
             <a:r>
               <a:rPr/>
-              <a:t>Jejunostomy feeds started</a:t>
-            </a:r>
-          </a:p>
-          <a:p>
-            <a:pPr lvl="0"/>
-            <a:r>
-              <a:rPr/>
-              <a:t>Up in a chair most of the day</a:t>
-            </a:r>
-          </a:p>
-          <a:p>
-            <a:pPr lvl="0"/>
-            <a:r>
-              <a:rPr/>
-              <a:t>Walking in the halls</a:t>
-            </a:r>
-          </a:p>
-          <a:p>
-            <a:pPr lvl="1"/>
-            <a:r>
-              <a:rPr/>
-              <a:t>Start with assistance</a:t>
-            </a:r>
-          </a:p>
-          <a:p>
-            <a:pPr lvl="1"/>
-            <a:r>
-              <a:rPr/>
-              <a:t>Improves lung function</a:t>
-            </a:r>
-          </a:p>
-          <a:p>
-            <a:pPr lvl="1"/>
-            <a:r>
-              <a:rPr/>
-              <a:t>Prevents loss of muscle strength</a:t>
-            </a:r>
-          </a:p>
-        </p:txBody>
-      </p:sp>
+              <a:t>Nutrition to bypasses the esophagus and stomach</a:t>
+            </a:r>
+          </a:p>
+          <a:p>
+            <a:pPr lvl="0"/>
+            <a:r>
+              <a:rPr/>
+              <a:t>Placed in small intestine</a:t>
+            </a:r>
+          </a:p>
+          <a:p>
+            <a:pPr lvl="0"/>
+            <a:r>
+              <a:rPr/>
+              <a:t>Pump administers feedings slowly</a:t>
+            </a:r>
+          </a:p>
+          <a:p>
+            <a:pPr lvl="0"/>
+            <a:r>
+              <a:rPr/>
+              <a:t>Feeding done at night</a:t>
+            </a:r>
+          </a:p>
+        </p:txBody>
+      </p:sp>
+      <p:pic>
+        <p:nvPicPr>
+          <p:cNvPr descr="images/nutrition_jtube.png" id="0" name="Picture 1"/>
+          <p:cNvPicPr>
+            <a:picLocks noGrp="1" noChangeAspect="1"/>
+          </p:cNvPicPr>
+          <p:nvPr/>
+        </p:nvPicPr>
+        <p:blipFill>
+          <a:blip r:embed="rId2"/>
+          <a:stretch>
+            <a:fillRect/>
+          </a:stretch>
+        </p:blipFill>
+        <p:spPr bwMode="auto">
+          <a:xfrm>
+            <a:off x="4902200" y="1193800"/>
+            <a:ext cx="3644900" cy="3733800"/>
+          </a:xfrm>
+          <a:prstGeom prst="rect">
+            <a:avLst/>
+          </a:prstGeom>
+          <a:noFill/>
+          <a:ln w="9525">
+            <a:noFill/>
+            <a:headEnd/>
+            <a:tailEnd/>
+          </a:ln>
+        </p:spPr>
+      </p:pic>
     </p:spTree>
   </p:cSld>
 </p:sld>
@@ -6404,7 +6473,7 @@
             </a:pPr>
             <a:r>
               <a:rPr/>
-              <a:t>Jejunostomy Feeds</a:t>
+              <a:t>Jejunostomy Typical Regimen</a:t>
             </a:r>
           </a:p>
         </p:txBody>
@@ -6424,49 +6493,40 @@
           <a:bodyPr/>
           <a:lstStyle/>
           <a:p>
-            <a:pPr lvl="0" indent="0" marL="0">
-              <a:buNone/>
-            </a:pPr>
-            <a:r>
-              <a:rPr/>
-              <a:t>Jejunostomy tube feeds</a:t>
-            </a:r>
-          </a:p>
-          <a:p>
-            <a:pPr lvl="0"/>
-            <a:r>
-              <a:rPr/>
-              <a:t>Start continuous (24 hours)</a:t>
-            </a:r>
-          </a:p>
-          <a:p>
-            <a:pPr lvl="0"/>
-            <a:r>
-              <a:rPr/>
-              <a:t>Convert to night-time only (16 hours)</a:t>
-            </a:r>
-          </a:p>
-          <a:p>
-            <a:pPr lvl="0" indent="0" marL="0">
-              <a:buNone/>
-            </a:pPr>
-            <a:r>
-              <a:rPr/>
-              <a:t>Water administered through feeding tube</a:t>
-            </a:r>
-          </a:p>
-          <a:p>
-            <a:pPr lvl="0"/>
-            <a:r>
-              <a:rPr/>
-              <a:t>Usually 8oz 4 times/day</a:t>
-            </a:r>
-          </a:p>
-          <a:p>
-            <a:pPr lvl="0"/>
-            <a:r>
-              <a:rPr/>
-              <a:t>Important to prevent dehydration</a:t>
+            <a:pPr lvl="0"/>
+            <a:r>
+              <a:rPr/>
+              <a:t>Jejunostomy tube feeds for 16 hours (6pm-10am)</a:t>
+            </a:r>
+          </a:p>
+          <a:p>
+            <a:pPr lvl="1"/>
+            <a:r>
+              <a:rPr/>
+              <a:t>Men: 75mL/hour x 16 hours = 5 cartons</a:t>
+            </a:r>
+          </a:p>
+          <a:p>
+            <a:pPr lvl="1"/>
+            <a:r>
+              <a:rPr/>
+              <a:t>Women: 60mL/hour x 16 hours = 4 cartons</a:t>
+            </a:r>
+          </a:p>
+          <a:p>
+            <a:pPr lvl="0"/>
+            <a:r>
+              <a:rPr/>
+              <a:t>Water 240ml (8oz) via syringe 4x/day</a:t>
+            </a:r>
+          </a:p>
+          <a:p>
+            <a:pPr lvl="0" indent="0" marL="0">
+              <a:buNone/>
+            </a:pPr>
+            <a:r>
+              <a:rPr/>
+              <a:t>Hospital nurses will teach use of the feeding tube</a:t>
             </a:r>
           </a:p>
         </p:txBody>
@@ -6505,20 +6565,20 @@
         </p:nvSpPr>
         <p:spPr>
           <a:xfrm>
-            <a:off x="315045" y="205979"/>
-            <a:ext cx="8529278" cy="857250"/>
-          </a:xfrm>
-        </p:spPr>
-        <p:txBody>
-          <a:bodyPr/>
-          <a:lstStyle/>
-          <a:p>
-            <a:pPr lvl="0" indent="0" marL="0">
-              <a:buNone/>
-            </a:pPr>
-            <a:r>
-              <a:rPr/>
-              <a:t>Jejunostomy Tube</a:t>
+            <a:off x="284309" y="205979"/>
+            <a:ext cx="8552330" cy="662317"/>
+          </a:xfrm>
+        </p:spPr>
+        <p:txBody>
+          <a:bodyPr/>
+          <a:lstStyle/>
+          <a:p>
+            <a:pPr lvl="0" indent="0" marL="0">
+              <a:buNone/>
+            </a:pPr>
+            <a:r>
+              <a:rPr/>
+              <a:t>Jejunostomy Feeds with Diabetes</a:t>
             </a:r>
           </a:p>
         </p:txBody>
@@ -6530,7 +6590,7 @@
             <a:spLocks noGrp="1"/>
           </p:cNvSpPr>
           <p:nvPr>
-            <p:ph idx="1" sz="half"/>
+            <p:ph idx="1"/>
           </p:nvPr>
         </p:nvSpPr>
         <p:spPr/>
@@ -6538,65 +6598,60 @@
           <a:bodyPr/>
           <a:lstStyle/>
           <a:p>
-            <a:pPr lvl="0"/>
-            <a:r>
-              <a:rPr/>
-              <a:t>Nutrition to bypasses the esophagus and stomach</a:t>
-            </a:r>
-          </a:p>
-          <a:p>
-            <a:pPr lvl="0"/>
-            <a:r>
-              <a:rPr/>
-              <a:t>Placed in small intestine</a:t>
-            </a:r>
-          </a:p>
-          <a:p>
-            <a:pPr lvl="0"/>
-            <a:r>
-              <a:rPr/>
-              <a:t>Pump administers feedings slowly</a:t>
-            </a:r>
-          </a:p>
-          <a:p>
-            <a:pPr lvl="0"/>
-            <a:r>
-              <a:rPr/>
-              <a:t>Feeding done at night</a:t>
-            </a:r>
-          </a:p>
-        </p:txBody>
-      </p:sp>
-      <p:pic>
-        <p:nvPicPr>
-          <p:cNvPr descr="images/nutrition_jtube.png" id="0" name="Picture 1"/>
-          <p:cNvPicPr>
-            <a:picLocks noGrp="1" noChangeAspect="1"/>
-          </p:cNvPicPr>
-          <p:nvPr/>
-        </p:nvPicPr>
-        <p:blipFill>
-          <a:blip r:embed="rId2"/>
-          <a:stretch>
-            <a:fillRect/>
-          </a:stretch>
-        </p:blipFill>
-        <p:spPr bwMode="auto">
-          <a:xfrm>
-            <a:off x="4902200" y="1193800"/>
-            <a:ext cx="3644900" cy="3733800"/>
-          </a:xfrm>
-          <a:prstGeom prst="rect">
-            <a:avLst/>
-          </a:prstGeom>
-          <a:noFill/>
-          <a:ln w="9525">
-            <a:noFill/>
-            <a:headEnd/>
-            <a:tailEnd/>
-          </a:ln>
-        </p:spPr>
-      </p:pic>
+            <a:pPr lvl="0" indent="0" marL="0">
+              <a:buNone/>
+            </a:pPr>
+            <a:r>
+              <a:rPr/>
+              <a:t>Jejunostomy feedings elevate blood sugars</a:t>
+            </a:r>
+          </a:p>
+          <a:p>
+            <a:pPr lvl="0"/>
+            <a:r>
+              <a:rPr/>
+              <a:t>Insulin may be required along with feeds</a:t>
+            </a:r>
+          </a:p>
+          <a:p>
+            <a:pPr lvl="0" indent="0" marL="0">
+              <a:buNone/>
+            </a:pPr>
+            <a:r>
+              <a:rPr/>
+              <a:t>Typical Pattern for tube feeds</a:t>
+            </a:r>
+          </a:p>
+          <a:p>
+            <a:pPr lvl="0"/>
+            <a:r>
+              <a:rPr/>
+              <a:t>Feeds run via pump from 6pm to 10am</a:t>
+            </a:r>
+          </a:p>
+          <a:p>
+            <a:pPr lvl="0"/>
+            <a:r>
+              <a:rPr/>
+              <a:t>Insulin at 6pm (70/30 insulin)</a:t>
+            </a:r>
+          </a:p>
+          <a:p>
+            <a:pPr lvl="0"/>
+            <a:r>
+              <a:rPr/>
+              <a:t>Insulin at Midnight (70/30 insulin)</a:t>
+            </a:r>
+          </a:p>
+          <a:p>
+            <a:pPr lvl="0"/>
+            <a:r>
+              <a:rPr/>
+              <a:t>No insulin if tube feedings are not run</a:t>
+            </a:r>
+          </a:p>
+        </p:txBody>
+      </p:sp>
     </p:spTree>
   </p:cSld>
 </p:sld>
@@ -6631,20 +6686,20 @@
         </p:nvSpPr>
         <p:spPr>
           <a:xfrm>
-            <a:off x="284309" y="205979"/>
-            <a:ext cx="8552330" cy="662317"/>
-          </a:xfrm>
-        </p:spPr>
-        <p:txBody>
-          <a:bodyPr/>
-          <a:lstStyle/>
-          <a:p>
-            <a:pPr lvl="0" indent="0" marL="0">
-              <a:buNone/>
-            </a:pPr>
-            <a:r>
-              <a:rPr/>
-              <a:t>Jejunostomy Typical Regimen</a:t>
+            <a:off x="315045" y="205979"/>
+            <a:ext cx="8529278" cy="857250"/>
+          </a:xfrm>
+        </p:spPr>
+        <p:txBody>
+          <a:bodyPr/>
+          <a:lstStyle/>
+          <a:p>
+            <a:pPr lvl="0" indent="0" marL="0">
+              <a:buNone/>
+            </a:pPr>
+            <a:r>
+              <a:rPr/>
+              <a:t>Jejunostomy Video</a:t>
             </a:r>
           </a:p>
         </p:txBody>
@@ -6656,7 +6711,7 @@
             <a:spLocks noGrp="1"/>
           </p:cNvSpPr>
           <p:nvPr>
-            <p:ph idx="1"/>
+            <p:ph idx="1" sz="half"/>
           </p:nvPr>
         </p:nvSpPr>
         <p:spPr/>
@@ -6664,44 +6719,46 @@
           <a:bodyPr/>
           <a:lstStyle/>
           <a:p>
-            <a:pPr lvl="0"/>
-            <a:r>
-              <a:rPr/>
-              <a:t>Jejunostomy tube feeds for 16 hours (6pm-10am)</a:t>
-            </a:r>
-          </a:p>
-          <a:p>
-            <a:pPr lvl="1"/>
-            <a:r>
-              <a:rPr/>
-              <a:t>Men: 75mL/hour x 16 hours = 5 cartons</a:t>
-            </a:r>
-          </a:p>
-          <a:p>
-            <a:pPr lvl="1"/>
-            <a:r>
-              <a:rPr/>
-              <a:t>Women: 60mL/hour x 16 hours = 4 cartons</a:t>
-            </a:r>
-          </a:p>
-          <a:p>
-            <a:pPr lvl="0"/>
-            <a:r>
-              <a:rPr/>
-              <a:t>Water 240ml (8oz) via syringe 4x/day</a:t>
-            </a:r>
-          </a:p>
-          <a:p>
-            <a:pPr lvl="0" indent="0" marL="0">
-              <a:buNone/>
-            </a:pPr>
-            <a:r>
-              <a:rPr/>
-              <a:t>Hospital nurses will teach use of the feeding tube</a:t>
-            </a:r>
-          </a:p>
-        </p:txBody>
-      </p:sp>
+            <a:pPr lvl="0" indent="0" marL="0">
+              <a:buNone/>
+            </a:pPr>
+            <a:r>
+              <a:rPr/>
+              <a:t>A video is available to help become familiar with the feeding jejunostomy</a:t>
+            </a:r>
+          </a:p>
+        </p:txBody>
+      </p:sp>
+      <p:pic>
+        <p:nvPicPr>
+          <p:cNvPr descr="images/nutrition_jejunostomy_qrcode.png" id="0" name="Picture 1"/>
+          <p:cNvPicPr>
+            <a:picLocks noGrp="1" noChangeAspect="1"/>
+          </p:cNvPicPr>
+          <p:nvPr/>
+        </p:nvPicPr>
+        <p:blipFill>
+          <a:blip r:embed="rId2"/>
+          <a:stretch>
+            <a:fillRect/>
+          </a:stretch>
+        </p:blipFill>
+        <p:spPr bwMode="auto">
+          <a:xfrm>
+            <a:off x="5067300" y="1193800"/>
+            <a:ext cx="3327400" cy="3733800"/>
+          </a:xfrm>
+          <a:prstGeom prst="rect">
+            <a:avLst/>
+          </a:prstGeom>
+          <a:noFill/>
+          <a:ln w="9525">
+            <a:noFill/>
+            <a:headEnd/>
+            <a:tailEnd/>
+          </a:ln>
+        </p:spPr>
+      </p:pic>
     </p:spTree>
   </p:cSld>
 </p:sld>
@@ -6749,7 +6806,7 @@
             </a:pPr>
             <a:r>
               <a:rPr/>
-              <a:t>Jejunostomy Feeds with Diabetes</a:t>
+              <a:t>Activity after Surgery</a:t>
             </a:r>
           </a:p>
         </p:txBody>
@@ -6769,56 +6826,38 @@
           <a:bodyPr/>
           <a:lstStyle/>
           <a:p>
-            <a:pPr lvl="0" indent="0" marL="0">
-              <a:buNone/>
-            </a:pPr>
-            <a:r>
-              <a:rPr/>
-              <a:t>Jejunostomy feedings elevate blood sugars</a:t>
-            </a:r>
-          </a:p>
-          <a:p>
-            <a:pPr lvl="0"/>
-            <a:r>
-              <a:rPr/>
-              <a:t>Insulin may be required along with feeds</a:t>
-            </a:r>
-          </a:p>
-          <a:p>
-            <a:pPr lvl="0" indent="0" marL="0">
-              <a:buNone/>
-            </a:pPr>
-            <a:r>
-              <a:rPr/>
-              <a:t>Typical Pattern for tube feeds</a:t>
-            </a:r>
-          </a:p>
-          <a:p>
-            <a:pPr lvl="0"/>
-            <a:r>
-              <a:rPr/>
-              <a:t>Feeds run via pump from 6pm to 10am</a:t>
-            </a:r>
-          </a:p>
-          <a:p>
-            <a:pPr lvl="0"/>
-            <a:r>
-              <a:rPr/>
-              <a:t>Insulin at 6pm (70/30 insulin)</a:t>
-            </a:r>
-          </a:p>
-          <a:p>
-            <a:pPr lvl="0"/>
-            <a:r>
-              <a:rPr/>
-              <a:t>Insulin at Midnight (70/30 insulin)</a:t>
-            </a:r>
-          </a:p>
-          <a:p>
-            <a:pPr lvl="0"/>
-            <a:r>
-              <a:rPr/>
-              <a:t>No insulin if tube feedings are not run</a:t>
+            <a:pPr lvl="0"/>
+            <a:r>
+              <a:rPr/>
+              <a:t>Up in chair most of the day</a:t>
+            </a:r>
+          </a:p>
+          <a:p>
+            <a:pPr lvl="0"/>
+            <a:r>
+              <a:rPr/>
+              <a:t>Walking with help from nurse/Physical Therapist</a:t>
+            </a:r>
+          </a:p>
+          <a:p>
+            <a:pPr lvl="0"/>
+            <a:r>
+              <a:rPr/>
+              <a:t>Goals:</a:t>
+            </a:r>
+          </a:p>
+          <a:p>
+            <a:pPr lvl="1"/>
+            <a:r>
+              <a:rPr/>
+              <a:t>Improve lung function</a:t>
+            </a:r>
+          </a:p>
+          <a:p>
+            <a:pPr lvl="1"/>
+            <a:r>
+              <a:rPr/>
+              <a:t>Prevent muscle loss</a:t>
             </a:r>
           </a:p>
         </p:txBody>
@@ -6829,216 +6868,6 @@
 </file>
 
 <file path=ppt/slides/slide35.xml><?xml version="1.0" encoding="utf-8"?>
-<p:sld xmlns:a="http://schemas.openxmlformats.org/drawingml/2006/main" xmlns:r="http://schemas.openxmlformats.org/officeDocument/2006/relationships" xmlns:p="http://schemas.openxmlformats.org/presentationml/2006/main">
-  <p:cSld>
-    <p:spTree>
-      <p:nvGrpSpPr>
-        <p:cNvPr id="1" name=""/>
-        <p:cNvGrpSpPr/>
-        <p:nvPr/>
-      </p:nvGrpSpPr>
-      <p:grpSpPr>
-        <a:xfrm>
-          <a:off x="0" y="0"/>
-          <a:ext cx="0" cy="0"/>
-          <a:chOff x="0" y="0"/>
-          <a:chExt cx="0" cy="0"/>
-        </a:xfrm>
-      </p:grpSpPr>
-      <p:sp>
-        <p:nvSpPr>
-          <p:cNvPr id="2" name="Title 1"/>
-          <p:cNvSpPr>
-            <a:spLocks noGrp="1"/>
-          </p:cNvSpPr>
-          <p:nvPr>
-            <p:ph type="title"/>
-          </p:nvPr>
-        </p:nvSpPr>
-        <p:spPr>
-          <a:xfrm>
-            <a:off x="315045" y="205979"/>
-            <a:ext cx="8529278" cy="857250"/>
-          </a:xfrm>
-        </p:spPr>
-        <p:txBody>
-          <a:bodyPr/>
-          <a:lstStyle/>
-          <a:p>
-            <a:pPr lvl="0" indent="0" marL="0">
-              <a:buNone/>
-            </a:pPr>
-            <a:r>
-              <a:rPr/>
-              <a:t>Jejunostomy Video</a:t>
-            </a:r>
-          </a:p>
-        </p:txBody>
-      </p:sp>
-      <p:sp>
-        <p:nvSpPr>
-          <p:cNvPr id="3" name="Content Placeholder 2"/>
-          <p:cNvSpPr>
-            <a:spLocks noGrp="1"/>
-          </p:cNvSpPr>
-          <p:nvPr>
-            <p:ph idx="1" sz="half"/>
-          </p:nvPr>
-        </p:nvSpPr>
-        <p:spPr/>
-        <p:txBody>
-          <a:bodyPr/>
-          <a:lstStyle/>
-          <a:p>
-            <a:pPr lvl="0" indent="0" marL="0">
-              <a:buNone/>
-            </a:pPr>
-            <a:r>
-              <a:rPr/>
-              <a:t>A video is available to help become familiar with the feeding jejunostomy</a:t>
-            </a:r>
-          </a:p>
-        </p:txBody>
-      </p:sp>
-      <p:pic>
-        <p:nvPicPr>
-          <p:cNvPr descr="images/nutrition_jejunostomy_qrcode.png" id="0" name="Picture 1"/>
-          <p:cNvPicPr>
-            <a:picLocks noGrp="1" noChangeAspect="1"/>
-          </p:cNvPicPr>
-          <p:nvPr/>
-        </p:nvPicPr>
-        <p:blipFill>
-          <a:blip r:embed="rId2"/>
-          <a:stretch>
-            <a:fillRect/>
-          </a:stretch>
-        </p:blipFill>
-        <p:spPr bwMode="auto">
-          <a:xfrm>
-            <a:off x="5067300" y="1193800"/>
-            <a:ext cx="3327400" cy="3733800"/>
-          </a:xfrm>
-          <a:prstGeom prst="rect">
-            <a:avLst/>
-          </a:prstGeom>
-          <a:noFill/>
-          <a:ln w="9525">
-            <a:noFill/>
-            <a:headEnd/>
-            <a:tailEnd/>
-          </a:ln>
-        </p:spPr>
-      </p:pic>
-    </p:spTree>
-  </p:cSld>
-</p:sld>
-</file>
-
-<file path=ppt/slides/slide36.xml><?xml version="1.0" encoding="utf-8"?>
-<p:sld xmlns:a="http://schemas.openxmlformats.org/drawingml/2006/main" xmlns:r="http://schemas.openxmlformats.org/officeDocument/2006/relationships" xmlns:p="http://schemas.openxmlformats.org/presentationml/2006/main">
-  <p:cSld>
-    <p:spTree>
-      <p:nvGrpSpPr>
-        <p:cNvPr id="1" name=""/>
-        <p:cNvGrpSpPr/>
-        <p:nvPr/>
-      </p:nvGrpSpPr>
-      <p:grpSpPr>
-        <a:xfrm>
-          <a:off x="0" y="0"/>
-          <a:ext cx="0" cy="0"/>
-          <a:chOff x="0" y="0"/>
-          <a:chExt cx="0" cy="0"/>
-        </a:xfrm>
-      </p:grpSpPr>
-      <p:sp>
-        <p:nvSpPr>
-          <p:cNvPr id="2" name="Title 1"/>
-          <p:cNvSpPr>
-            <a:spLocks noGrp="1"/>
-          </p:cNvSpPr>
-          <p:nvPr>
-            <p:ph type="title"/>
-          </p:nvPr>
-        </p:nvSpPr>
-        <p:spPr>
-          <a:xfrm>
-            <a:off x="284309" y="205979"/>
-            <a:ext cx="8552330" cy="662317"/>
-          </a:xfrm>
-        </p:spPr>
-        <p:txBody>
-          <a:bodyPr/>
-          <a:lstStyle/>
-          <a:p>
-            <a:pPr lvl="0" indent="0" marL="0">
-              <a:buNone/>
-            </a:pPr>
-            <a:r>
-              <a:rPr/>
-              <a:t>Activity after Surgery</a:t>
-            </a:r>
-          </a:p>
-        </p:txBody>
-      </p:sp>
-      <p:sp>
-        <p:nvSpPr>
-          <p:cNvPr id="3" name="Content Placeholder 2"/>
-          <p:cNvSpPr>
-            <a:spLocks noGrp="1"/>
-          </p:cNvSpPr>
-          <p:nvPr>
-            <p:ph idx="1"/>
-          </p:nvPr>
-        </p:nvSpPr>
-        <p:spPr/>
-        <p:txBody>
-          <a:bodyPr/>
-          <a:lstStyle/>
-          <a:p>
-            <a:pPr lvl="0"/>
-            <a:r>
-              <a:rPr/>
-              <a:t>Up in chair most of the day</a:t>
-            </a:r>
-          </a:p>
-          <a:p>
-            <a:pPr lvl="0"/>
-            <a:r>
-              <a:rPr/>
-              <a:t>Walking with help from nurse/Physical Therapist</a:t>
-            </a:r>
-          </a:p>
-          <a:p>
-            <a:pPr lvl="0"/>
-            <a:r>
-              <a:rPr/>
-              <a:t>Goals:</a:t>
-            </a:r>
-          </a:p>
-          <a:p>
-            <a:pPr lvl="1"/>
-            <a:r>
-              <a:rPr/>
-              <a:t>Improve lung function</a:t>
-            </a:r>
-          </a:p>
-          <a:p>
-            <a:pPr lvl="1"/>
-            <a:r>
-              <a:rPr/>
-              <a:t>Prevent muscle loss</a:t>
-            </a:r>
-          </a:p>
-        </p:txBody>
-      </p:sp>
-    </p:spTree>
-  </p:cSld>
-</p:sld>
-</file>
-
-<file path=ppt/slides/slide37.xml><?xml version="1.0" encoding="utf-8"?>
 <p:sld xmlns:a="http://schemas.openxmlformats.org/drawingml/2006/main" xmlns:r="http://schemas.openxmlformats.org/officeDocument/2006/relationships" xmlns:p="http://schemas.openxmlformats.org/presentationml/2006/main">
   <p:cSld>
     <p:spTree>
@@ -7170,7 +6999,7 @@
 </p:sld>
 </file>
 
-<file path=ppt/slides/slide38.xml><?xml version="1.0" encoding="utf-8"?>
+<file path=ppt/slides/slide36.xml><?xml version="1.0" encoding="utf-8"?>
 <p:sld xmlns:a="http://schemas.openxmlformats.org/drawingml/2006/main" xmlns:r="http://schemas.openxmlformats.org/officeDocument/2006/relationships" xmlns:p="http://schemas.openxmlformats.org/presentationml/2006/main">
   <p:cSld>
     <p:spTree>
@@ -7269,7 +7098,7 @@
                 <a:pPr lvl="0"/>
                 <a:r>
                   <a:rPr/>
-                  <a:t>70% of patients </a:t>
+                  <a:t>80% of patients </a:t>
                 </a:r>
                 <a14:m>
                   <m:oMath xmlns:m="http://schemas.openxmlformats.org/officeDocument/2006/math">
@@ -7295,6 +7124,192 @@
 </p:sld>
 </file>
 
+<file path=ppt/slides/slide37.xml><?xml version="1.0" encoding="utf-8"?>
+<p:sld xmlns:a="http://schemas.openxmlformats.org/drawingml/2006/main" xmlns:r="http://schemas.openxmlformats.org/officeDocument/2006/relationships" xmlns:p="http://schemas.openxmlformats.org/presentationml/2006/main">
+  <p:cSld>
+    <p:spTree>
+      <p:nvGrpSpPr>
+        <p:cNvPr id="1" name=""/>
+        <p:cNvGrpSpPr/>
+        <p:nvPr/>
+      </p:nvGrpSpPr>
+      <p:grpSpPr>
+        <a:xfrm>
+          <a:off x="0" y="0"/>
+          <a:ext cx="0" cy="0"/>
+          <a:chOff x="0" y="0"/>
+          <a:chExt cx="0" cy="0"/>
+        </a:xfrm>
+      </p:grpSpPr>
+      <p:sp>
+        <p:nvSpPr>
+          <p:cNvPr id="2" name="Title 1"/>
+          <p:cNvSpPr>
+            <a:spLocks noGrp="1"/>
+          </p:cNvSpPr>
+          <p:nvPr>
+            <p:ph type="title"/>
+          </p:nvPr>
+        </p:nvSpPr>
+        <p:spPr>
+          <a:xfrm>
+            <a:off x="284309" y="205979"/>
+            <a:ext cx="8552330" cy="662317"/>
+          </a:xfrm>
+        </p:spPr>
+        <p:txBody>
+          <a:bodyPr/>
+          <a:lstStyle/>
+          <a:p>
+            <a:pPr lvl="0" indent="0" marL="0">
+              <a:buNone/>
+            </a:pPr>
+            <a:r>
+              <a:rPr/>
+              <a:t>Jejunostomy tube</a:t>
+            </a:r>
+          </a:p>
+        </p:txBody>
+      </p:sp>
+      <p:sp>
+        <p:nvSpPr>
+          <p:cNvPr id="3" name="Content Placeholder 2"/>
+          <p:cNvSpPr>
+            <a:spLocks noGrp="1"/>
+          </p:cNvSpPr>
+          <p:nvPr>
+            <p:ph idx="1"/>
+          </p:nvPr>
+        </p:nvSpPr>
+        <p:spPr/>
+        <p:txBody>
+          <a:bodyPr/>
+          <a:lstStyle/>
+          <a:p>
+            <a:pPr lvl="0" indent="0" marL="0">
+              <a:buNone/>
+            </a:pPr>
+            <a:r>
+              <a:rPr/>
+              <a:t>Jejunostomy tube bypasses the stomach and injects tube feeding formula directly in to the small intestine (jejunum)</a:t>
+            </a:r>
+          </a:p>
+          <a:p>
+            <a:pPr lvl="0" indent="0" marL="0">
+              <a:buNone/>
+            </a:pPr>
+            <a:r>
+              <a:rPr/>
+              <a:t>Pump administers the feedings slowly over hours</a:t>
+            </a:r>
+          </a:p>
+        </p:txBody>
+      </p:sp>
+    </p:spTree>
+  </p:cSld>
+</p:sld>
+</file>
+
+<file path=ppt/slides/slide38.xml><?xml version="1.0" encoding="utf-8"?>
+<p:sld xmlns:a="http://schemas.openxmlformats.org/drawingml/2006/main" xmlns:r="http://schemas.openxmlformats.org/officeDocument/2006/relationships" xmlns:p="http://schemas.openxmlformats.org/presentationml/2006/main">
+  <p:cSld>
+    <p:spTree>
+      <p:nvGrpSpPr>
+        <p:cNvPr id="1" name=""/>
+        <p:cNvGrpSpPr/>
+        <p:nvPr/>
+      </p:nvGrpSpPr>
+      <p:grpSpPr>
+        <a:xfrm>
+          <a:off x="0" y="0"/>
+          <a:ext cx="0" cy="0"/>
+          <a:chOff x="0" y="0"/>
+          <a:chExt cx="0" cy="0"/>
+        </a:xfrm>
+      </p:grpSpPr>
+      <p:sp>
+        <p:nvSpPr>
+          <p:cNvPr id="2" name="Title 1"/>
+          <p:cNvSpPr>
+            <a:spLocks noGrp="1"/>
+          </p:cNvSpPr>
+          <p:nvPr>
+            <p:ph type="title"/>
+          </p:nvPr>
+        </p:nvSpPr>
+        <p:spPr>
+          <a:xfrm>
+            <a:off x="284309" y="205979"/>
+            <a:ext cx="8552330" cy="662317"/>
+          </a:xfrm>
+        </p:spPr>
+        <p:txBody>
+          <a:bodyPr/>
+          <a:lstStyle/>
+          <a:p>
+            <a:pPr lvl="0" indent="0" marL="0">
+              <a:buNone/>
+            </a:pPr>
+            <a:r>
+              <a:rPr/>
+              <a:t>Jejunostomy feeding</a:t>
+            </a:r>
+          </a:p>
+        </p:txBody>
+      </p:sp>
+      <p:sp>
+        <p:nvSpPr>
+          <p:cNvPr id="3" name="Content Placeholder 2"/>
+          <p:cNvSpPr>
+            <a:spLocks noGrp="1"/>
+          </p:cNvSpPr>
+          <p:nvPr>
+            <p:ph idx="1"/>
+          </p:nvPr>
+        </p:nvSpPr>
+        <p:spPr/>
+        <p:txBody>
+          <a:bodyPr/>
+          <a:lstStyle/>
+          <a:p>
+            <a:pPr lvl="0"/>
+            <a:r>
+              <a:rPr/>
+              <a:t>Start with continuous feeds (24 hours/day)</a:t>
+            </a:r>
+          </a:p>
+          <a:p>
+            <a:pPr lvl="0"/>
+            <a:r>
+              <a:rPr/>
+              <a:t>Convert to nocturnal (night-time): 6pm to 10pm</a:t>
+            </a:r>
+          </a:p>
+          <a:p>
+            <a:pPr lvl="0" indent="0" marL="0">
+              <a:buNone/>
+            </a:pPr>
+            <a:r>
+              <a:rPr/>
+              <a:t>The feeding bag holds only 4 cartons of feeds - May need to “top off’ bag after a few hours</a:t>
+            </a:r>
+          </a:p>
+          <a:p>
+            <a:pPr lvl="0" indent="0" marL="0">
+              <a:buNone/>
+            </a:pPr>
+            <a:r>
+              <a:rPr/>
+              <a:t>Water through the tube - Important to prevent dehydration - 250mL (8 oz) 4 times per day</a:t>
+            </a:r>
+          </a:p>
+        </p:txBody>
+      </p:sp>
+    </p:spTree>
+  </p:cSld>
+</p:sld>
+</file>
+
 <file path=ppt/slides/slide39.xml><?xml version="1.0" encoding="utf-8"?>
 <p:sld xmlns:a="http://schemas.openxmlformats.org/drawingml/2006/main" xmlns:r="http://schemas.openxmlformats.org/officeDocument/2006/relationships" xmlns:p="http://schemas.openxmlformats.org/presentationml/2006/main">
   <p:cSld>
@@ -7561,7 +7576,7 @@
             </a:pPr>
             <a:r>
               <a:rPr/>
-              <a:t>Discharge</a:t>
+              <a:t>Drains and Tubes</a:t>
             </a:r>
           </a:p>
         </p:txBody>
@@ -7586,56 +7601,7 @@
             </a:pPr>
             <a:r>
               <a:rPr/>
-              <a:t>Goal: ready to leave day #6/7 after surgery</a:t>
-            </a:r>
-          </a:p>
-          <a:p>
-            <a:pPr lvl="0"/>
-            <a:r>
-              <a:rPr/>
-              <a:t>Night-time tube feedings (6pm to 10am)</a:t>
-            </a:r>
-          </a:p>
-          <a:p>
-            <a:pPr lvl="0"/>
-            <a:r>
-              <a:rPr/>
-              <a:t>Nutrition by mouth (70% of patients)</a:t>
-            </a:r>
-          </a:p>
-          <a:p>
-            <a:pPr lvl="1"/>
-            <a:r>
-              <a:rPr/>
-              <a:t>1 oz of water per hour by mouth OR</a:t>
-            </a:r>
-          </a:p>
-          <a:p>
-            <a:pPr lvl="1"/>
-            <a:r>
-              <a:rPr/>
-              <a:t>Protein shakes 4oz every 2 hours</a:t>
-            </a:r>
-          </a:p>
-          <a:p>
-            <a:pPr lvl="0"/>
-            <a:r>
-              <a:rPr/>
-              <a:t>Water through tube 8oz four times per day</a:t>
-            </a:r>
-          </a:p>
-          <a:p>
-            <a:pPr lvl="0"/>
-            <a:r>
-              <a:rPr/>
-              <a:t>Home care nursing (feeding tube teaching)</a:t>
-            </a:r>
-          </a:p>
-          <a:p>
-            <a:pPr lvl="0"/>
-            <a:r>
-              <a:rPr/>
-              <a:t>Home infusion (tube feeding supplies)</a:t>
+              <a:t>Chest Tube (right side): Removed 4-6 days after surgery (depending upon output) Abdomiaal drains: Removed 4-7 days after surgery Discharge with 1 abdominal drain in 10% of cases Epidural catheter: Removed 4-5 days after surgery Bladder catheter: Removed after epicura catheter removed</a:t>
             </a:r>
           </a:p>
         </p:txBody>
@@ -7687,7 +7653,7 @@
             </a:pPr>
             <a:r>
               <a:rPr/>
-              <a:t>Nutrition after Surgery</a:t>
+              <a:t>Discharge</a:t>
             </a:r>
           </a:p>
         </p:txBody>
@@ -7712,55 +7678,49 @@
             </a:pPr>
             <a:r>
               <a:rPr/>
-              <a:t>At discharge home:</a:t>
-            </a:r>
-          </a:p>
-          <a:p>
-            <a:pPr lvl="0"/>
-            <a:r>
-              <a:rPr/>
-              <a:t>Protein shakes 4oz every 2 hrs</a:t>
-            </a:r>
-          </a:p>
-          <a:p>
-            <a:pPr lvl="0"/>
-            <a:r>
-              <a:rPr/>
-              <a:t>Tube feeds 4-5 cans at night (6pm-10am)</a:t>
-            </a:r>
-          </a:p>
-          <a:p>
-            <a:pPr lvl="0" indent="0" marL="0">
-              <a:buNone/>
-            </a:pPr>
-            <a:r>
-              <a:rPr/>
-              <a:t>10-12 Days: Increase protein shakes</a:t>
-            </a:r>
-          </a:p>
-          <a:p>
-            <a:pPr lvl="0"/>
-            <a:r>
-              <a:rPr/>
-              <a:t>Tube feeds 3-4 cans at night</a:t>
-            </a:r>
-          </a:p>
-          <a:p>
-            <a:pPr lvl="0" indent="0" marL="0">
-              <a:buNone/>
-            </a:pPr>
-            <a:r>
-              <a:rPr/>
-              <a:t>Three weeks: Post-esophagectomy Diet</a:t>
-            </a:r>
-          </a:p>
-          <a:p>
-            <a:pPr lvl="0" indent="0" marL="0">
-              <a:buNone/>
-            </a:pPr>
-            <a:r>
-              <a:rPr/>
-              <a:t>8-12 weeks: Remove feeding tube (in office)</a:t>
+              <a:t>Goal: ready to leave day #7 after surgery</a:t>
+            </a:r>
+          </a:p>
+          <a:p>
+            <a:pPr lvl="0"/>
+            <a:r>
+              <a:rPr/>
+              <a:t>Night-time tube feedings (6pm to 10am)</a:t>
+            </a:r>
+          </a:p>
+          <a:p>
+            <a:pPr lvl="0"/>
+            <a:r>
+              <a:rPr/>
+              <a:t>Nutrition by mouth (90% of patients)</a:t>
+            </a:r>
+          </a:p>
+          <a:p>
+            <a:pPr lvl="1"/>
+            <a:r>
+              <a:rPr/>
+              <a:t>Protein shakes or water 4oz every 2 hours</a:t>
+            </a:r>
+          </a:p>
+          <a:p>
+            <a:pPr lvl="0"/>
+            <a:r>
+              <a:rPr/>
+              <a:t>Water through tube 8oz four times per day</a:t>
+            </a:r>
+          </a:p>
+          <a:p>
+            <a:pPr lvl="0"/>
+            <a:r>
+              <a:rPr/>
+              <a:t>Home care nursing (feeding tube teaching)</a:t>
+            </a:r>
+          </a:p>
+          <a:p>
+            <a:pPr lvl="0"/>
+            <a:r>
+              <a:rPr/>
+              <a:t>Home infusion (tube feeding supplies)</a:t>
             </a:r>
           </a:p>
         </p:txBody>
@@ -7771,6 +7731,131 @@
 </file>
 
 <file path=ppt/slides/slide42.xml><?xml version="1.0" encoding="utf-8"?>
+<p:sld xmlns:a="http://schemas.openxmlformats.org/drawingml/2006/main" xmlns:r="http://schemas.openxmlformats.org/officeDocument/2006/relationships" xmlns:p="http://schemas.openxmlformats.org/presentationml/2006/main">
+  <p:cSld>
+    <p:spTree>
+      <p:nvGrpSpPr>
+        <p:cNvPr id="1" name=""/>
+        <p:cNvGrpSpPr/>
+        <p:nvPr/>
+      </p:nvGrpSpPr>
+      <p:grpSpPr>
+        <a:xfrm>
+          <a:off x="0" y="0"/>
+          <a:ext cx="0" cy="0"/>
+          <a:chOff x="0" y="0"/>
+          <a:chExt cx="0" cy="0"/>
+        </a:xfrm>
+      </p:grpSpPr>
+      <p:sp>
+        <p:nvSpPr>
+          <p:cNvPr id="2" name="Title 1"/>
+          <p:cNvSpPr>
+            <a:spLocks noGrp="1"/>
+          </p:cNvSpPr>
+          <p:nvPr>
+            <p:ph type="title"/>
+          </p:nvPr>
+        </p:nvSpPr>
+        <p:spPr>
+          <a:xfrm>
+            <a:off x="284309" y="205979"/>
+            <a:ext cx="8552330" cy="662317"/>
+          </a:xfrm>
+        </p:spPr>
+        <p:txBody>
+          <a:bodyPr/>
+          <a:lstStyle/>
+          <a:p>
+            <a:pPr lvl="0" indent="0" marL="0">
+              <a:buNone/>
+            </a:pPr>
+            <a:r>
+              <a:rPr/>
+              <a:t>Nutrition after Surgery</a:t>
+            </a:r>
+          </a:p>
+        </p:txBody>
+      </p:sp>
+      <p:sp>
+        <p:nvSpPr>
+          <p:cNvPr id="3" name="Content Placeholder 2"/>
+          <p:cNvSpPr>
+            <a:spLocks noGrp="1"/>
+          </p:cNvSpPr>
+          <p:nvPr>
+            <p:ph idx="1"/>
+          </p:nvPr>
+        </p:nvSpPr>
+        <p:spPr/>
+        <p:txBody>
+          <a:bodyPr/>
+          <a:lstStyle/>
+          <a:p>
+            <a:pPr lvl="0" indent="0" marL="0">
+              <a:buNone/>
+            </a:pPr>
+            <a:r>
+              <a:rPr/>
+              <a:t>At discharge home:</a:t>
+            </a:r>
+          </a:p>
+          <a:p>
+            <a:pPr lvl="0"/>
+            <a:r>
+              <a:rPr/>
+              <a:t>Protein shakes 4oz every 2 hrs</a:t>
+            </a:r>
+          </a:p>
+          <a:p>
+            <a:pPr lvl="0"/>
+            <a:r>
+              <a:rPr/>
+              <a:t>Tube feeds 4-5 cans at night (6pm-10am)</a:t>
+            </a:r>
+          </a:p>
+          <a:p>
+            <a:pPr lvl="0" indent="0" marL="0">
+              <a:buNone/>
+            </a:pPr>
+            <a:r>
+              <a:rPr/>
+              <a:t>10-12 Days: Increase protein shakes</a:t>
+            </a:r>
+          </a:p>
+          <a:p>
+            <a:pPr lvl="0"/>
+            <a:r>
+              <a:rPr/>
+              <a:t>Tube feeds 3-4 cans at night</a:t>
+            </a:r>
+          </a:p>
+          <a:p>
+            <a:pPr lvl="0" indent="0" marL="0">
+              <a:buNone/>
+            </a:pPr>
+            <a:r>
+              <a:rPr/>
+              <a:t>Three weeks: Post-esophagectomy Diet</a:t>
+            </a:r>
+          </a:p>
+          <a:p>
+            <a:pPr lvl="0" indent="0" marL="0">
+              <a:buNone/>
+            </a:pPr>
+            <a:r>
+              <a:rPr/>
+              <a:t>8-12 weeks: Remove feeding tube (in office)</a:t>
+            </a:r>
+          </a:p>
+        </p:txBody>
+      </p:sp>
+    </p:spTree>
+  </p:cSld>
+</p:sld>
+</file>
+
+<file path=ppt/slides/slide43.xml><?xml version="1.0" encoding="utf-8"?>
 <p:sld xmlns:a="http://schemas.openxmlformats.org/drawingml/2006/main" xmlns:r="http://schemas.openxmlformats.org/officeDocument/2006/relationships" xmlns:p="http://schemas.openxmlformats.org/presentationml/2006/main">
   <p:cSld>
     <p:spTree>
@@ -7927,130 +8012,6 @@
 </p:sld>
 </file>
 
-<file path=ppt/slides/slide43.xml><?xml version="1.0" encoding="utf-8"?>
-<p:sld xmlns:a="http://schemas.openxmlformats.org/drawingml/2006/main" xmlns:r="http://schemas.openxmlformats.org/officeDocument/2006/relationships" xmlns:p="http://schemas.openxmlformats.org/presentationml/2006/main">
-  <p:cSld>
-    <p:spTree>
-      <p:nvGrpSpPr>
-        <p:cNvPr id="1" name=""/>
-        <p:cNvGrpSpPr/>
-        <p:nvPr/>
-      </p:nvGrpSpPr>
-      <p:grpSpPr>
-        <a:xfrm>
-          <a:off x="0" y="0"/>
-          <a:ext cx="0" cy="0"/>
-          <a:chOff x="0" y="0"/>
-          <a:chExt cx="0" cy="0"/>
-        </a:xfrm>
-      </p:grpSpPr>
-      <p:sp>
-        <p:nvSpPr>
-          <p:cNvPr id="2" name="Title 1"/>
-          <p:cNvSpPr>
-            <a:spLocks noGrp="1"/>
-          </p:cNvSpPr>
-          <p:nvPr>
-            <p:ph type="title"/>
-          </p:nvPr>
-        </p:nvSpPr>
-        <p:spPr>
-          <a:xfrm>
-            <a:off x="284309" y="205979"/>
-            <a:ext cx="8552330" cy="662317"/>
-          </a:xfrm>
-        </p:spPr>
-        <p:txBody>
-          <a:bodyPr/>
-          <a:lstStyle/>
-          <a:p>
-            <a:pPr lvl="0" indent="0" marL="0">
-              <a:buNone/>
-            </a:pPr>
-            <a:r>
-              <a:rPr/>
-              <a:t>Post-esophagectomy Diet</a:t>
-            </a:r>
-          </a:p>
-        </p:txBody>
-      </p:sp>
-      <p:sp>
-        <p:nvSpPr>
-          <p:cNvPr id="3" name="Content Placeholder 2"/>
-          <p:cNvSpPr>
-            <a:spLocks noGrp="1"/>
-          </p:cNvSpPr>
-          <p:nvPr>
-            <p:ph idx="1"/>
-          </p:nvPr>
-        </p:nvSpPr>
-        <p:spPr/>
-        <p:txBody>
-          <a:bodyPr/>
-          <a:lstStyle/>
-          <a:p>
-            <a:pPr lvl="0"/>
-            <a:r>
-              <a:rPr/>
-              <a:t>Soft Consistency</a:t>
-            </a:r>
-          </a:p>
-          <a:p>
-            <a:pPr lvl="0"/>
-            <a:r>
-              <a:rPr/>
-              <a:t>High Protein</a:t>
-            </a:r>
-          </a:p>
-          <a:p>
-            <a:pPr lvl="0"/>
-            <a:r>
-              <a:rPr/>
-              <a:t>Avoid sugary liquids (can cause ‘dumping’)</a:t>
-            </a:r>
-          </a:p>
-          <a:p>
-            <a:pPr lvl="0"/>
-            <a:r>
-              <a:rPr/>
-              <a:t>Avoid raw vegetables (and salads)</a:t>
-            </a:r>
-          </a:p>
-          <a:p>
-            <a:pPr lvl="0"/>
-            <a:r>
-              <a:rPr/>
-              <a:t>Eating</a:t>
-            </a:r>
-          </a:p>
-          <a:p>
-            <a:pPr lvl="1"/>
-            <a:r>
-              <a:rPr/>
-              <a:t>Small, frequent meals</a:t>
-            </a:r>
-          </a:p>
-          <a:p>
-            <a:pPr lvl="1"/>
-            <a:r>
-              <a:rPr/>
-              <a:t>Sit up for 30-45 minutes after eating</a:t>
-            </a:r>
-          </a:p>
-          <a:p>
-            <a:pPr lvl="1"/>
-            <a:r>
-              <a:rPr/>
-              <a:t>Avoid eating within 2 hours of bedtime</a:t>
-            </a:r>
-          </a:p>
-        </p:txBody>
-      </p:sp>
-    </p:spTree>
-  </p:cSld>
-</p:sld>
-</file>
-
 <file path=ppt/slides/slide44.xml><?xml version="1.0" encoding="utf-8"?>
 <p:sld xmlns:a="http://schemas.openxmlformats.org/drawingml/2006/main" xmlns:r="http://schemas.openxmlformats.org/officeDocument/2006/relationships" xmlns:p="http://schemas.openxmlformats.org/presentationml/2006/main">
   <p:cSld>
@@ -8093,7 +8054,7 @@
             </a:pPr>
             <a:r>
               <a:rPr/>
-              <a:t>Medicines at Home - Pain</a:t>
+              <a:t>Post-esophagectomy Diet</a:t>
             </a:r>
           </a:p>
         </p:txBody>
@@ -8113,58 +8074,59 @@
           <a:bodyPr/>
           <a:lstStyle/>
           <a:p>
-            <a:pPr lvl="0" indent="0" marL="0">
-              <a:buNone/>
-            </a:pPr>
-            <a:r>
-              <a:rPr/>
-              <a:t>Acetaminophen (Tylenol) 1000mg 4x/day</a:t>
-            </a:r>
-          </a:p>
-          <a:p>
-            <a:pPr lvl="0" indent="0" marL="0">
-              <a:buNone/>
-            </a:pPr>
-            <a:r>
-              <a:rPr/>
-              <a:t>Gabapentin 300mg 3 times/day</a:t>
-            </a:r>
-          </a:p>
-          <a:p>
-            <a:pPr lvl="0" indent="0" marL="0">
-              <a:buNone/>
-            </a:pPr>
-            <a:r>
-              <a:rPr/>
-              <a:t>Oxycodone</a:t>
-            </a:r>
-          </a:p>
-          <a:p>
-            <a:pPr lvl="0"/>
-            <a:r>
-              <a:rPr/>
-              <a:t>As needed in addition to Tylenol/gabapentin</a:t>
-            </a:r>
-          </a:p>
-          <a:p>
-            <a:pPr lvl="0"/>
-            <a:r>
-              <a:rPr/>
-              <a:t>Will begin reducing dose at first postop visit</a:t>
-            </a:r>
-          </a:p>
-          <a:p>
-            <a:pPr lvl="0"/>
-            <a:r>
-              <a:rPr/>
-              <a:t>Can usually discontinue by 4 weeks</a:t>
-            </a:r>
-          </a:p>
-          <a:p>
-            <a:pPr lvl="0"/>
-            <a:r>
-              <a:rPr/>
-              <a:t>NO DRIVING WHILE ON OXYCODONE</a:t>
+            <a:pPr lvl="0"/>
+            <a:r>
+              <a:rPr/>
+              <a:t>Soft Consistency</a:t>
+            </a:r>
+          </a:p>
+          <a:p>
+            <a:pPr lvl="0"/>
+            <a:r>
+              <a:rPr/>
+              <a:t>High Protein</a:t>
+            </a:r>
+          </a:p>
+          <a:p>
+            <a:pPr lvl="0"/>
+            <a:r>
+              <a:rPr/>
+              <a:t>Avoid sugary liquids (can cause ‘dumping’)</a:t>
+            </a:r>
+          </a:p>
+          <a:p>
+            <a:pPr lvl="0"/>
+            <a:r>
+              <a:rPr/>
+              <a:t>Avoid raw vegetables (and salads)</a:t>
+            </a:r>
+          </a:p>
+          <a:p>
+            <a:pPr lvl="0"/>
+            <a:r>
+              <a:rPr/>
+              <a:t>Eating</a:t>
+            </a:r>
+          </a:p>
+          <a:p>
+            <a:pPr lvl="1"/>
+            <a:r>
+              <a:rPr/>
+              <a:t>Small, frequent meals</a:t>
+            </a:r>
+          </a:p>
+          <a:p>
+            <a:pPr lvl="1"/>
+            <a:r>
+              <a:rPr/>
+              <a:t>Sit up for 30-45 minutes after eating</a:t>
+            </a:r>
+          </a:p>
+          <a:p>
+            <a:pPr lvl="1"/>
+            <a:r>
+              <a:rPr/>
+              <a:t>Avoid eating within 2 hours of bedtime</a:t>
             </a:r>
           </a:p>
         </p:txBody>
@@ -8216,7 +8178,7 @@
             </a:pPr>
             <a:r>
               <a:rPr/>
-              <a:t>Non-steroidals Anti Inflammatory (NSAID)</a:t>
+              <a:t>Medicines at Home - Pain</a:t>
             </a:r>
           </a:p>
         </p:txBody>
@@ -8241,30 +8203,53 @@
             </a:pPr>
             <a:r>
               <a:rPr/>
-              <a:t>Non-steroidal anti-inflammatories (Celebrex)</a:t>
-            </a:r>
-          </a:p>
-          <a:p>
-            <a:pPr lvl="0"/>
-            <a:r>
-              <a:rPr/>
-              <a:t>200 mg every 12 hours starting at 2 weeks</a:t>
-            </a:r>
-          </a:p>
-          <a:p>
-            <a:pPr lvl="0" indent="0" marL="0">
-              <a:buNone/>
-            </a:pPr>
-            <a:r>
-              <a:rPr/>
-              <a:t>NO GOODY POWDERS OR BCs</a:t>
-            </a:r>
-          </a:p>
-          <a:p>
-            <a:pPr lvl="0"/>
-            <a:r>
-              <a:rPr/>
-              <a:t>(Can cause permanent scarring at the surgery site)</a:t>
+              <a:t>Acetaminophen (Tylenol) 1000mg 4x/day</a:t>
+            </a:r>
+          </a:p>
+          <a:p>
+            <a:pPr lvl="0" indent="0" marL="0">
+              <a:buNone/>
+            </a:pPr>
+            <a:r>
+              <a:rPr/>
+              <a:t>Gabapentin 300mg 3 times/day</a:t>
+            </a:r>
+          </a:p>
+          <a:p>
+            <a:pPr lvl="0" indent="0" marL="0">
+              <a:buNone/>
+            </a:pPr>
+            <a:r>
+              <a:rPr/>
+              <a:t>Oxycodone</a:t>
+            </a:r>
+          </a:p>
+          <a:p>
+            <a:pPr lvl="0"/>
+            <a:r>
+              <a:rPr/>
+              <a:t>As needed in addition to Tylenol/gabapentin</a:t>
+            </a:r>
+          </a:p>
+          <a:p>
+            <a:pPr lvl="0"/>
+            <a:r>
+              <a:rPr/>
+              <a:t>Will begin reducing dose at first postop visit</a:t>
+            </a:r>
+          </a:p>
+          <a:p>
+            <a:pPr lvl="0"/>
+            <a:r>
+              <a:rPr/>
+              <a:t>Can usually discontinue by 4 weeks</a:t>
+            </a:r>
+          </a:p>
+          <a:p>
+            <a:pPr lvl="0"/>
+            <a:r>
+              <a:rPr/>
+              <a:t>NO DRIVING WHILE ON OXYCODONE</a:t>
             </a:r>
           </a:p>
         </p:txBody>
@@ -8316,7 +8301,7 @@
             </a:pPr>
             <a:r>
               <a:rPr/>
-              <a:t>Acid Blockers = Proton Pump Inhibitors</a:t>
+              <a:t>Non-steroidals Anti Inflammatory (NSAID)</a:t>
             </a:r>
           </a:p>
         </p:txBody>
@@ -8341,28 +8326,30 @@
             </a:pPr>
             <a:r>
               <a:rPr/>
-              <a:t>Examples include ompeprazole and pantoprazole</a:t>
-            </a:r>
-          </a:p>
-          <a:p>
-            <a:pPr lvl="0"/>
-            <a:r>
-              <a:rPr/>
-              <a:t>Will stay on for at 1-2 years to prevent acid reflux</a:t>
-            </a:r>
-          </a:p>
-          <a:p>
-            <a:pPr lvl="0"/>
-            <a:r>
-              <a:rPr/>
-              <a:t>Important in preventing scarring at anastomosis (new connection between esophagus and stomach)</a:t>
-            </a:r>
-          </a:p>
-          <a:p>
-            <a:pPr lvl="0"/>
-            <a:r>
-              <a:rPr/>
-              <a:t>To administer through feeding tube, open capsule and resuspend beads in 60mL (2oz) of water</a:t>
+              <a:t>Non-steroidal anti-inflammatories (Celebrex)</a:t>
+            </a:r>
+          </a:p>
+          <a:p>
+            <a:pPr lvl="0"/>
+            <a:r>
+              <a:rPr/>
+              <a:t>200 mg every 12 hours starting at 2 weeks</a:t>
+            </a:r>
+          </a:p>
+          <a:p>
+            <a:pPr lvl="0" indent="0" marL="0">
+              <a:buNone/>
+            </a:pPr>
+            <a:r>
+              <a:rPr/>
+              <a:t>NO GOODY POWDERS OR BCs</a:t>
+            </a:r>
+          </a:p>
+          <a:p>
+            <a:pPr lvl="0"/>
+            <a:r>
+              <a:rPr/>
+              <a:t>(Can cause permanent scarring at the surgery site)</a:t>
             </a:r>
           </a:p>
         </p:txBody>
@@ -8414,7 +8401,7 @@
             </a:pPr>
             <a:r>
               <a:rPr/>
-              <a:t>Medicines at Home</a:t>
+              <a:t>Acid Blockers = Proton Pump Inhibitors</a:t>
             </a:r>
           </a:p>
         </p:txBody>
@@ -8439,51 +8426,28 @@
             </a:pPr>
             <a:r>
               <a:rPr/>
-              <a:t>Reglan – Helps stomach empty</a:t>
-            </a:r>
-          </a:p>
-          <a:p>
-            <a:pPr lvl="0"/>
-            <a:r>
-              <a:rPr/>
-              <a:t>Will plan to stop after six weeks</a:t>
-            </a:r>
-          </a:p>
-          <a:p>
-            <a:pPr lvl="0"/>
-            <a:r>
-              <a:rPr/>
-              <a:t>0.1% risk of tardive dyskinesia (nervous tic)</a:t>
-            </a:r>
-          </a:p>
-          <a:p>
-            <a:pPr lvl="0" indent="0" marL="0">
-              <a:buNone/>
-            </a:pPr>
-            <a:r>
-              <a:rPr/>
-              <a:t>Remeron – Helps improve appetite</a:t>
-            </a:r>
-          </a:p>
-          <a:p>
-            <a:pPr lvl="0"/>
-            <a:r>
-              <a:rPr/>
-              <a:t>Can cause vivid dreams</a:t>
-            </a:r>
-          </a:p>
-          <a:p>
-            <a:pPr lvl="0"/>
-            <a:r>
-              <a:rPr/>
-              <a:t>Used for several weeks after surgery</a:t>
-            </a:r>
-          </a:p>
-          <a:p>
-            <a:pPr lvl="0"/>
-            <a:r>
-              <a:rPr/>
-              <a:t>Will stop within first three months of surgery</a:t>
+              <a:t>Examples include ompeprazole and pantoprazole</a:t>
+            </a:r>
+          </a:p>
+          <a:p>
+            <a:pPr lvl="0"/>
+            <a:r>
+              <a:rPr/>
+              <a:t>Will stay on for at 1-2 years to prevent acid reflux</a:t>
+            </a:r>
+          </a:p>
+          <a:p>
+            <a:pPr lvl="0"/>
+            <a:r>
+              <a:rPr/>
+              <a:t>Important in preventing scarring at anastomosis (new connection between esophagus and stomach)</a:t>
+            </a:r>
+          </a:p>
+          <a:p>
+            <a:pPr lvl="0"/>
+            <a:r>
+              <a:rPr/>
+              <a:t>To administer through feeding tube, open capsule and resuspend beads in 60mL (2oz) of water</a:t>
             </a:r>
           </a:p>
         </p:txBody>
@@ -8494,6 +8458,127 @@
 </file>
 
 <file path=ppt/slides/slide48.xml><?xml version="1.0" encoding="utf-8"?>
+<p:sld xmlns:a="http://schemas.openxmlformats.org/drawingml/2006/main" xmlns:r="http://schemas.openxmlformats.org/officeDocument/2006/relationships" xmlns:p="http://schemas.openxmlformats.org/presentationml/2006/main">
+  <p:cSld>
+    <p:spTree>
+      <p:nvGrpSpPr>
+        <p:cNvPr id="1" name=""/>
+        <p:cNvGrpSpPr/>
+        <p:nvPr/>
+      </p:nvGrpSpPr>
+      <p:grpSpPr>
+        <a:xfrm>
+          <a:off x="0" y="0"/>
+          <a:ext cx="0" cy="0"/>
+          <a:chOff x="0" y="0"/>
+          <a:chExt cx="0" cy="0"/>
+        </a:xfrm>
+      </p:grpSpPr>
+      <p:sp>
+        <p:nvSpPr>
+          <p:cNvPr id="2" name="Title 1"/>
+          <p:cNvSpPr>
+            <a:spLocks noGrp="1"/>
+          </p:cNvSpPr>
+          <p:nvPr>
+            <p:ph type="title"/>
+          </p:nvPr>
+        </p:nvSpPr>
+        <p:spPr>
+          <a:xfrm>
+            <a:off x="284309" y="205979"/>
+            <a:ext cx="8552330" cy="662317"/>
+          </a:xfrm>
+        </p:spPr>
+        <p:txBody>
+          <a:bodyPr/>
+          <a:lstStyle/>
+          <a:p>
+            <a:pPr lvl="0" indent="0" marL="0">
+              <a:buNone/>
+            </a:pPr>
+            <a:r>
+              <a:rPr/>
+              <a:t>Medicines at Home</a:t>
+            </a:r>
+          </a:p>
+        </p:txBody>
+      </p:sp>
+      <p:sp>
+        <p:nvSpPr>
+          <p:cNvPr id="3" name="Content Placeholder 2"/>
+          <p:cNvSpPr>
+            <a:spLocks noGrp="1"/>
+          </p:cNvSpPr>
+          <p:nvPr>
+            <p:ph idx="1"/>
+          </p:nvPr>
+        </p:nvSpPr>
+        <p:spPr/>
+        <p:txBody>
+          <a:bodyPr/>
+          <a:lstStyle/>
+          <a:p>
+            <a:pPr lvl="0" indent="0" marL="0">
+              <a:buNone/>
+            </a:pPr>
+            <a:r>
+              <a:rPr/>
+              <a:t>Reglan – Helps stomach empty</a:t>
+            </a:r>
+          </a:p>
+          <a:p>
+            <a:pPr lvl="0"/>
+            <a:r>
+              <a:rPr/>
+              <a:t>Will plan to stop after six weeks</a:t>
+            </a:r>
+          </a:p>
+          <a:p>
+            <a:pPr lvl="0"/>
+            <a:r>
+              <a:rPr/>
+              <a:t>0.1% risk of tardive dyskinesia (nervous tic)</a:t>
+            </a:r>
+          </a:p>
+          <a:p>
+            <a:pPr lvl="0" indent="0" marL="0">
+              <a:buNone/>
+            </a:pPr>
+            <a:r>
+              <a:rPr/>
+              <a:t>Remeron – Helps improve appetite</a:t>
+            </a:r>
+          </a:p>
+          <a:p>
+            <a:pPr lvl="0"/>
+            <a:r>
+              <a:rPr/>
+              <a:t>Can cause vivid dreams</a:t>
+            </a:r>
+          </a:p>
+          <a:p>
+            <a:pPr lvl="0"/>
+            <a:r>
+              <a:rPr/>
+              <a:t>Used for several weeks after surgery</a:t>
+            </a:r>
+          </a:p>
+          <a:p>
+            <a:pPr lvl="0"/>
+            <a:r>
+              <a:rPr/>
+              <a:t>Will stop within first three months of surgery</a:t>
+            </a:r>
+          </a:p>
+        </p:txBody>
+      </p:sp>
+    </p:spTree>
+  </p:cSld>
+</p:sld>
+</file>
+
+<file path=ppt/slides/slide49.xml><?xml version="1.0" encoding="utf-8"?>
 <p:sld xmlns:a="http://schemas.openxmlformats.org/drawingml/2006/main" xmlns:r="http://schemas.openxmlformats.org/officeDocument/2006/relationships" xmlns:p="http://schemas.openxmlformats.org/presentationml/2006/main">
   <p:cSld>
     <p:spTree>
@@ -8622,131 +8707,6 @@
 </p:sld>
 </file>
 
-<file path=ppt/slides/slide49.xml><?xml version="1.0" encoding="utf-8"?>
-<p:sld xmlns:a="http://schemas.openxmlformats.org/drawingml/2006/main" xmlns:r="http://schemas.openxmlformats.org/officeDocument/2006/relationships" xmlns:p="http://schemas.openxmlformats.org/presentationml/2006/main">
-  <p:cSld>
-    <p:spTree>
-      <p:nvGrpSpPr>
-        <p:cNvPr id="1" name=""/>
-        <p:cNvGrpSpPr/>
-        <p:nvPr/>
-      </p:nvGrpSpPr>
-      <p:grpSpPr>
-        <a:xfrm>
-          <a:off x="0" y="0"/>
-          <a:ext cx="0" cy="0"/>
-          <a:chOff x="0" y="0"/>
-          <a:chExt cx="0" cy="0"/>
-        </a:xfrm>
-      </p:grpSpPr>
-      <p:sp>
-        <p:nvSpPr>
-          <p:cNvPr id="2" name="Title 1"/>
-          <p:cNvSpPr>
-            <a:spLocks noGrp="1"/>
-          </p:cNvSpPr>
-          <p:nvPr>
-            <p:ph type="title"/>
-          </p:nvPr>
-        </p:nvSpPr>
-        <p:spPr>
-          <a:xfrm>
-            <a:off x="315045" y="205979"/>
-            <a:ext cx="8529278" cy="857250"/>
-          </a:xfrm>
-        </p:spPr>
-        <p:txBody>
-          <a:bodyPr/>
-          <a:lstStyle/>
-          <a:p>
-            <a:pPr lvl="0" indent="0" marL="0">
-              <a:buNone/>
-            </a:pPr>
-            <a:r>
-              <a:rPr/>
-              <a:t>Sleeping at Home</a:t>
-            </a:r>
-          </a:p>
-        </p:txBody>
-      </p:sp>
-      <p:sp>
-        <p:nvSpPr>
-          <p:cNvPr id="3" name="Content Placeholder 2"/>
-          <p:cNvSpPr>
-            <a:spLocks noGrp="1"/>
-          </p:cNvSpPr>
-          <p:nvPr>
-            <p:ph idx="1" sz="half"/>
-          </p:nvPr>
-        </p:nvSpPr>
-        <p:spPr/>
-        <p:txBody>
-          <a:bodyPr/>
-          <a:lstStyle/>
-          <a:p>
-            <a:pPr lvl="0" indent="0" marL="0">
-              <a:buNone/>
-            </a:pPr>
-            <a:r>
-              <a:rPr/>
-              <a:t>Reflux can occur the first few weeks/months after surgery</a:t>
-            </a:r>
-          </a:p>
-          <a:p>
-            <a:pPr lvl="0" indent="0" marL="0">
-              <a:buNone/>
-            </a:pPr>
-            <a:r>
-              <a:rPr/>
-              <a:t>This improves over the first few months</a:t>
-            </a:r>
-          </a:p>
-          <a:p>
-            <a:pPr lvl="0" indent="0" marL="0">
-              <a:buNone/>
-            </a:pPr>
-            <a:r>
-              <a:rPr/>
-              <a:t>A wedge pillow can be helpful for sleep</a:t>
-            </a:r>
-          </a:p>
-        </p:txBody>
-      </p:sp>
-      <p:pic>
-        <p:nvPicPr>
-          <p:cNvPr descr="images/wedge_pillow_comm.jpg" id="0" name="Picture 1"/>
-          <p:cNvPicPr>
-            <a:picLocks noGrp="1" noChangeAspect="1"/>
-          </p:cNvPicPr>
-          <p:nvPr/>
-        </p:nvPicPr>
-        <p:blipFill>
-          <a:blip r:embed="rId2"/>
-          <a:stretch>
-            <a:fillRect/>
-          </a:stretch>
-        </p:blipFill>
-        <p:spPr bwMode="auto">
-          <a:xfrm>
-            <a:off x="4864100" y="1193800"/>
-            <a:ext cx="3733800" cy="3733800"/>
-          </a:xfrm>
-          <a:prstGeom prst="rect">
-            <a:avLst/>
-          </a:prstGeom>
-          <a:noFill/>
-          <a:ln w="9525">
-            <a:noFill/>
-            <a:headEnd/>
-            <a:tailEnd/>
-          </a:ln>
-        </p:spPr>
-      </p:pic>
-    </p:spTree>
-  </p:cSld>
-</p:sld>
-</file>
-
 <file path=ppt/slides/slide5.xml><?xml version="1.0" encoding="utf-8"?>
 <p:sld xmlns:a="http://schemas.openxmlformats.org/drawingml/2006/main" xmlns:r="http://schemas.openxmlformats.org/officeDocument/2006/relationships" xmlns:p="http://schemas.openxmlformats.org/presentationml/2006/main">
   <p:cSld>
@@ -8874,20 +8834,20 @@
         </p:nvSpPr>
         <p:spPr>
           <a:xfrm>
-            <a:off x="284309" y="205979"/>
-            <a:ext cx="8552330" cy="662317"/>
-          </a:xfrm>
-        </p:spPr>
-        <p:txBody>
-          <a:bodyPr/>
-          <a:lstStyle/>
-          <a:p>
-            <a:pPr lvl="0" indent="0" marL="0">
-              <a:buNone/>
-            </a:pPr>
-            <a:r>
-              <a:rPr/>
-              <a:t>Postoperative Visit at 7-10 Days</a:t>
+            <a:off x="315045" y="205979"/>
+            <a:ext cx="8529278" cy="857250"/>
+          </a:xfrm>
+        </p:spPr>
+        <p:txBody>
+          <a:bodyPr/>
+          <a:lstStyle/>
+          <a:p>
+            <a:pPr lvl="0" indent="0" marL="0">
+              <a:buNone/>
+            </a:pPr>
+            <a:r>
+              <a:rPr/>
+              <a:t>Sleeping at Home</a:t>
             </a:r>
           </a:p>
         </p:txBody>
@@ -8899,7 +8859,7 @@
             <a:spLocks noGrp="1"/>
           </p:cNvSpPr>
           <p:nvPr>
-            <p:ph idx="1"/>
+            <p:ph idx="1" sz="half"/>
           </p:nvPr>
         </p:nvSpPr>
         <p:spPr/>
@@ -8912,59 +8872,59 @@
             </a:pPr>
             <a:r>
               <a:rPr/>
-              <a:t>Check surgical site</a:t>
-            </a:r>
-          </a:p>
-          <a:p>
-            <a:pPr lvl="0"/>
-            <a:r>
-              <a:rPr/>
-              <a:t>Remove staples (if needed)</a:t>
-            </a:r>
-          </a:p>
-          <a:p>
-            <a:pPr lvl="0" indent="0" marL="0">
-              <a:buNone/>
-            </a:pPr>
-            <a:r>
-              <a:rPr/>
-              <a:t>Adjust medicines as needed</a:t>
-            </a:r>
-          </a:p>
-          <a:p>
-            <a:pPr lvl="0"/>
-            <a:r>
-              <a:rPr/>
-              <a:t>Insulin (for diabetic patients on insulin)</a:t>
-            </a:r>
-          </a:p>
-          <a:p>
-            <a:pPr lvl="0"/>
-            <a:r>
-              <a:rPr/>
-              <a:t>Reduce beta blocker medicines</a:t>
-            </a:r>
-          </a:p>
-          <a:p>
-            <a:pPr lvl="0" indent="0" marL="0">
-              <a:buNone/>
-            </a:pPr>
-            <a:r>
-              <a:rPr/>
-              <a:t>Advance diet</a:t>
-            </a:r>
-          </a:p>
-          <a:p>
-            <a:pPr lvl="0" indent="0" marL="0">
-              <a:buNone/>
-            </a:pPr>
-            <a:r>
-              <a:rPr/>
-              <a:t>Reduce tube feeds</a:t>
-            </a:r>
-          </a:p>
-        </p:txBody>
-      </p:sp>
+              <a:t>Reflux can occur the first few weeks/months after surgery</a:t>
+            </a:r>
+          </a:p>
+          <a:p>
+            <a:pPr lvl="0" indent="0" marL="0">
+              <a:buNone/>
+            </a:pPr>
+            <a:r>
+              <a:rPr/>
+              <a:t>This improves over the first few months</a:t>
+            </a:r>
+          </a:p>
+          <a:p>
+            <a:pPr lvl="0" indent="0" marL="0">
+              <a:buNone/>
+            </a:pPr>
+            <a:r>
+              <a:rPr/>
+              <a:t>A wedge pillow can be helpful for sleep</a:t>
+            </a:r>
+          </a:p>
+        </p:txBody>
+      </p:sp>
+      <p:pic>
+        <p:nvPicPr>
+          <p:cNvPr descr="images/wedge_pillow_comm.jpg" id="0" name="Picture 1"/>
+          <p:cNvPicPr>
+            <a:picLocks noGrp="1" noChangeAspect="1"/>
+          </p:cNvPicPr>
+          <p:nvPr/>
+        </p:nvPicPr>
+        <p:blipFill>
+          <a:blip r:embed="rId2"/>
+          <a:stretch>
+            <a:fillRect/>
+          </a:stretch>
+        </p:blipFill>
+        <p:spPr bwMode="auto">
+          <a:xfrm>
+            <a:off x="4864100" y="1193800"/>
+            <a:ext cx="3733800" cy="3733800"/>
+          </a:xfrm>
+          <a:prstGeom prst="rect">
+            <a:avLst/>
+          </a:prstGeom>
+          <a:noFill/>
+          <a:ln w="9525">
+            <a:noFill/>
+            <a:headEnd/>
+            <a:tailEnd/>
+          </a:ln>
+        </p:spPr>
+      </p:pic>
     </p:spTree>
   </p:cSld>
 </p:sld>
@@ -9012,7 +8972,7 @@
             </a:pPr>
             <a:r>
               <a:rPr/>
-              <a:t>After surgery</a:t>
+              <a:t>Follow Up Clinic Visit 7-10 days after Discharge</a:t>
             </a:r>
           </a:p>
         </p:txBody>
@@ -9037,37 +8997,51 @@
             </a:pPr>
             <a:r>
               <a:rPr/>
-              <a:t>Wean off medicines added after surgery</a:t>
-            </a:r>
-          </a:p>
-          <a:p>
-            <a:pPr lvl="0"/>
-            <a:r>
-              <a:rPr/>
-              <a:t>Pain medicines</a:t>
-            </a:r>
-          </a:p>
-          <a:p>
-            <a:pPr lvl="0"/>
-            <a:r>
-              <a:rPr/>
-              <a:t>Beta-blockers</a:t>
-            </a:r>
-          </a:p>
-          <a:p>
-            <a:pPr lvl="0"/>
-            <a:r>
-              <a:rPr/>
-              <a:t>Reglan and Remeron</a:t>
-            </a:r>
-          </a:p>
-          <a:p>
-            <a:pPr lvl="0" indent="0" marL="0">
-              <a:buNone/>
-            </a:pPr>
-            <a:r>
-              <a:rPr/>
-              <a:t>Continue acid blockers for at least 1 year</a:t>
+              <a:t>In-person clinic visit with Dr Salo or Kate Duncan</a:t>
+            </a:r>
+          </a:p>
+          <a:p>
+            <a:pPr lvl="0"/>
+            <a:r>
+              <a:rPr/>
+              <a:t>Check surgical site</a:t>
+            </a:r>
+          </a:p>
+          <a:p>
+            <a:pPr lvl="0"/>
+            <a:r>
+              <a:rPr/>
+              <a:t>Remove staples (if needed)</a:t>
+            </a:r>
+          </a:p>
+          <a:p>
+            <a:pPr lvl="0"/>
+            <a:r>
+              <a:rPr/>
+              <a:t>Remove abdominal drains (if needed)</a:t>
+            </a:r>
+          </a:p>
+          <a:p>
+            <a:pPr lvl="0" indent="0" marL="0">
+              <a:buNone/>
+            </a:pPr>
+            <a:r>
+              <a:rPr/>
+              <a:t>Meet with dietitian:</a:t>
+            </a:r>
+          </a:p>
+          <a:p>
+            <a:pPr lvl="0"/>
+            <a:r>
+              <a:rPr/>
+              <a:t>Reduce tube feeds</a:t>
+            </a:r>
+          </a:p>
+          <a:p>
+            <a:pPr lvl="0"/>
+            <a:r>
+              <a:rPr/>
+              <a:t>Advance diet by mouth</a:t>
             </a:r>
           </a:p>
         </p:txBody>
@@ -9119,54 +9093,86 @@
             </a:pPr>
             <a:r>
               <a:rPr/>
-              <a:t>Jejunostomy Removal</a:t>
-            </a:r>
-          </a:p>
-        </p:txBody>
-      </p:sp>
-      <p:sp>
-        <p:nvSpPr>
-          <p:cNvPr id="3" name="Content Placeholder 2"/>
-          <p:cNvSpPr>
-            <a:spLocks noGrp="1"/>
-          </p:cNvSpPr>
-          <p:nvPr>
-            <p:ph idx="1"/>
-          </p:nvPr>
-        </p:nvSpPr>
-        <p:spPr/>
-        <p:txBody>
-          <a:bodyPr/>
-          <a:lstStyle/>
-          <a:p>
-            <a:pPr lvl="0" indent="0" marL="0">
-              <a:buNone/>
-            </a:pPr>
-            <a:r>
-              <a:rPr/>
-              <a:t>Jejunostomy tube is removed in the office once you can take in enough nutrients by mouth</a:t>
-            </a:r>
-          </a:p>
-          <a:p>
-            <a:pPr lvl="0" indent="0" marL="0">
-              <a:buNone/>
-            </a:pPr>
-            <a:r>
-              <a:rPr/>
-              <a:t>Removal usually around 8 weeks after surgery</a:t>
-            </a:r>
-          </a:p>
-          <a:p>
-            <a:pPr lvl="0" indent="0" marL="0">
-              <a:buNone/>
-            </a:pPr>
-            <a:r>
-              <a:rPr/>
-              <a:t>May take 30 minutes and some local anesthetic to loosen up the tube for removal.</a:t>
-            </a:r>
-          </a:p>
-        </p:txBody>
-      </p:sp>
+              <a:t>Adjust Medicines after Surgery</a:t>
+            </a:r>
+          </a:p>
+        </p:txBody>
+      </p:sp>
+      <mc:AlternateContent xmlns:mc="http://schemas.openxmlformats.org/markup-compatibility/2006">
+        <mc:Choice xmlns:a14="http://schemas.microsoft.com/office/drawing/2010/main" Requires="a14">
+          <p:sp>
+            <p:nvSpPr>
+              <p:cNvPr id="3" name="Content Placeholder 2"/>
+              <p:cNvSpPr>
+                <a:spLocks noGrp="1"/>
+              </p:cNvSpPr>
+              <p:nvPr>
+                <p:ph idx="1"/>
+              </p:nvPr>
+            </p:nvSpPr>
+            <p:spPr/>
+            <p:txBody>
+              <a:bodyPr/>
+              <a:lstStyle/>
+              <a:p>
+                <a:pPr lvl="0" indent="0" marL="0">
+                  <a:buNone/>
+                </a:pPr>
+                <a:r>
+                  <a:rPr/>
+                  <a:t>Reglan: Discontinue 6 weeks after surgery Remeron: Discontinue 12 weeks after surgery Pain Medicines:</a:t>
+                </a:r>
+              </a:p>
+              <a:p>
+                <a:pPr lvl="0"/>
+                <a:r>
+                  <a:rPr/>
+                  <a:t>Wean oxycodone within 6 weeks of surgery</a:t>
+                </a:r>
+              </a:p>
+              <a:p>
+                <a:pPr lvl="0"/>
+                <a:r>
+                  <a:rPr/>
+                  <a:t>Discontinue gabapentin and acetaminophen (Tylenol) within 8 weeks</a:t>
+                </a:r>
+              </a:p>
+              <a:p>
+                <a:pPr lvl="0" indent="0" marL="0">
+                  <a:buNone/>
+                </a:pPr>
+                <a:r>
+                  <a:rPr/>
+                  <a:t>Continue acid blockers (PPI) for at least 1 year</a:t>
+                </a:r>
+              </a:p>
+              <a:p>
+                <a:pPr lvl="0" indent="0" marL="0">
+                  <a:buNone/>
+                </a:pPr>
+                <a:r>
+                  <a:rPr/>
+                  <a:t>Reduce metoprolol to once/day for 7 dayus </a:t>
+                </a:r>
+                <a14:m>
+                  <m:oMath xmlns:m="http://schemas.openxmlformats.org/officeDocument/2006/math">
+                    <m:r>
+                      <m:rPr>
+                        <m:sty m:val="p"/>
+                      </m:rPr>
+                      <m:t>→</m:t>
+                    </m:r>
+                  </m:oMath>
+                </a14:m>
+                <a:r>
+                  <a:rPr/>
+                  <a:t> discontinue</a:t>
+                </a:r>
+              </a:p>
+            </p:txBody>
+          </p:sp>
+        </mc:Choice>
+      </mc:AlternateContent>
     </p:spTree>
   </p:cSld>
 </p:sld>
@@ -9214,7 +9220,7 @@
             </a:pPr>
             <a:r>
               <a:rPr/>
-              <a:t>Nutritional Monitoring after Surgery</a:t>
+              <a:t>Jejunostomy Removal</a:t>
             </a:r>
           </a:p>
         </p:txBody>
@@ -9239,28 +9245,25 @@
             </a:pPr>
             <a:r>
               <a:rPr/>
-              <a:t>You may have difficulty absorbing some nutrients:</a:t>
-            </a:r>
-          </a:p>
-          <a:p>
-            <a:pPr lvl="0"/>
-            <a:r>
-              <a:rPr/>
-              <a:t>Iron</a:t>
-            </a:r>
-          </a:p>
-          <a:p>
-            <a:pPr lvl="0"/>
-            <a:r>
-              <a:rPr/>
-              <a:t>Vitamin B12</a:t>
-            </a:r>
-          </a:p>
-          <a:p>
-            <a:pPr lvl="0"/>
-            <a:r>
-              <a:rPr/>
-              <a:t>Vitamin D</a:t>
+              <a:t>Jejunostomy tube is removed in the office once you can take in enough nutrients by mouth</a:t>
+            </a:r>
+          </a:p>
+          <a:p>
+            <a:pPr lvl="0" indent="0" marL="0">
+              <a:buNone/>
+            </a:pPr>
+            <a:r>
+              <a:rPr/>
+              <a:t>Removal usually around 8 weeks after surgery</a:t>
+            </a:r>
+          </a:p>
+          <a:p>
+            <a:pPr lvl="0" indent="0" marL="0">
+              <a:buNone/>
+            </a:pPr>
+            <a:r>
+              <a:rPr/>
+              <a:t>May take 5 minutes and some local anesthetic to loosen up the tube for removal.</a:t>
             </a:r>
           </a:p>
         </p:txBody>
@@ -9337,14 +9340,14 @@
             </a:pPr>
             <a:r>
               <a:rPr/>
-              <a:t>About 3 months after the jejunostomy tube is removed, we will check blood levels:</a:t>
-            </a:r>
-          </a:p>
-          <a:p>
-            <a:pPr lvl="0"/>
-            <a:r>
-              <a:rPr/>
-              <a:t>Iron (ferritin)</a:t>
+              <a:t>You may have difficulty absorbing some nutrients:</a:t>
+            </a:r>
+          </a:p>
+          <a:p>
+            <a:pPr lvl="0"/>
+            <a:r>
+              <a:rPr/>
+              <a:t>Iron</a:t>
             </a:r>
           </a:p>
           <a:p>
@@ -9410,7 +9413,7 @@
             </a:pPr>
             <a:r>
               <a:rPr/>
-              <a:t>Nutritional Replacements after Surgery</a:t>
+              <a:t>Nutritional Monitoring after Surgery</a:t>
             </a:r>
           </a:p>
         </p:txBody>
@@ -9435,51 +9438,28 @@
             </a:pPr>
             <a:r>
               <a:rPr/>
-              <a:t>Vitamin or iron replacements can be ordered by:</a:t>
-            </a:r>
-          </a:p>
-          <a:p>
-            <a:pPr lvl="0"/>
-            <a:r>
-              <a:rPr/>
-              <a:t>Primary Care Provider (PCP)</a:t>
-            </a:r>
-          </a:p>
-          <a:p>
-            <a:pPr lvl="0"/>
-            <a:r>
-              <a:rPr/>
-              <a:t>Medical Oncologist</a:t>
-            </a:r>
-          </a:p>
-          <a:p>
-            <a:pPr lvl="0"/>
-            <a:r>
-              <a:rPr/>
-              <a:t>Surgeon</a:t>
-            </a:r>
-          </a:p>
-          <a:p>
-            <a:pPr lvl="0" indent="0" marL="0">
-              <a:buNone/>
-            </a:pPr>
-            <a:r>
-              <a:rPr/>
-              <a:t>If levels are low</a:t>
-            </a:r>
-          </a:p>
-          <a:p>
-            <a:pPr lvl="0"/>
-            <a:r>
-              <a:rPr/>
-              <a:t>Replacement</a:t>
-            </a:r>
-          </a:p>
-          <a:p>
-            <a:pPr lvl="0"/>
-            <a:r>
-              <a:rPr/>
-              <a:t>Repeat testing in 3-6 months</a:t>
+              <a:t>About 3 months after the jejunostomy tube is removed, we will check blood levels:</a:t>
+            </a:r>
+          </a:p>
+          <a:p>
+            <a:pPr lvl="0"/>
+            <a:r>
+              <a:rPr/>
+              <a:t>Iron (ferritin)</a:t>
+            </a:r>
+          </a:p>
+          <a:p>
+            <a:pPr lvl="0"/>
+            <a:r>
+              <a:rPr/>
+              <a:t>Vitamin B12</a:t>
+            </a:r>
+          </a:p>
+          <a:p>
+            <a:pPr lvl="0"/>
+            <a:r>
+              <a:rPr/>
+              <a:t>Vitamin D</a:t>
             </a:r>
           </a:p>
         </p:txBody>
@@ -9531,7 +9511,7 @@
             </a:pPr>
             <a:r>
               <a:rPr/>
-              <a:t>Team Members - Physicians</a:t>
+              <a:t>Nutritional Replacements after Surgery</a:t>
             </a:r>
           </a:p>
         </p:txBody>
@@ -9556,64 +9536,51 @@
             </a:pPr>
             <a:r>
               <a:rPr/>
-              <a:t>Primary Care Provider</a:t>
-            </a:r>
-          </a:p>
-          <a:p>
-            <a:pPr lvl="0" indent="0" marL="0">
-              <a:buNone/>
-            </a:pPr>
-            <a:r>
-              <a:rPr/>
-              <a:t>Gastroenterologist</a:t>
-            </a:r>
-          </a:p>
-          <a:p>
-            <a:pPr lvl="0" indent="0" marL="0">
-              <a:buNone/>
-            </a:pPr>
-            <a:r>
-              <a:rPr/>
-              <a:t>Medical Oncologist (chemotherapy)</a:t>
-            </a:r>
-          </a:p>
-          <a:p>
-            <a:pPr lvl="0" indent="0" marL="0">
-              <a:buNone/>
-            </a:pPr>
-            <a:r>
-              <a:rPr/>
-              <a:t>Radiation Oncologist (radiation)</a:t>
-            </a:r>
-          </a:p>
-          <a:p>
-            <a:pPr lvl="0" indent="0" marL="0">
-              <a:buNone/>
-            </a:pPr>
-            <a:r>
-              <a:rPr/>
-              <a:t>Surgeons</a:t>
-            </a:r>
-          </a:p>
-          <a:p>
-            <a:pPr lvl="0"/>
-            <a:r>
-              <a:rPr/>
-              <a:t>Jonathan Salo MD</a:t>
-            </a:r>
-          </a:p>
-          <a:p>
-            <a:pPr lvl="0"/>
-            <a:r>
-              <a:rPr/>
-              <a:t>Kelli Salter MD</a:t>
-            </a:r>
-          </a:p>
-          <a:p>
-            <a:pPr lvl="0"/>
-            <a:r>
-              <a:rPr/>
-              <a:t>Michael Roach MD</a:t>
+              <a:t>Vitamin or iron replacements can be ordered by:</a:t>
+            </a:r>
+          </a:p>
+          <a:p>
+            <a:pPr lvl="0"/>
+            <a:r>
+              <a:rPr/>
+              <a:t>Primary Care Provider (PCP)</a:t>
+            </a:r>
+          </a:p>
+          <a:p>
+            <a:pPr lvl="0"/>
+            <a:r>
+              <a:rPr/>
+              <a:t>Medical Oncologist</a:t>
+            </a:r>
+          </a:p>
+          <a:p>
+            <a:pPr lvl="0"/>
+            <a:r>
+              <a:rPr/>
+              <a:t>Surgeon</a:t>
+            </a:r>
+          </a:p>
+          <a:p>
+            <a:pPr lvl="0" indent="0" marL="0">
+              <a:buNone/>
+            </a:pPr>
+            <a:r>
+              <a:rPr/>
+              <a:t>If levels are low</a:t>
+            </a:r>
+          </a:p>
+          <a:p>
+            <a:pPr lvl="0"/>
+            <a:r>
+              <a:rPr/>
+              <a:t>Replacement</a:t>
+            </a:r>
+          </a:p>
+          <a:p>
+            <a:pPr lvl="0"/>
+            <a:r>
+              <a:rPr/>
+              <a:t>Repeat testing in 3-6 months</a:t>
             </a:r>
           </a:p>
         </p:txBody>
@@ -9665,6 +9632,140 @@
             </a:pPr>
             <a:r>
               <a:rPr/>
+              <a:t>Team Members - Physicians</a:t>
+            </a:r>
+          </a:p>
+        </p:txBody>
+      </p:sp>
+      <p:sp>
+        <p:nvSpPr>
+          <p:cNvPr id="3" name="Content Placeholder 2"/>
+          <p:cNvSpPr>
+            <a:spLocks noGrp="1"/>
+          </p:cNvSpPr>
+          <p:nvPr>
+            <p:ph idx="1"/>
+          </p:nvPr>
+        </p:nvSpPr>
+        <p:spPr/>
+        <p:txBody>
+          <a:bodyPr/>
+          <a:lstStyle/>
+          <a:p>
+            <a:pPr lvl="0" indent="0" marL="0">
+              <a:buNone/>
+            </a:pPr>
+            <a:r>
+              <a:rPr/>
+              <a:t>Primary Care Provider</a:t>
+            </a:r>
+          </a:p>
+          <a:p>
+            <a:pPr lvl="0" indent="0" marL="0">
+              <a:buNone/>
+            </a:pPr>
+            <a:r>
+              <a:rPr/>
+              <a:t>Gastroenterologist</a:t>
+            </a:r>
+          </a:p>
+          <a:p>
+            <a:pPr lvl="0" indent="0" marL="0">
+              <a:buNone/>
+            </a:pPr>
+            <a:r>
+              <a:rPr/>
+              <a:t>Medical Oncologist (chemotherapy)</a:t>
+            </a:r>
+          </a:p>
+          <a:p>
+            <a:pPr lvl="0" indent="0" marL="0">
+              <a:buNone/>
+            </a:pPr>
+            <a:r>
+              <a:rPr/>
+              <a:t>Radiation Oncologist (radiation)</a:t>
+            </a:r>
+          </a:p>
+          <a:p>
+            <a:pPr lvl="0" indent="0" marL="0">
+              <a:buNone/>
+            </a:pPr>
+            <a:r>
+              <a:rPr/>
+              <a:t>Surgeons</a:t>
+            </a:r>
+          </a:p>
+          <a:p>
+            <a:pPr lvl="0"/>
+            <a:r>
+              <a:rPr/>
+              <a:t>Jonathan Salo MD</a:t>
+            </a:r>
+          </a:p>
+          <a:p>
+            <a:pPr lvl="0"/>
+            <a:r>
+              <a:rPr/>
+              <a:t>Kelli Salter MD</a:t>
+            </a:r>
+          </a:p>
+          <a:p>
+            <a:pPr lvl="0"/>
+            <a:r>
+              <a:rPr/>
+              <a:t>Michael Roach MD</a:t>
+            </a:r>
+          </a:p>
+        </p:txBody>
+      </p:sp>
+    </p:spTree>
+  </p:cSld>
+</p:sld>
+</file>
+
+<file path=ppt/slides/slide58.xml><?xml version="1.0" encoding="utf-8"?>
+<p:sld xmlns:a="http://schemas.openxmlformats.org/drawingml/2006/main" xmlns:r="http://schemas.openxmlformats.org/officeDocument/2006/relationships" xmlns:p="http://schemas.openxmlformats.org/presentationml/2006/main">
+  <p:cSld>
+    <p:spTree>
+      <p:nvGrpSpPr>
+        <p:cNvPr id="1" name=""/>
+        <p:cNvGrpSpPr/>
+        <p:nvPr/>
+      </p:nvGrpSpPr>
+      <p:grpSpPr>
+        <a:xfrm>
+          <a:off x="0" y="0"/>
+          <a:ext cx="0" cy="0"/>
+          <a:chOff x="0" y="0"/>
+          <a:chExt cx="0" cy="0"/>
+        </a:xfrm>
+      </p:grpSpPr>
+      <p:sp>
+        <p:nvSpPr>
+          <p:cNvPr id="2" name="Title 1"/>
+          <p:cNvSpPr>
+            <a:spLocks noGrp="1"/>
+          </p:cNvSpPr>
+          <p:nvPr>
+            <p:ph type="title"/>
+          </p:nvPr>
+        </p:nvSpPr>
+        <p:spPr>
+          <a:xfrm>
+            <a:off x="284309" y="205979"/>
+            <a:ext cx="8552330" cy="662317"/>
+          </a:xfrm>
+        </p:spPr>
+        <p:txBody>
+          <a:bodyPr/>
+          <a:lstStyle/>
+          <a:p>
+            <a:pPr lvl="0" indent="0" marL="0">
+              <a:buNone/>
+            </a:pPr>
+            <a:r>
+              <a:rPr/>
               <a:t>Team Members - Support Staff</a:t>
             </a:r>
           </a:p>
@@ -9731,21 +9832,7 @@
             </a:pPr>
             <a:r>
               <a:rPr/>
-              <a:t>Navigators</a:t>
-            </a:r>
-          </a:p>
-          <a:p>
-            <a:pPr lvl="0"/>
-            <a:r>
-              <a:rPr/>
-              <a:t>Laura Swift</a:t>
-            </a:r>
-          </a:p>
-          <a:p>
-            <a:pPr lvl="0"/>
-            <a:r>
-              <a:rPr/>
-              <a:t>Lorna Espinal</a:t>
+              <a:t>Navigators: Laura Swift RN &amp; Lorna Espinal RN</a:t>
             </a:r>
           </a:p>
           <a:p>
@@ -9948,7 +10035,7 @@
             <a:pPr lvl="0"/>
             <a:r>
               <a:rPr/>
-              <a:t>Removes tumor and lower 1/3 esophagus</a:t>
+              <a:t>Removes tumor and lower 1/2 esophagus</a:t>
             </a:r>
           </a:p>
           <a:p>

--- a/lci_esophagectomy.pptx
+++ b/lci_esophagectomy.pptx
@@ -63,6 +63,8 @@
     <p:sldId id="311" r:id="rId57"/>
     <p:sldId id="312" r:id="rId58"/>
     <p:sldId id="313" r:id="rId59"/>
+    <p:sldId id="314" r:id="rId60"/>
+    <p:sldId id="315" r:id="rId61"/>
   </p:sldIdLst>
   <p:sldSz cx="9144000" cy="5143500" type="screen16x9"/>
   <p:notesSz cx="6858000" cy="9144000"/>
@@ -9220,7 +9222,7 @@
             </a:pPr>
             <a:r>
               <a:rPr/>
-              <a:t>Jejunostomy Removal</a:t>
+              <a:t>Second Follow Up Visit</a:t>
             </a:r>
           </a:p>
         </p:txBody>
@@ -9245,25 +9247,35 @@
             </a:pPr>
             <a:r>
               <a:rPr/>
-              <a:t>Jejunostomy tube is removed in the office once you can take in enough nutrients by mouth</a:t>
-            </a:r>
-          </a:p>
-          <a:p>
-            <a:pPr lvl="0" indent="0" marL="0">
-              <a:buNone/>
-            </a:pPr>
-            <a:r>
-              <a:rPr/>
-              <a:t>Removal usually around 8 weeks after surgery</a:t>
-            </a:r>
-          </a:p>
-          <a:p>
-            <a:pPr lvl="0" indent="0" marL="0">
-              <a:buNone/>
-            </a:pPr>
-            <a:r>
-              <a:rPr/>
-              <a:t>May take 5 minutes and some local anesthetic to loosen up the tube for removal.</a:t>
+              <a:t>4-5 weeks after first post-operative visit</a:t>
+            </a:r>
+          </a:p>
+          <a:p>
+            <a:pPr lvl="0"/>
+            <a:r>
+              <a:rPr/>
+              <a:t>Discuss diet</a:t>
+            </a:r>
+          </a:p>
+          <a:p>
+            <a:pPr lvl="0"/>
+            <a:r>
+              <a:rPr/>
+              <a:t>Discuss medicines</a:t>
+            </a:r>
+          </a:p>
+          <a:p>
+            <a:pPr lvl="0"/>
+            <a:r>
+              <a:rPr/>
+              <a:t>Plan for jejunostomy removal</a:t>
+            </a:r>
+          </a:p>
+          <a:p>
+            <a:pPr lvl="0"/>
+            <a:r>
+              <a:rPr/>
+              <a:t>Evaluate readiness for chemotherapy after surgery (usually 6 weeks)</a:t>
             </a:r>
           </a:p>
         </p:txBody>
@@ -9315,7 +9327,7 @@
             </a:pPr>
             <a:r>
               <a:rPr/>
-              <a:t>Nutritional Monitoring after Surgery</a:t>
+              <a:t>Eating after Surgery</a:t>
             </a:r>
           </a:p>
         </p:txBody>
@@ -9340,28 +9352,25 @@
             </a:pPr>
             <a:r>
               <a:rPr/>
-              <a:t>You may have difficulty absorbing some nutrients:</a:t>
-            </a:r>
-          </a:p>
-          <a:p>
-            <a:pPr lvl="0"/>
-            <a:r>
-              <a:rPr/>
-              <a:t>Iron</a:t>
-            </a:r>
-          </a:p>
-          <a:p>
-            <a:pPr lvl="0"/>
-            <a:r>
-              <a:rPr/>
-              <a:t>Vitamin B12</a:t>
-            </a:r>
-          </a:p>
-          <a:p>
-            <a:pPr lvl="0"/>
-            <a:r>
-              <a:rPr/>
-              <a:t>Vitamin D</a:t>
+              <a:t>First Postoperative Visit: Start soft foods (Phase I diet)</a:t>
+            </a:r>
+          </a:p>
+          <a:p>
+            <a:pPr lvl="0" indent="0" marL="0">
+              <a:buNone/>
+            </a:pPr>
+            <a:r>
+              <a:rPr/>
+              <a:t>Weekly virtual visits with dietitian</a:t>
+            </a:r>
+          </a:p>
+          <a:p>
+            <a:pPr lvl="0" indent="0" marL="0">
+              <a:buNone/>
+            </a:pPr>
+            <a:r>
+              <a:rPr/>
+              <a:t>Jejunostomy removal generally at 8 weeks after surgery</a:t>
             </a:r>
           </a:p>
         </p:txBody>
@@ -9413,7 +9422,7 @@
             </a:pPr>
             <a:r>
               <a:rPr/>
-              <a:t>Nutritional Monitoring after Surgery</a:t>
+              <a:t>Jejunostomy Removal</a:t>
             </a:r>
           </a:p>
         </p:txBody>
@@ -9438,28 +9447,25 @@
             </a:pPr>
             <a:r>
               <a:rPr/>
-              <a:t>About 3 months after the jejunostomy tube is removed, we will check blood levels:</a:t>
-            </a:r>
-          </a:p>
-          <a:p>
-            <a:pPr lvl="0"/>
-            <a:r>
-              <a:rPr/>
-              <a:t>Iron (ferritin)</a:t>
-            </a:r>
-          </a:p>
-          <a:p>
-            <a:pPr lvl="0"/>
-            <a:r>
-              <a:rPr/>
-              <a:t>Vitamin B12</a:t>
-            </a:r>
-          </a:p>
-          <a:p>
-            <a:pPr lvl="0"/>
-            <a:r>
-              <a:rPr/>
-              <a:t>Vitamin D</a:t>
+              <a:t>Jejunostomy tube is removed in the office once you can take in enough nutrients by mouth</a:t>
+            </a:r>
+          </a:p>
+          <a:p>
+            <a:pPr lvl="0" indent="0" marL="0">
+              <a:buNone/>
+            </a:pPr>
+            <a:r>
+              <a:rPr/>
+              <a:t>Removal usually around 8 weeks after surgery (may be longer if chemotherapy planned after surgery)</a:t>
+            </a:r>
+          </a:p>
+          <a:p>
+            <a:pPr lvl="0" indent="0" marL="0">
+              <a:buNone/>
+            </a:pPr>
+            <a:r>
+              <a:rPr/>
+              <a:t>May take 30 minutes and some local anesthetic to loosen up the tube for removal.</a:t>
             </a:r>
           </a:p>
         </p:txBody>
@@ -9511,7 +9517,7 @@
             </a:pPr>
             <a:r>
               <a:rPr/>
-              <a:t>Nutritional Replacements after Surgery</a:t>
+              <a:t>Nutritional Monitoring after Surgery</a:t>
             </a:r>
           </a:p>
         </p:txBody>
@@ -9536,51 +9542,28 @@
             </a:pPr>
             <a:r>
               <a:rPr/>
-              <a:t>Vitamin or iron replacements can be ordered by:</a:t>
-            </a:r>
-          </a:p>
-          <a:p>
-            <a:pPr lvl="0"/>
-            <a:r>
-              <a:rPr/>
-              <a:t>Primary Care Provider (PCP)</a:t>
-            </a:r>
-          </a:p>
-          <a:p>
-            <a:pPr lvl="0"/>
-            <a:r>
-              <a:rPr/>
-              <a:t>Medical Oncologist</a:t>
-            </a:r>
-          </a:p>
-          <a:p>
-            <a:pPr lvl="0"/>
-            <a:r>
-              <a:rPr/>
-              <a:t>Surgeon</a:t>
-            </a:r>
-          </a:p>
-          <a:p>
-            <a:pPr lvl="0" indent="0" marL="0">
-              <a:buNone/>
-            </a:pPr>
-            <a:r>
-              <a:rPr/>
-              <a:t>If levels are low</a:t>
-            </a:r>
-          </a:p>
-          <a:p>
-            <a:pPr lvl="0"/>
-            <a:r>
-              <a:rPr/>
-              <a:t>Replacement</a:t>
-            </a:r>
-          </a:p>
-          <a:p>
-            <a:pPr lvl="0"/>
-            <a:r>
-              <a:rPr/>
-              <a:t>Repeat testing in 3-6 months</a:t>
+              <a:t>You may have difficulty absorbing some nutrients:</a:t>
+            </a:r>
+          </a:p>
+          <a:p>
+            <a:pPr lvl="0"/>
+            <a:r>
+              <a:rPr/>
+              <a:t>Iron</a:t>
+            </a:r>
+          </a:p>
+          <a:p>
+            <a:pPr lvl="0"/>
+            <a:r>
+              <a:rPr/>
+              <a:t>Vitamin B12</a:t>
+            </a:r>
+          </a:p>
+          <a:p>
+            <a:pPr lvl="0"/>
+            <a:r>
+              <a:rPr/>
+              <a:t>Vitamin D</a:t>
             </a:r>
           </a:p>
         </p:txBody>
@@ -9632,7 +9615,7 @@
             </a:pPr>
             <a:r>
               <a:rPr/>
-              <a:t>Team Members - Physicians</a:t>
+              <a:t>Nutritional Monitoring after Surgery</a:t>
             </a:r>
           </a:p>
         </p:txBody>
@@ -9657,64 +9640,28 @@
             </a:pPr>
             <a:r>
               <a:rPr/>
-              <a:t>Primary Care Provider</a:t>
-            </a:r>
-          </a:p>
-          <a:p>
-            <a:pPr lvl="0" indent="0" marL="0">
-              <a:buNone/>
-            </a:pPr>
-            <a:r>
-              <a:rPr/>
-              <a:t>Gastroenterologist</a:t>
-            </a:r>
-          </a:p>
-          <a:p>
-            <a:pPr lvl="0" indent="0" marL="0">
-              <a:buNone/>
-            </a:pPr>
-            <a:r>
-              <a:rPr/>
-              <a:t>Medical Oncologist (chemotherapy)</a:t>
-            </a:r>
-          </a:p>
-          <a:p>
-            <a:pPr lvl="0" indent="0" marL="0">
-              <a:buNone/>
-            </a:pPr>
-            <a:r>
-              <a:rPr/>
-              <a:t>Radiation Oncologist (radiation)</a:t>
-            </a:r>
-          </a:p>
-          <a:p>
-            <a:pPr lvl="0" indent="0" marL="0">
-              <a:buNone/>
-            </a:pPr>
-            <a:r>
-              <a:rPr/>
-              <a:t>Surgeons</a:t>
-            </a:r>
-          </a:p>
-          <a:p>
-            <a:pPr lvl="0"/>
-            <a:r>
-              <a:rPr/>
-              <a:t>Jonathan Salo MD</a:t>
-            </a:r>
-          </a:p>
-          <a:p>
-            <a:pPr lvl="0"/>
-            <a:r>
-              <a:rPr/>
-              <a:t>Kelli Salter MD</a:t>
-            </a:r>
-          </a:p>
-          <a:p>
-            <a:pPr lvl="0"/>
-            <a:r>
-              <a:rPr/>
-              <a:t>Michael Roach MD</a:t>
+              <a:t>About 3 months after the jejunostomy tube is removed, we will check blood levels:</a:t>
+            </a:r>
+          </a:p>
+          <a:p>
+            <a:pPr lvl="0"/>
+            <a:r>
+              <a:rPr/>
+              <a:t>Iron (ferritin)</a:t>
+            </a:r>
+          </a:p>
+          <a:p>
+            <a:pPr lvl="0"/>
+            <a:r>
+              <a:rPr/>
+              <a:t>Vitamin B12</a:t>
+            </a:r>
+          </a:p>
+          <a:p>
+            <a:pPr lvl="0"/>
+            <a:r>
+              <a:rPr/>
+              <a:t>Vitamin D</a:t>
             </a:r>
           </a:p>
         </p:txBody>
@@ -9766,7 +9713,7 @@
             </a:pPr>
             <a:r>
               <a:rPr/>
-              <a:t>Team Members - Support Staff</a:t>
+              <a:t>Nutritional Replacements after Surgery</a:t>
             </a:r>
           </a:p>
         </p:txBody>
@@ -9791,57 +9738,185 @@
             </a:pPr>
             <a:r>
               <a:rPr/>
-              <a:t>Physician Assistant - Kate Duncan PA-C</a:t>
-            </a:r>
-          </a:p>
-          <a:p>
-            <a:pPr lvl="0" indent="0" marL="0">
-              <a:buNone/>
-            </a:pPr>
-            <a:r>
-              <a:rPr/>
-              <a:t>Dietitian - Liz Koch</a:t>
-            </a:r>
-          </a:p>
-          <a:p>
-            <a:pPr lvl="0" indent="0" marL="0">
-              <a:buNone/>
-            </a:pPr>
-            <a:r>
-              <a:rPr/>
-              <a:t>Nurses</a:t>
-            </a:r>
-          </a:p>
-          <a:p>
-            <a:pPr lvl="0"/>
-            <a:r>
-              <a:rPr/>
-              <a:t>Matthew Carpenter RN</a:t>
-            </a:r>
-          </a:p>
-          <a:p>
-            <a:pPr lvl="0"/>
-            <a:r>
-              <a:rPr/>
-              <a:t>Brandon Galloway LPN</a:t>
-            </a:r>
-          </a:p>
-          <a:p>
-            <a:pPr lvl="0" indent="0" marL="0">
-              <a:buNone/>
-            </a:pPr>
-            <a:r>
-              <a:rPr/>
-              <a:t>Navigators: Laura Swift RN &amp; Lorna Espinal RN</a:t>
-            </a:r>
-          </a:p>
-          <a:p>
-            <a:pPr lvl="0" indent="0" marL="0">
-              <a:buNone/>
-            </a:pPr>
-            <a:r>
-              <a:rPr/>
-              <a:t>Care Coordinator - Karen Julian-Martinez</a:t>
+              <a:t>Vitamin or iron replacements can be ordered by:</a:t>
+            </a:r>
+          </a:p>
+          <a:p>
+            <a:pPr lvl="0"/>
+            <a:r>
+              <a:rPr/>
+              <a:t>Primary Care Provider (PCP)</a:t>
+            </a:r>
+          </a:p>
+          <a:p>
+            <a:pPr lvl="0"/>
+            <a:r>
+              <a:rPr/>
+              <a:t>Medical Oncologist</a:t>
+            </a:r>
+          </a:p>
+          <a:p>
+            <a:pPr lvl="0"/>
+            <a:r>
+              <a:rPr/>
+              <a:t>Surgeon</a:t>
+            </a:r>
+          </a:p>
+          <a:p>
+            <a:pPr lvl="0" indent="0" marL="0">
+              <a:buNone/>
+            </a:pPr>
+            <a:r>
+              <a:rPr/>
+              <a:t>If levels are low</a:t>
+            </a:r>
+          </a:p>
+          <a:p>
+            <a:pPr lvl="0"/>
+            <a:r>
+              <a:rPr/>
+              <a:t>Replacement</a:t>
+            </a:r>
+          </a:p>
+          <a:p>
+            <a:pPr lvl="0"/>
+            <a:r>
+              <a:rPr/>
+              <a:t>Repeat testing in 3-6 months</a:t>
+            </a:r>
+          </a:p>
+        </p:txBody>
+      </p:sp>
+    </p:spTree>
+  </p:cSld>
+</p:sld>
+</file>
+
+<file path=ppt/slides/slide59.xml><?xml version="1.0" encoding="utf-8"?>
+<p:sld xmlns:a="http://schemas.openxmlformats.org/drawingml/2006/main" xmlns:r="http://schemas.openxmlformats.org/officeDocument/2006/relationships" xmlns:p="http://schemas.openxmlformats.org/presentationml/2006/main">
+  <p:cSld>
+    <p:spTree>
+      <p:nvGrpSpPr>
+        <p:cNvPr id="1" name=""/>
+        <p:cNvGrpSpPr/>
+        <p:nvPr/>
+      </p:nvGrpSpPr>
+      <p:grpSpPr>
+        <a:xfrm>
+          <a:off x="0" y="0"/>
+          <a:ext cx="0" cy="0"/>
+          <a:chOff x="0" y="0"/>
+          <a:chExt cx="0" cy="0"/>
+        </a:xfrm>
+      </p:grpSpPr>
+      <p:sp>
+        <p:nvSpPr>
+          <p:cNvPr id="2" name="Title 1"/>
+          <p:cNvSpPr>
+            <a:spLocks noGrp="1"/>
+          </p:cNvSpPr>
+          <p:nvPr>
+            <p:ph type="title"/>
+          </p:nvPr>
+        </p:nvSpPr>
+        <p:spPr>
+          <a:xfrm>
+            <a:off x="284309" y="205979"/>
+            <a:ext cx="8552330" cy="662317"/>
+          </a:xfrm>
+        </p:spPr>
+        <p:txBody>
+          <a:bodyPr/>
+          <a:lstStyle/>
+          <a:p>
+            <a:pPr lvl="0" indent="0" marL="0">
+              <a:buNone/>
+            </a:pPr>
+            <a:r>
+              <a:rPr/>
+              <a:t>Team Members - Physicians</a:t>
+            </a:r>
+          </a:p>
+        </p:txBody>
+      </p:sp>
+      <p:sp>
+        <p:nvSpPr>
+          <p:cNvPr id="3" name="Content Placeholder 2"/>
+          <p:cNvSpPr>
+            <a:spLocks noGrp="1"/>
+          </p:cNvSpPr>
+          <p:nvPr>
+            <p:ph idx="1"/>
+          </p:nvPr>
+        </p:nvSpPr>
+        <p:spPr/>
+        <p:txBody>
+          <a:bodyPr/>
+          <a:lstStyle/>
+          <a:p>
+            <a:pPr lvl="0" indent="0" marL="0">
+              <a:buNone/>
+            </a:pPr>
+            <a:r>
+              <a:rPr/>
+              <a:t>Primary Care Provider</a:t>
+            </a:r>
+          </a:p>
+          <a:p>
+            <a:pPr lvl="0" indent="0" marL="0">
+              <a:buNone/>
+            </a:pPr>
+            <a:r>
+              <a:rPr/>
+              <a:t>Gastroenterologist</a:t>
+            </a:r>
+          </a:p>
+          <a:p>
+            <a:pPr lvl="0" indent="0" marL="0">
+              <a:buNone/>
+            </a:pPr>
+            <a:r>
+              <a:rPr/>
+              <a:t>Medical Oncologist (chemotherapy)</a:t>
+            </a:r>
+          </a:p>
+          <a:p>
+            <a:pPr lvl="0" indent="0" marL="0">
+              <a:buNone/>
+            </a:pPr>
+            <a:r>
+              <a:rPr/>
+              <a:t>Radiation Oncologist (radiation)</a:t>
+            </a:r>
+          </a:p>
+          <a:p>
+            <a:pPr lvl="0" indent="0" marL="0">
+              <a:buNone/>
+            </a:pPr>
+            <a:r>
+              <a:rPr/>
+              <a:t>Surgeons</a:t>
+            </a:r>
+          </a:p>
+          <a:p>
+            <a:pPr lvl="0"/>
+            <a:r>
+              <a:rPr/>
+              <a:t>Jonathan Salo MD</a:t>
+            </a:r>
+          </a:p>
+          <a:p>
+            <a:pPr lvl="0"/>
+            <a:r>
+              <a:rPr/>
+              <a:t>Kelli Salter MD</a:t>
+            </a:r>
+          </a:p>
+          <a:p>
+            <a:pPr lvl="0"/>
+            <a:r>
+              <a:rPr/>
+              <a:t>Michael Roach MD</a:t>
             </a:r>
           </a:p>
         </p:txBody>
@@ -9965,6 +10040,133 @@
           </a:ln>
         </p:spPr>
       </p:pic>
+    </p:spTree>
+  </p:cSld>
+</p:sld>
+</file>
+
+<file path=ppt/slides/slide60.xml><?xml version="1.0" encoding="utf-8"?>
+<p:sld xmlns:a="http://schemas.openxmlformats.org/drawingml/2006/main" xmlns:r="http://schemas.openxmlformats.org/officeDocument/2006/relationships" xmlns:p="http://schemas.openxmlformats.org/presentationml/2006/main">
+  <p:cSld>
+    <p:spTree>
+      <p:nvGrpSpPr>
+        <p:cNvPr id="1" name=""/>
+        <p:cNvGrpSpPr/>
+        <p:nvPr/>
+      </p:nvGrpSpPr>
+      <p:grpSpPr>
+        <a:xfrm>
+          <a:off x="0" y="0"/>
+          <a:ext cx="0" cy="0"/>
+          <a:chOff x="0" y="0"/>
+          <a:chExt cx="0" cy="0"/>
+        </a:xfrm>
+      </p:grpSpPr>
+      <p:sp>
+        <p:nvSpPr>
+          <p:cNvPr id="2" name="Title 1"/>
+          <p:cNvSpPr>
+            <a:spLocks noGrp="1"/>
+          </p:cNvSpPr>
+          <p:nvPr>
+            <p:ph type="title"/>
+          </p:nvPr>
+        </p:nvSpPr>
+        <p:spPr>
+          <a:xfrm>
+            <a:off x="284309" y="205979"/>
+            <a:ext cx="8552330" cy="662317"/>
+          </a:xfrm>
+        </p:spPr>
+        <p:txBody>
+          <a:bodyPr/>
+          <a:lstStyle/>
+          <a:p>
+            <a:pPr lvl="0" indent="0" marL="0">
+              <a:buNone/>
+            </a:pPr>
+            <a:r>
+              <a:rPr/>
+              <a:t>Team Members - Support Staff</a:t>
+            </a:r>
+          </a:p>
+        </p:txBody>
+      </p:sp>
+      <p:sp>
+        <p:nvSpPr>
+          <p:cNvPr id="3" name="Content Placeholder 2"/>
+          <p:cNvSpPr>
+            <a:spLocks noGrp="1"/>
+          </p:cNvSpPr>
+          <p:nvPr>
+            <p:ph idx="1"/>
+          </p:nvPr>
+        </p:nvSpPr>
+        <p:spPr/>
+        <p:txBody>
+          <a:bodyPr/>
+          <a:lstStyle/>
+          <a:p>
+            <a:pPr lvl="0" indent="0" marL="0">
+              <a:buNone/>
+            </a:pPr>
+            <a:r>
+              <a:rPr/>
+              <a:t>Physician Assistant - Kate Duncan PA-C</a:t>
+            </a:r>
+          </a:p>
+          <a:p>
+            <a:pPr lvl="0" indent="0" marL="0">
+              <a:buNone/>
+            </a:pPr>
+            <a:r>
+              <a:rPr/>
+              <a:t>Dietitian - Liz Koch</a:t>
+            </a:r>
+          </a:p>
+          <a:p>
+            <a:pPr lvl="0" indent="0" marL="0">
+              <a:buNone/>
+            </a:pPr>
+            <a:r>
+              <a:rPr/>
+              <a:t>Nurses</a:t>
+            </a:r>
+          </a:p>
+          <a:p>
+            <a:pPr lvl="0"/>
+            <a:r>
+              <a:rPr/>
+              <a:t>Matthew Carpenter RN</a:t>
+            </a:r>
+          </a:p>
+          <a:p>
+            <a:pPr lvl="0"/>
+            <a:r>
+              <a:rPr/>
+              <a:t>Brandon Galloway LPN</a:t>
+            </a:r>
+          </a:p>
+          <a:p>
+            <a:pPr lvl="0" indent="0" marL="0">
+              <a:buNone/>
+            </a:pPr>
+            <a:r>
+              <a:rPr/>
+              <a:t>Navigators: Laura Swift RN &amp; Lorna Espinal RN</a:t>
+            </a:r>
+          </a:p>
+          <a:p>
+            <a:pPr lvl="0" indent="0" marL="0">
+              <a:buNone/>
+            </a:pPr>
+            <a:r>
+              <a:rPr/>
+              <a:t>Care Coordinator - Karen Julian-Martinez</a:t>
+            </a:r>
+          </a:p>
+        </p:txBody>
+      </p:sp>
     </p:spTree>
   </p:cSld>
 </p:sld>
